--- a/output/wordlabs-make-3day.pptx
+++ b/output/wordlabs-make-3day.pptx
@@ -4240,7 +4240,7 @@
                 <a:ea typeface="Calibri" pitchFamily="34" charset="-122"/>
                 <a:cs typeface="Calibri" pitchFamily="34" charset="-120"/>
               </a:rPr>
-              <a:t>"to create or produce something"</a:t>
+              <a:t>"to create or produce"</a:t>
             </a:r>
             <a:endParaRPr lang="en-US" sz="2200" dirty="0"/>
           </a:p>
@@ -4279,7 +4279,7 @@
                 <a:ea typeface="Calibri" pitchFamily="34" charset="-122"/>
                 <a:cs typeface="Calibri" pitchFamily="34" charset="-120"/>
               </a:rPr>
-              <a:t>Origin: Old English: macian</a:t>
+              <a:t>Origin: Latin: machinare</a:t>
             </a:r>
             <a:endParaRPr lang="en-US" sz="1300" dirty="0"/>
           </a:p>
@@ -5288,7 +5288,7 @@
                 <a:ea typeface="Calibri" pitchFamily="34" charset="-122"/>
                 <a:cs typeface="Calibri" pitchFamily="34" charset="-120"/>
               </a:rPr>
-              <a:t>Word Labs  •  wordlabs.app  •  Root: 'make' = to create or produce something</a:t>
+              <a:t>Word Labs  •  wordlabs.app  •  Root: 'make' = to create or produce</a:t>
             </a:r>
             <a:endParaRPr lang="en-US" sz="800" dirty="0"/>
           </a:p>
@@ -5928,7 +5928,7 @@
                 <a:ea typeface="Calibri" pitchFamily="34" charset="-122"/>
                 <a:cs typeface="Calibri" pitchFamily="34" charset="-120"/>
               </a:rPr>
-              <a:t>Word Labs  •  wordlabs.app  •  Root: 'make' = to create or produce something</a:t>
+              <a:t>Word Labs  •  wordlabs.app  •  Root: 'make' = to create or produce</a:t>
             </a:r>
             <a:endParaRPr lang="en-US" sz="800" dirty="0"/>
           </a:p>
@@ -6057,7 +6057,7 @@
                 <a:ea typeface="Calibri" pitchFamily="34" charset="-122"/>
                 <a:cs typeface="Calibri" pitchFamily="34" charset="-120"/>
               </a:rPr>
-              <a:t>homemaker</a:t>
+              <a:t>dressmaker</a:t>
             </a:r>
             <a:pPr algn="l" indent="0" marL="0">
               <a:buNone/>
@@ -6071,7 +6071,7 @@
                 <a:ea typeface="Calibri" pitchFamily="34" charset="-122"/>
                 <a:cs typeface="Calibri" pitchFamily="34" charset="-120"/>
               </a:rPr>
-              <a:t> decided to </a:t>
+              <a:t> used a </a:t>
             </a:r>
             <a:pPr algn="l" indent="0" marL="0">
               <a:buNone/>
@@ -6088,7 +6088,7 @@
                 <a:ea typeface="Calibri" pitchFamily="34" charset="-122"/>
                 <a:cs typeface="Calibri" pitchFamily="34" charset="-120"/>
               </a:rPr>
-              <a:t>remake</a:t>
+              <a:t>makeshift</a:t>
             </a:r>
             <a:pPr algn="l" indent="0" marL="0">
               <a:buNone/>
@@ -6102,7 +6102,7 @@
                 <a:ea typeface="Calibri" pitchFamily="34" charset="-122"/>
                 <a:cs typeface="Calibri" pitchFamily="34" charset="-120"/>
               </a:rPr>
-              <a:t> the old quilt using brightly coloured fabric.</a:t>
+              <a:t> table to display her latest designs at the market.</a:t>
             </a:r>
             <a:endParaRPr lang="en-US" sz="1800" dirty="0"/>
           </a:p>
@@ -6257,7 +6257,7 @@
                 <a:ea typeface="Trebuchet MS" pitchFamily="34" charset="-122"/>
                 <a:cs typeface="Trebuchet MS" pitchFamily="34" charset="-120"/>
               </a:rPr>
-              <a:t>homemaker</a:t>
+              <a:t>dressmaker</a:t>
             </a:r>
             <a:endParaRPr lang="en-US" sz="1400" dirty="0"/>
           </a:p>
@@ -6385,7 +6385,7 @@
                 <a:ea typeface="Trebuchet MS" pitchFamily="34" charset="-122"/>
                 <a:cs typeface="Trebuchet MS" pitchFamily="34" charset="-120"/>
               </a:rPr>
-              <a:t>remake</a:t>
+              <a:t>makeshift</a:t>
             </a:r>
             <a:endParaRPr lang="en-US" sz="1400" dirty="0"/>
           </a:p>
@@ -6716,7 +6716,7 @@
                 <a:ea typeface="Calibri" pitchFamily="34" charset="-122"/>
                 <a:cs typeface="Calibri" pitchFamily="34" charset="-120"/>
               </a:rPr>
-              <a:t>Word Labs  •  wordlabs.app  •  Root: 'make' = to create or produce something</a:t>
+              <a:t>Word Labs  •  wordlabs.app  •  Root: 'make' = to create or produce</a:t>
             </a:r>
             <a:endParaRPr lang="en-US" sz="800" dirty="0"/>
           </a:p>
@@ -6855,7 +6855,7 @@
                 <a:ea typeface="Trebuchet MS" pitchFamily="34" charset="-122"/>
                 <a:cs typeface="Trebuchet MS" pitchFamily="34" charset="-120"/>
               </a:rPr>
-              <a:t>homemaker</a:t>
+              <a:t>dressmaker</a:t>
             </a:r>
             <a:endParaRPr lang="en-US" sz="2800" dirty="0"/>
           </a:p>
@@ -7543,7 +7543,7 @@
                 <a:ea typeface="Calibri" pitchFamily="34" charset="-122"/>
                 <a:cs typeface="Calibri" pitchFamily="34" charset="-120"/>
               </a:rPr>
-              <a:t>Word Labs  •  wordlabs.app  •  Root: 'make' = to create or produce something</a:t>
+              <a:t>Word Labs  •  wordlabs.app  •  Root: 'make' = to create or produce</a:t>
             </a:r>
             <a:endParaRPr lang="en-US" sz="800" dirty="0"/>
           </a:p>
@@ -7682,7 +7682,7 @@
                 <a:ea typeface="Trebuchet MS" pitchFamily="34" charset="-122"/>
                 <a:cs typeface="Trebuchet MS" pitchFamily="34" charset="-120"/>
               </a:rPr>
-              <a:t>homemaker</a:t>
+              <a:t>dressmaker</a:t>
             </a:r>
             <a:endParaRPr lang="en-US" sz="2800" dirty="0"/>
           </a:p>
@@ -7821,7 +7821,7 @@
                 <a:ea typeface="Trebuchet MS" pitchFamily="34" charset="-122"/>
                 <a:cs typeface="Trebuchet MS" pitchFamily="34" charset="-120"/>
               </a:rPr>
-              <a:t>home</a:t>
+              <a:t>dress</a:t>
             </a:r>
             <a:endParaRPr lang="en-US" sz="1300" dirty="0"/>
           </a:p>
@@ -7860,7 +7860,7 @@
                 <a:ea typeface="Calibri" pitchFamily="34" charset="-122"/>
                 <a:cs typeface="Calibri" pitchFamily="34" charset="-120"/>
               </a:rPr>
-              <a:t>a place where one lives</a:t>
+              <a:t>clothing</a:t>
             </a:r>
             <a:endParaRPr lang="en-US" sz="850" dirty="0"/>
           </a:p>
@@ -7972,7 +7972,7 @@
                 <a:ea typeface="Calibri" pitchFamily="34" charset="-122"/>
                 <a:cs typeface="Calibri" pitchFamily="34" charset="-120"/>
               </a:rPr>
-              <a:t>to create or produce</a:t>
+              <a:t>to create</a:t>
             </a:r>
             <a:endParaRPr lang="en-US" sz="850" dirty="0"/>
           </a:p>
@@ -8084,7 +8084,7 @@
                 <a:ea typeface="Calibri" pitchFamily="34" charset="-122"/>
                 <a:cs typeface="Calibri" pitchFamily="34" charset="-120"/>
               </a:rPr>
-              <a:t>a person who does something</a:t>
+              <a:t>person who does</a:t>
             </a:r>
             <a:endParaRPr lang="en-US" sz="850" dirty="0"/>
           </a:p>
@@ -8640,7 +8640,7 @@
                 <a:ea typeface="Calibri" pitchFamily="34" charset="-122"/>
                 <a:cs typeface="Calibri" pitchFamily="34" charset="-120"/>
               </a:rPr>
-              <a:t>Word Labs  •  wordlabs.app  •  Root: 'make' = to create or produce something</a:t>
+              <a:t>Word Labs  •  wordlabs.app  •  Root: 'make' = to create or produce</a:t>
             </a:r>
             <a:endParaRPr lang="en-US" sz="800" dirty="0"/>
           </a:p>
@@ -8779,7 +8779,7 @@
                 <a:ea typeface="Trebuchet MS" pitchFamily="34" charset="-122"/>
                 <a:cs typeface="Trebuchet MS" pitchFamily="34" charset="-120"/>
               </a:rPr>
-              <a:t>homemaker</a:t>
+              <a:t>dressmaker</a:t>
             </a:r>
             <a:endParaRPr lang="en-US" sz="2800" dirty="0"/>
           </a:p>
@@ -8918,7 +8918,7 @@
                 <a:ea typeface="Trebuchet MS" pitchFamily="34" charset="-122"/>
                 <a:cs typeface="Trebuchet MS" pitchFamily="34" charset="-120"/>
               </a:rPr>
-              <a:t>home</a:t>
+              <a:t>dress</a:t>
             </a:r>
             <a:endParaRPr lang="en-US" sz="1300" dirty="0"/>
           </a:p>
@@ -8957,7 +8957,7 @@
                 <a:ea typeface="Calibri" pitchFamily="34" charset="-122"/>
                 <a:cs typeface="Calibri" pitchFamily="34" charset="-120"/>
               </a:rPr>
-              <a:t>a place where one lives</a:t>
+              <a:t>clothing</a:t>
             </a:r>
             <a:endParaRPr lang="en-US" sz="850" dirty="0"/>
           </a:p>
@@ -9069,7 +9069,7 @@
                 <a:ea typeface="Calibri" pitchFamily="34" charset="-122"/>
                 <a:cs typeface="Calibri" pitchFamily="34" charset="-120"/>
               </a:rPr>
-              <a:t>to create or produce</a:t>
+              <a:t>to create</a:t>
             </a:r>
             <a:endParaRPr lang="en-US" sz="850" dirty="0"/>
           </a:p>
@@ -9181,7 +9181,7 @@
                 <a:ea typeface="Calibri" pitchFamily="34" charset="-122"/>
                 <a:cs typeface="Calibri" pitchFamily="34" charset="-120"/>
               </a:rPr>
-              <a:t>a person who does something</a:t>
+              <a:t>person who does</a:t>
             </a:r>
             <a:endParaRPr lang="en-US" sz="850" dirty="0"/>
           </a:p>
@@ -9340,7 +9340,7 @@
                 <a:ea typeface="Trebuchet MS" pitchFamily="34" charset="-122"/>
                 <a:cs typeface="Trebuchet MS" pitchFamily="34" charset="-120"/>
               </a:rPr>
-              <a:t>home</a:t>
+              <a:t>dress</a:t>
             </a:r>
             <a:endParaRPr lang="en-US" sz="1400" dirty="0"/>
           </a:p>
@@ -9974,7 +9974,7 @@
                 <a:ea typeface="Calibri" pitchFamily="34" charset="-122"/>
                 <a:cs typeface="Calibri" pitchFamily="34" charset="-120"/>
               </a:rPr>
-              <a:t>Word Labs  •  wordlabs.app  •  Root: 'make' = to create or produce something</a:t>
+              <a:t>Word Labs  •  wordlabs.app  •  Root: 'make' = to create or produce</a:t>
             </a:r>
             <a:endParaRPr lang="en-US" sz="800" dirty="0"/>
           </a:p>
@@ -10113,7 +10113,7 @@
                 <a:ea typeface="Trebuchet MS" pitchFamily="34" charset="-122"/>
                 <a:cs typeface="Trebuchet MS" pitchFamily="34" charset="-120"/>
               </a:rPr>
-              <a:t>homemaker</a:t>
+              <a:t>dressmaker</a:t>
             </a:r>
             <a:endParaRPr lang="en-US" sz="2800" dirty="0"/>
           </a:p>
@@ -10252,7 +10252,7 @@
                 <a:ea typeface="Trebuchet MS" pitchFamily="34" charset="-122"/>
                 <a:cs typeface="Trebuchet MS" pitchFamily="34" charset="-120"/>
               </a:rPr>
-              <a:t>home</a:t>
+              <a:t>dress</a:t>
             </a:r>
             <a:endParaRPr lang="en-US" sz="1300" dirty="0"/>
           </a:p>
@@ -10291,7 +10291,7 @@
                 <a:ea typeface="Calibri" pitchFamily="34" charset="-122"/>
                 <a:cs typeface="Calibri" pitchFamily="34" charset="-120"/>
               </a:rPr>
-              <a:t>a place where one lives</a:t>
+              <a:t>clothing</a:t>
             </a:r>
             <a:endParaRPr lang="en-US" sz="850" dirty="0"/>
           </a:p>
@@ -10403,7 +10403,7 @@
                 <a:ea typeface="Calibri" pitchFamily="34" charset="-122"/>
                 <a:cs typeface="Calibri" pitchFamily="34" charset="-120"/>
               </a:rPr>
-              <a:t>to create or produce</a:t>
+              <a:t>to create</a:t>
             </a:r>
             <a:endParaRPr lang="en-US" sz="850" dirty="0"/>
           </a:p>
@@ -10515,7 +10515,7 @@
                 <a:ea typeface="Calibri" pitchFamily="34" charset="-122"/>
                 <a:cs typeface="Calibri" pitchFamily="34" charset="-120"/>
               </a:rPr>
-              <a:t>a person who does something</a:t>
+              <a:t>person who does</a:t>
             </a:r>
             <a:endParaRPr lang="en-US" sz="850" dirty="0"/>
           </a:p>
@@ -10674,7 +10674,7 @@
                 <a:ea typeface="Trebuchet MS" pitchFamily="34" charset="-122"/>
                 <a:cs typeface="Trebuchet MS" pitchFamily="34" charset="-120"/>
               </a:rPr>
-              <a:t>home</a:t>
+              <a:t>dress</a:t>
             </a:r>
             <a:endParaRPr lang="en-US" sz="1400" dirty="0"/>
           </a:p>
@@ -10991,7 +10991,7 @@
         </p:nvSpPr>
         <p:spPr>
           <a:xfrm>
-            <a:off x="2124837" y="4169664"/>
+            <a:off x="2023872" y="4169664"/>
             <a:ext cx="685800" cy="475488"/>
           </a:xfrm>
           <a:prstGeom prst="rect">
@@ -11018,7 +11018,7 @@
         </p:nvSpPr>
         <p:spPr>
           <a:xfrm>
-            <a:off x="2124837" y="4169664"/>
+            <a:off x="2023872" y="4169664"/>
             <a:ext cx="685800" cy="475488"/>
           </a:xfrm>
           <a:prstGeom prst="rect">
@@ -11043,7 +11043,7 @@
                 <a:ea typeface="Trebuchet MS" pitchFamily="34" charset="-122"/>
                 <a:cs typeface="Trebuchet MS" pitchFamily="34" charset="-120"/>
               </a:rPr>
-              <a:t>h</a:t>
+              <a:t>d</a:t>
             </a:r>
             <a:endParaRPr lang="en-US" sz="900" dirty="0"/>
           </a:p>
@@ -11057,7 +11057,7 @@
         </p:nvSpPr>
         <p:spPr>
           <a:xfrm>
-            <a:off x="3033522" y="4169664"/>
+            <a:off x="2831592" y="4169664"/>
             <a:ext cx="685800" cy="475488"/>
           </a:xfrm>
           <a:prstGeom prst="rect">
@@ -11084,7 +11084,7 @@
         </p:nvSpPr>
         <p:spPr>
           <a:xfrm>
-            <a:off x="3033522" y="4169664"/>
+            <a:off x="2831592" y="4169664"/>
             <a:ext cx="685800" cy="475488"/>
           </a:xfrm>
           <a:prstGeom prst="rect">
@@ -11109,7 +11109,7 @@
                 <a:ea typeface="Trebuchet MS" pitchFamily="34" charset="-122"/>
                 <a:cs typeface="Trebuchet MS" pitchFamily="34" charset="-120"/>
               </a:rPr>
-              <a:t>o</a:t>
+              <a:t>r</a:t>
             </a:r>
             <a:endParaRPr lang="en-US" sz="900" dirty="0"/>
           </a:p>
@@ -11123,7 +11123,7 @@
         </p:nvSpPr>
         <p:spPr>
           <a:xfrm>
-            <a:off x="3942207" y="4169664"/>
+            <a:off x="3639312" y="4169664"/>
             <a:ext cx="685800" cy="475488"/>
           </a:xfrm>
           <a:prstGeom prst="rect">
@@ -11150,7 +11150,7 @@
         </p:nvSpPr>
         <p:spPr>
           <a:xfrm>
-            <a:off x="3942207" y="4169664"/>
+            <a:off x="3639312" y="4169664"/>
             <a:ext cx="685800" cy="475488"/>
           </a:xfrm>
           <a:prstGeom prst="rect">
@@ -11175,7 +11175,7 @@
                 <a:ea typeface="Trebuchet MS" pitchFamily="34" charset="-122"/>
                 <a:cs typeface="Trebuchet MS" pitchFamily="34" charset="-120"/>
               </a:rPr>
-              <a:t>me</a:t>
+              <a:t>e</a:t>
             </a:r>
             <a:endParaRPr lang="en-US" sz="900" dirty="0"/>
           </a:p>
@@ -11189,7 +11189,7 @@
         </p:nvSpPr>
         <p:spPr>
           <a:xfrm>
-            <a:off x="4850892" y="4169664"/>
+            <a:off x="4447032" y="4169664"/>
             <a:ext cx="685800" cy="475488"/>
           </a:xfrm>
           <a:prstGeom prst="rect">
@@ -11216,7 +11216,7 @@
         </p:nvSpPr>
         <p:spPr>
           <a:xfrm>
-            <a:off x="4850892" y="4169664"/>
+            <a:off x="4447032" y="4169664"/>
             <a:ext cx="685800" cy="475488"/>
           </a:xfrm>
           <a:prstGeom prst="rect">
@@ -11241,7 +11241,7 @@
                 <a:ea typeface="Trebuchet MS" pitchFamily="34" charset="-122"/>
                 <a:cs typeface="Trebuchet MS" pitchFamily="34" charset="-120"/>
               </a:rPr>
-              <a:t>m</a:t>
+              <a:t>ss</a:t>
             </a:r>
             <a:endParaRPr lang="en-US" sz="900" dirty="0"/>
           </a:p>
@@ -11255,7 +11255,7 @@
         </p:nvSpPr>
         <p:spPr>
           <a:xfrm>
-            <a:off x="5759577" y="4169664"/>
+            <a:off x="5254752" y="4169664"/>
             <a:ext cx="685800" cy="475488"/>
           </a:xfrm>
           <a:prstGeom prst="rect">
@@ -11282,7 +11282,7 @@
         </p:nvSpPr>
         <p:spPr>
           <a:xfrm>
-            <a:off x="5759577" y="4169664"/>
+            <a:off x="5254752" y="4169664"/>
             <a:ext cx="685800" cy="475488"/>
           </a:xfrm>
           <a:prstGeom prst="rect">
@@ -11307,7 +11307,7 @@
                 <a:ea typeface="Trebuchet MS" pitchFamily="34" charset="-122"/>
                 <a:cs typeface="Trebuchet MS" pitchFamily="34" charset="-120"/>
               </a:rPr>
-              <a:t>a</a:t>
+              <a:t>m</a:t>
             </a:r>
             <a:endParaRPr lang="en-US" sz="900" dirty="0"/>
           </a:p>
@@ -11321,7 +11321,7 @@
         </p:nvSpPr>
         <p:spPr>
           <a:xfrm>
-            <a:off x="6668262" y="4169664"/>
+            <a:off x="6062472" y="4169664"/>
             <a:ext cx="685800" cy="475488"/>
           </a:xfrm>
           <a:prstGeom prst="rect">
@@ -11348,7 +11348,7 @@
         </p:nvSpPr>
         <p:spPr>
           <a:xfrm>
-            <a:off x="6668262" y="4169664"/>
+            <a:off x="6062472" y="4169664"/>
             <a:ext cx="685800" cy="475488"/>
           </a:xfrm>
           <a:prstGeom prst="rect">
@@ -11373,7 +11373,7 @@
                 <a:ea typeface="Trebuchet MS" pitchFamily="34" charset="-122"/>
                 <a:cs typeface="Trebuchet MS" pitchFamily="34" charset="-120"/>
               </a:rPr>
-              <a:t>k</a:t>
+              <a:t>a</a:t>
             </a:r>
             <a:endParaRPr lang="en-US" sz="900" dirty="0"/>
           </a:p>
@@ -11387,7 +11387,7 @@
         </p:nvSpPr>
         <p:spPr>
           <a:xfrm>
-            <a:off x="7576947" y="4169664"/>
+            <a:off x="6870192" y="4169664"/>
             <a:ext cx="685800" cy="475488"/>
           </a:xfrm>
           <a:prstGeom prst="rect">
@@ -11414,7 +11414,73 @@
         </p:nvSpPr>
         <p:spPr>
           <a:xfrm>
-            <a:off x="7576947" y="4169664"/>
+            <a:off x="6870192" y="4169664"/>
+            <a:ext cx="685800" cy="475488"/>
+          </a:xfrm>
+          <a:prstGeom prst="rect">
+            <a:avLst/>
+          </a:prstGeom>
+          <a:noFill/>
+          <a:ln/>
+        </p:spPr>
+        <p:txBody>
+          <a:bodyPr wrap="square" lIns="0" tIns="0" rIns="0" bIns="0" rtlCol="0" anchor="ctr"/>
+          <a:lstStyle/>
+          <a:p>
+            <a:pPr algn="ctr" indent="0" marL="0">
+              <a:buNone/>
+            </a:pPr>
+            <a:r>
+              <a:rPr lang="en-US" sz="900" b="1" dirty="0">
+                <a:solidFill>
+                  <a:srgbClr val="9D174D"/>
+                </a:solidFill>
+                <a:latin typeface="Trebuchet MS" pitchFamily="34" charset="0"/>
+                <a:ea typeface="Trebuchet MS" pitchFamily="34" charset="-122"/>
+                <a:cs typeface="Trebuchet MS" pitchFamily="34" charset="-120"/>
+              </a:rPr>
+              <a:t>k</a:t>
+            </a:r>
+            <a:endParaRPr lang="en-US" sz="900" dirty="0"/>
+          </a:p>
+        </p:txBody>
+      </p:sp>
+      <p:sp>
+        <p:nvSpPr>
+          <p:cNvPr id="53" name="Shape 51"/>
+          <p:cNvSpPr/>
+          <p:nvPr/>
+        </p:nvSpPr>
+        <p:spPr>
+          <a:xfrm>
+            <a:off x="7677912" y="4169664"/>
+            <a:ext cx="685800" cy="475488"/>
+          </a:xfrm>
+          <a:prstGeom prst="rect">
+            <a:avLst>
+              <a:gd name="adj" fmla="val 7692"/>
+            </a:avLst>
+          </a:prstGeom>
+          <a:solidFill>
+            <a:srgbClr val="FFFFFF"/>
+          </a:solidFill>
+          <a:ln w="12700">
+            <a:solidFill>
+              <a:srgbClr val="DB2777"/>
+            </a:solidFill>
+            <a:prstDash val="solid"/>
+          </a:ln>
+        </p:spPr>
+      </p:sp>
+      <p:sp>
+        <p:nvSpPr>
+          <p:cNvPr id="54" name="Text 52"/>
+          <p:cNvSpPr/>
+          <p:nvPr/>
+        </p:nvSpPr>
+        <p:spPr>
+          <a:xfrm>
+            <a:off x="7677912" y="4169664"/>
             <a:ext cx="685800" cy="475488"/>
           </a:xfrm>
           <a:prstGeom prst="rect">
@@ -11731,7 +11797,7 @@
                 <a:ea typeface="Calibri" pitchFamily="34" charset="-122"/>
                 <a:cs typeface="Calibri" pitchFamily="34" charset="-120"/>
               </a:rPr>
-              <a:t>Word Labs  •  wordlabs.app  •  Root: 'make' = to create or produce something</a:t>
+              <a:t>Word Labs  •  wordlabs.app  •  Root: 'make' = to create or produce</a:t>
             </a:r>
             <a:endParaRPr lang="en-US" sz="800" dirty="0"/>
           </a:p>
@@ -11870,7 +11936,7 @@
                 <a:ea typeface="Trebuchet MS" pitchFamily="34" charset="-122"/>
                 <a:cs typeface="Trebuchet MS" pitchFamily="34" charset="-120"/>
               </a:rPr>
-              <a:t>remake</a:t>
+              <a:t>makeshift</a:t>
             </a:r>
             <a:endParaRPr lang="en-US" sz="2800" dirty="0"/>
           </a:p>
@@ -12558,7 +12624,7 @@
                 <a:ea typeface="Calibri" pitchFamily="34" charset="-122"/>
                 <a:cs typeface="Calibri" pitchFamily="34" charset="-120"/>
               </a:rPr>
-              <a:t>Word Labs  •  wordlabs.app  •  Root: 'make' = to create or produce something</a:t>
+              <a:t>Word Labs  •  wordlabs.app  •  Root: 'make' = to create or produce</a:t>
             </a:r>
             <a:endParaRPr lang="en-US" sz="800" dirty="0"/>
           </a:p>
@@ -12697,7 +12763,7 @@
                 <a:ea typeface="Trebuchet MS" pitchFamily="34" charset="-122"/>
                 <a:cs typeface="Trebuchet MS" pitchFamily="34" charset="-120"/>
               </a:rPr>
-              <a:t>remake</a:t>
+              <a:t>makeshift</a:t>
             </a:r>
             <a:endParaRPr lang="en-US" sz="2800" dirty="0"/>
           </a:p>
@@ -12786,11 +12852,11 @@
             </a:avLst>
           </a:prstGeom>
           <a:solidFill>
-            <a:srgbClr val="DDD6FE"/>
+            <a:srgbClr val="CCFBF1"/>
           </a:solidFill>
           <a:ln w="19050">
             <a:solidFill>
-              <a:srgbClr val="7C3AED"/>
+              <a:srgbClr val="0D9488"/>
             </a:solidFill>
             <a:prstDash val="solid"/>
           </a:ln>
@@ -12830,13 +12896,13 @@
             <a:r>
               <a:rPr lang="en-US" sz="1300" b="1" dirty="0">
                 <a:solidFill>
-                  <a:srgbClr val="4C1D95"/>
+                  <a:srgbClr val="0F766E"/>
                 </a:solidFill>
                 <a:latin typeface="Trebuchet MS" pitchFamily="34" charset="0"/>
                 <a:ea typeface="Trebuchet MS" pitchFamily="34" charset="-122"/>
                 <a:cs typeface="Trebuchet MS" pitchFamily="34" charset="-120"/>
               </a:rPr>
-              <a:t>re</a:t>
+              <a:t>make</a:t>
             </a:r>
             <a:endParaRPr lang="en-US" sz="1300" dirty="0"/>
           </a:p>
@@ -12875,7 +12941,7 @@
                 <a:ea typeface="Calibri" pitchFamily="34" charset="-122"/>
                 <a:cs typeface="Calibri" pitchFamily="34" charset="-120"/>
               </a:rPr>
-              <a:t>again</a:t>
+              <a:t>to create</a:t>
             </a:r>
             <a:endParaRPr lang="en-US" sz="850" dirty="0"/>
           </a:p>
@@ -12898,11 +12964,11 @@
             </a:avLst>
           </a:prstGeom>
           <a:solidFill>
-            <a:srgbClr val="CCFBF1"/>
+            <a:srgbClr val="FCE7F3"/>
           </a:solidFill>
           <a:ln w="19050">
             <a:solidFill>
-              <a:srgbClr val="0D9488"/>
+              <a:srgbClr val="DB2777"/>
             </a:solidFill>
             <a:prstDash val="solid"/>
           </a:ln>
@@ -12942,13 +13008,13 @@
             <a:r>
               <a:rPr lang="en-US" sz="1300" b="1" dirty="0">
                 <a:solidFill>
-                  <a:srgbClr val="0F766E"/>
+                  <a:srgbClr val="9D174D"/>
                 </a:solidFill>
                 <a:latin typeface="Trebuchet MS" pitchFamily="34" charset="0"/>
                 <a:ea typeface="Trebuchet MS" pitchFamily="34" charset="-122"/>
                 <a:cs typeface="Trebuchet MS" pitchFamily="34" charset="-120"/>
               </a:rPr>
-              <a:t>make</a:t>
+              <a:t>shift</a:t>
             </a:r>
             <a:endParaRPr lang="en-US" sz="1300" dirty="0"/>
           </a:p>
@@ -12987,7 +13053,7 @@
                 <a:ea typeface="Calibri" pitchFamily="34" charset="-122"/>
                 <a:cs typeface="Calibri" pitchFamily="34" charset="-120"/>
               </a:rPr>
-              <a:t>to create or produce</a:t>
+              <a:t>to manage or arrange</a:t>
             </a:r>
             <a:endParaRPr lang="en-US" sz="850" dirty="0"/>
           </a:p>
@@ -13543,7 +13609,7 @@
                 <a:ea typeface="Calibri" pitchFamily="34" charset="-122"/>
                 <a:cs typeface="Calibri" pitchFamily="34" charset="-120"/>
               </a:rPr>
-              <a:t>Word Labs  •  wordlabs.app  •  Root: 'make' = to create or produce something</a:t>
+              <a:t>Word Labs  •  wordlabs.app  •  Root: 'make' = to create or produce</a:t>
             </a:r>
             <a:endParaRPr lang="en-US" sz="800" dirty="0"/>
           </a:p>
@@ -13682,7 +13748,7 @@
                 <a:ea typeface="Trebuchet MS" pitchFamily="34" charset="-122"/>
                 <a:cs typeface="Trebuchet MS" pitchFamily="34" charset="-120"/>
               </a:rPr>
-              <a:t>remake</a:t>
+              <a:t>makeshift</a:t>
             </a:r>
             <a:endParaRPr lang="en-US" sz="2800" dirty="0"/>
           </a:p>
@@ -13771,11 +13837,11 @@
             </a:avLst>
           </a:prstGeom>
           <a:solidFill>
-            <a:srgbClr val="DDD6FE"/>
+            <a:srgbClr val="CCFBF1"/>
           </a:solidFill>
           <a:ln w="19050">
             <a:solidFill>
-              <a:srgbClr val="7C3AED"/>
+              <a:srgbClr val="0D9488"/>
             </a:solidFill>
             <a:prstDash val="solid"/>
           </a:ln>
@@ -13815,13 +13881,13 @@
             <a:r>
               <a:rPr lang="en-US" sz="1300" b="1" dirty="0">
                 <a:solidFill>
-                  <a:srgbClr val="4C1D95"/>
+                  <a:srgbClr val="0F766E"/>
                 </a:solidFill>
                 <a:latin typeface="Trebuchet MS" pitchFamily="34" charset="0"/>
                 <a:ea typeface="Trebuchet MS" pitchFamily="34" charset="-122"/>
                 <a:cs typeface="Trebuchet MS" pitchFamily="34" charset="-120"/>
               </a:rPr>
-              <a:t>re</a:t>
+              <a:t>make</a:t>
             </a:r>
             <a:endParaRPr lang="en-US" sz="1300" dirty="0"/>
           </a:p>
@@ -13860,7 +13926,7 @@
                 <a:ea typeface="Calibri" pitchFamily="34" charset="-122"/>
                 <a:cs typeface="Calibri" pitchFamily="34" charset="-120"/>
               </a:rPr>
-              <a:t>again</a:t>
+              <a:t>to create</a:t>
             </a:r>
             <a:endParaRPr lang="en-US" sz="850" dirty="0"/>
           </a:p>
@@ -13883,11 +13949,11 @@
             </a:avLst>
           </a:prstGeom>
           <a:solidFill>
-            <a:srgbClr val="CCFBF1"/>
+            <a:srgbClr val="FCE7F3"/>
           </a:solidFill>
           <a:ln w="19050">
             <a:solidFill>
-              <a:srgbClr val="0D9488"/>
+              <a:srgbClr val="DB2777"/>
             </a:solidFill>
             <a:prstDash val="solid"/>
           </a:ln>
@@ -13927,13 +13993,13 @@
             <a:r>
               <a:rPr lang="en-US" sz="1300" b="1" dirty="0">
                 <a:solidFill>
-                  <a:srgbClr val="0F766E"/>
+                  <a:srgbClr val="9D174D"/>
                 </a:solidFill>
                 <a:latin typeface="Trebuchet MS" pitchFamily="34" charset="0"/>
                 <a:ea typeface="Trebuchet MS" pitchFamily="34" charset="-122"/>
                 <a:cs typeface="Trebuchet MS" pitchFamily="34" charset="-120"/>
               </a:rPr>
-              <a:t>make</a:t>
+              <a:t>shift</a:t>
             </a:r>
             <a:endParaRPr lang="en-US" sz="1300" dirty="0"/>
           </a:p>
@@ -13972,7 +14038,7 @@
                 <a:ea typeface="Calibri" pitchFamily="34" charset="-122"/>
                 <a:cs typeface="Calibri" pitchFamily="34" charset="-120"/>
               </a:rPr>
-              <a:t>to create or produce</a:t>
+              <a:t>to manage or arrange</a:t>
             </a:r>
             <a:endParaRPr lang="en-US" sz="850" dirty="0"/>
           </a:p>
@@ -14131,7 +14197,7 @@
                 <a:ea typeface="Trebuchet MS" pitchFamily="34" charset="-122"/>
                 <a:cs typeface="Trebuchet MS" pitchFamily="34" charset="-120"/>
               </a:rPr>
-              <a:t>re</a:t>
+              <a:t>make</a:t>
             </a:r>
             <a:endParaRPr lang="en-US" sz="1400" dirty="0"/>
           </a:p>
@@ -14236,7 +14302,7 @@
                 <a:ea typeface="Trebuchet MS" pitchFamily="34" charset="-122"/>
                 <a:cs typeface="Trebuchet MS" pitchFamily="34" charset="-120"/>
               </a:rPr>
-              <a:t>make</a:t>
+              <a:t>shift</a:t>
             </a:r>
             <a:endParaRPr lang="en-US" sz="1400" dirty="0"/>
           </a:p>
@@ -14569,7 +14635,7 @@
                 <a:ea typeface="Calibri" pitchFamily="34" charset="-122"/>
                 <a:cs typeface="Calibri" pitchFamily="34" charset="-120"/>
               </a:rPr>
-              <a:t>Root 'make' — to create or produce something</a:t>
+              <a:t>Root 'make' — to create or produce</a:t>
             </a:r>
             <a:endParaRPr lang="en-US" sz="1600" dirty="0"/>
           </a:p>
@@ -14925,7 +14991,7 @@
                 <a:ea typeface="Calibri" pitchFamily="34" charset="-122"/>
                 <a:cs typeface="Calibri" pitchFamily="34" charset="-120"/>
               </a:rPr>
-              <a:t>Word Labs  •  wordlabs.app  •  Root: 'make' = to create or produce something</a:t>
+              <a:t>Word Labs  •  wordlabs.app  •  Root: 'make' = to create or produce</a:t>
             </a:r>
             <a:endParaRPr lang="en-US" sz="800" dirty="0"/>
           </a:p>
@@ -15064,7 +15130,7 @@
                 <a:ea typeface="Trebuchet MS" pitchFamily="34" charset="-122"/>
                 <a:cs typeface="Trebuchet MS" pitchFamily="34" charset="-120"/>
               </a:rPr>
-              <a:t>remake</a:t>
+              <a:t>makeshift</a:t>
             </a:r>
             <a:endParaRPr lang="en-US" sz="2800" dirty="0"/>
           </a:p>
@@ -15153,11 +15219,11 @@
             </a:avLst>
           </a:prstGeom>
           <a:solidFill>
-            <a:srgbClr val="DDD6FE"/>
+            <a:srgbClr val="CCFBF1"/>
           </a:solidFill>
           <a:ln w="19050">
             <a:solidFill>
-              <a:srgbClr val="7C3AED"/>
+              <a:srgbClr val="0D9488"/>
             </a:solidFill>
             <a:prstDash val="solid"/>
           </a:ln>
@@ -15197,13 +15263,13 @@
             <a:r>
               <a:rPr lang="en-US" sz="1300" b="1" dirty="0">
                 <a:solidFill>
-                  <a:srgbClr val="4C1D95"/>
+                  <a:srgbClr val="0F766E"/>
                 </a:solidFill>
                 <a:latin typeface="Trebuchet MS" pitchFamily="34" charset="0"/>
                 <a:ea typeface="Trebuchet MS" pitchFamily="34" charset="-122"/>
                 <a:cs typeface="Trebuchet MS" pitchFamily="34" charset="-120"/>
               </a:rPr>
-              <a:t>re</a:t>
+              <a:t>make</a:t>
             </a:r>
             <a:endParaRPr lang="en-US" sz="1300" dirty="0"/>
           </a:p>
@@ -15242,7 +15308,7 @@
                 <a:ea typeface="Calibri" pitchFamily="34" charset="-122"/>
                 <a:cs typeface="Calibri" pitchFamily="34" charset="-120"/>
               </a:rPr>
-              <a:t>again</a:t>
+              <a:t>to create</a:t>
             </a:r>
             <a:endParaRPr lang="en-US" sz="850" dirty="0"/>
           </a:p>
@@ -15265,11 +15331,11 @@
             </a:avLst>
           </a:prstGeom>
           <a:solidFill>
-            <a:srgbClr val="CCFBF1"/>
+            <a:srgbClr val="FCE7F3"/>
           </a:solidFill>
           <a:ln w="19050">
             <a:solidFill>
-              <a:srgbClr val="0D9488"/>
+              <a:srgbClr val="DB2777"/>
             </a:solidFill>
             <a:prstDash val="solid"/>
           </a:ln>
@@ -15309,13 +15375,13 @@
             <a:r>
               <a:rPr lang="en-US" sz="1300" b="1" dirty="0">
                 <a:solidFill>
-                  <a:srgbClr val="0F766E"/>
+                  <a:srgbClr val="9D174D"/>
                 </a:solidFill>
                 <a:latin typeface="Trebuchet MS" pitchFamily="34" charset="0"/>
                 <a:ea typeface="Trebuchet MS" pitchFamily="34" charset="-122"/>
                 <a:cs typeface="Trebuchet MS" pitchFamily="34" charset="-120"/>
               </a:rPr>
-              <a:t>make</a:t>
+              <a:t>shift</a:t>
             </a:r>
             <a:endParaRPr lang="en-US" sz="1300" dirty="0"/>
           </a:p>
@@ -15354,7 +15420,7 @@
                 <a:ea typeface="Calibri" pitchFamily="34" charset="-122"/>
                 <a:cs typeface="Calibri" pitchFamily="34" charset="-120"/>
               </a:rPr>
-              <a:t>to create or produce</a:t>
+              <a:t>to manage or arrange</a:t>
             </a:r>
             <a:endParaRPr lang="en-US" sz="850" dirty="0"/>
           </a:p>
@@ -15513,7 +15579,7 @@
                 <a:ea typeface="Trebuchet MS" pitchFamily="34" charset="-122"/>
                 <a:cs typeface="Trebuchet MS" pitchFamily="34" charset="-120"/>
               </a:rPr>
-              <a:t>re</a:t>
+              <a:t>make</a:t>
             </a:r>
             <a:endParaRPr lang="en-US" sz="1400" dirty="0"/>
           </a:p>
@@ -15618,7 +15684,7 @@
                 <a:ea typeface="Trebuchet MS" pitchFamily="34" charset="-122"/>
                 <a:cs typeface="Trebuchet MS" pitchFamily="34" charset="-120"/>
               </a:rPr>
-              <a:t>make</a:t>
+              <a:t>shift</a:t>
             </a:r>
             <a:endParaRPr lang="en-US" sz="1400" dirty="0"/>
           </a:p>
@@ -15725,7 +15791,7 @@
         </p:nvSpPr>
         <p:spPr>
           <a:xfrm>
-            <a:off x="2427732" y="4169664"/>
+            <a:off x="2023872" y="4169664"/>
             <a:ext cx="685800" cy="475488"/>
           </a:xfrm>
           <a:prstGeom prst="rect">
@@ -15752,7 +15818,7 @@
         </p:nvSpPr>
         <p:spPr>
           <a:xfrm>
-            <a:off x="2427732" y="4169664"/>
+            <a:off x="2023872" y="4169664"/>
             <a:ext cx="685800" cy="475488"/>
           </a:xfrm>
           <a:prstGeom prst="rect">
@@ -15777,7 +15843,7 @@
                 <a:ea typeface="Trebuchet MS" pitchFamily="34" charset="-122"/>
                 <a:cs typeface="Trebuchet MS" pitchFamily="34" charset="-120"/>
               </a:rPr>
-              <a:t>r</a:t>
+              <a:t>m</a:t>
             </a:r>
             <a:endParaRPr lang="en-US" sz="900" dirty="0"/>
           </a:p>
@@ -15791,7 +15857,7 @@
         </p:nvSpPr>
         <p:spPr>
           <a:xfrm>
-            <a:off x="3639312" y="4169664"/>
+            <a:off x="2831592" y="4169664"/>
             <a:ext cx="685800" cy="475488"/>
           </a:xfrm>
           <a:prstGeom prst="rect">
@@ -15818,7 +15884,7 @@
         </p:nvSpPr>
         <p:spPr>
           <a:xfrm>
-            <a:off x="3639312" y="4169664"/>
+            <a:off x="2831592" y="4169664"/>
             <a:ext cx="685800" cy="475488"/>
           </a:xfrm>
           <a:prstGeom prst="rect">
@@ -15843,7 +15909,7 @@
                 <a:ea typeface="Trebuchet MS" pitchFamily="34" charset="-122"/>
                 <a:cs typeface="Trebuchet MS" pitchFamily="34" charset="-120"/>
               </a:rPr>
-              <a:t>e</a:t>
+              <a:t>a</a:t>
             </a:r>
             <a:endParaRPr lang="en-US" sz="900" dirty="0"/>
           </a:p>
@@ -15857,7 +15923,7 @@
         </p:nvSpPr>
         <p:spPr>
           <a:xfrm>
-            <a:off x="4850892" y="4169664"/>
+            <a:off x="3639312" y="4169664"/>
             <a:ext cx="685800" cy="475488"/>
           </a:xfrm>
           <a:prstGeom prst="rect">
@@ -15884,7 +15950,7 @@
         </p:nvSpPr>
         <p:spPr>
           <a:xfrm>
-            <a:off x="4850892" y="4169664"/>
+            <a:off x="3639312" y="4169664"/>
             <a:ext cx="685800" cy="475488"/>
           </a:xfrm>
           <a:prstGeom prst="rect">
@@ -15909,7 +15975,7 @@
                 <a:ea typeface="Trebuchet MS" pitchFamily="34" charset="-122"/>
                 <a:cs typeface="Trebuchet MS" pitchFamily="34" charset="-120"/>
               </a:rPr>
-              <a:t>m</a:t>
+              <a:t>k</a:t>
             </a:r>
             <a:endParaRPr lang="en-US" sz="900" dirty="0"/>
           </a:p>
@@ -15923,7 +15989,7 @@
         </p:nvSpPr>
         <p:spPr>
           <a:xfrm>
-            <a:off x="6062472" y="4169664"/>
+            <a:off x="4447032" y="4169664"/>
             <a:ext cx="685800" cy="475488"/>
           </a:xfrm>
           <a:prstGeom prst="rect">
@@ -15950,7 +16016,7 @@
         </p:nvSpPr>
         <p:spPr>
           <a:xfrm>
-            <a:off x="6062472" y="4169664"/>
+            <a:off x="4447032" y="4169664"/>
             <a:ext cx="685800" cy="475488"/>
           </a:xfrm>
           <a:prstGeom prst="rect">
@@ -15975,7 +16041,7 @@
                 <a:ea typeface="Trebuchet MS" pitchFamily="34" charset="-122"/>
                 <a:cs typeface="Trebuchet MS" pitchFamily="34" charset="-120"/>
               </a:rPr>
-              <a:t>a</a:t>
+              <a:t>e</a:t>
             </a:r>
             <a:endParaRPr lang="en-US" sz="900" dirty="0"/>
           </a:p>
@@ -15989,7 +16055,7 @@
         </p:nvSpPr>
         <p:spPr>
           <a:xfrm>
-            <a:off x="7274052" y="4169664"/>
+            <a:off x="5254752" y="4169664"/>
             <a:ext cx="685800" cy="475488"/>
           </a:xfrm>
           <a:prstGeom prst="rect">
@@ -16016,7 +16082,7 @@
         </p:nvSpPr>
         <p:spPr>
           <a:xfrm>
-            <a:off x="7274052" y="4169664"/>
+            <a:off x="5254752" y="4169664"/>
             <a:ext cx="685800" cy="475488"/>
           </a:xfrm>
           <a:prstGeom prst="rect">
@@ -16041,7 +16107,205 @@
                 <a:ea typeface="Trebuchet MS" pitchFamily="34" charset="-122"/>
                 <a:cs typeface="Trebuchet MS" pitchFamily="34" charset="-120"/>
               </a:rPr>
-              <a:t>ke</a:t>
+              <a:t>sh</a:t>
+            </a:r>
+            <a:endParaRPr lang="en-US" sz="900" dirty="0"/>
+          </a:p>
+        </p:txBody>
+      </p:sp>
+      <p:sp>
+        <p:nvSpPr>
+          <p:cNvPr id="43" name="Shape 41"/>
+          <p:cNvSpPr/>
+          <p:nvPr/>
+        </p:nvSpPr>
+        <p:spPr>
+          <a:xfrm>
+            <a:off x="6062472" y="4169664"/>
+            <a:ext cx="685800" cy="475488"/>
+          </a:xfrm>
+          <a:prstGeom prst="rect">
+            <a:avLst>
+              <a:gd name="adj" fmla="val 7692"/>
+            </a:avLst>
+          </a:prstGeom>
+          <a:solidFill>
+            <a:srgbClr val="FFFFFF"/>
+          </a:solidFill>
+          <a:ln w="12700">
+            <a:solidFill>
+              <a:srgbClr val="DB2777"/>
+            </a:solidFill>
+            <a:prstDash val="solid"/>
+          </a:ln>
+        </p:spPr>
+      </p:sp>
+      <p:sp>
+        <p:nvSpPr>
+          <p:cNvPr id="44" name="Text 42"/>
+          <p:cNvSpPr/>
+          <p:nvPr/>
+        </p:nvSpPr>
+        <p:spPr>
+          <a:xfrm>
+            <a:off x="6062472" y="4169664"/>
+            <a:ext cx="685800" cy="475488"/>
+          </a:xfrm>
+          <a:prstGeom prst="rect">
+            <a:avLst/>
+          </a:prstGeom>
+          <a:noFill/>
+          <a:ln/>
+        </p:spPr>
+        <p:txBody>
+          <a:bodyPr wrap="square" lIns="0" tIns="0" rIns="0" bIns="0" rtlCol="0" anchor="ctr"/>
+          <a:lstStyle/>
+          <a:p>
+            <a:pPr algn="ctr" indent="0" marL="0">
+              <a:buNone/>
+            </a:pPr>
+            <a:r>
+              <a:rPr lang="en-US" sz="900" b="1" dirty="0">
+                <a:solidFill>
+                  <a:srgbClr val="9D174D"/>
+                </a:solidFill>
+                <a:latin typeface="Trebuchet MS" pitchFamily="34" charset="0"/>
+                <a:ea typeface="Trebuchet MS" pitchFamily="34" charset="-122"/>
+                <a:cs typeface="Trebuchet MS" pitchFamily="34" charset="-120"/>
+              </a:rPr>
+              <a:t>i</a:t>
+            </a:r>
+            <a:endParaRPr lang="en-US" sz="900" dirty="0"/>
+          </a:p>
+        </p:txBody>
+      </p:sp>
+      <p:sp>
+        <p:nvSpPr>
+          <p:cNvPr id="45" name="Shape 43"/>
+          <p:cNvSpPr/>
+          <p:nvPr/>
+        </p:nvSpPr>
+        <p:spPr>
+          <a:xfrm>
+            <a:off x="6870192" y="4169664"/>
+            <a:ext cx="685800" cy="475488"/>
+          </a:xfrm>
+          <a:prstGeom prst="rect">
+            <a:avLst>
+              <a:gd name="adj" fmla="val 7692"/>
+            </a:avLst>
+          </a:prstGeom>
+          <a:solidFill>
+            <a:srgbClr val="FFFFFF"/>
+          </a:solidFill>
+          <a:ln w="12700">
+            <a:solidFill>
+              <a:srgbClr val="DB2777"/>
+            </a:solidFill>
+            <a:prstDash val="solid"/>
+          </a:ln>
+        </p:spPr>
+      </p:sp>
+      <p:sp>
+        <p:nvSpPr>
+          <p:cNvPr id="46" name="Text 44"/>
+          <p:cNvSpPr/>
+          <p:nvPr/>
+        </p:nvSpPr>
+        <p:spPr>
+          <a:xfrm>
+            <a:off x="6870192" y="4169664"/>
+            <a:ext cx="685800" cy="475488"/>
+          </a:xfrm>
+          <a:prstGeom prst="rect">
+            <a:avLst/>
+          </a:prstGeom>
+          <a:noFill/>
+          <a:ln/>
+        </p:spPr>
+        <p:txBody>
+          <a:bodyPr wrap="square" lIns="0" tIns="0" rIns="0" bIns="0" rtlCol="0" anchor="ctr"/>
+          <a:lstStyle/>
+          <a:p>
+            <a:pPr algn="ctr" indent="0" marL="0">
+              <a:buNone/>
+            </a:pPr>
+            <a:r>
+              <a:rPr lang="en-US" sz="900" b="1" dirty="0">
+                <a:solidFill>
+                  <a:srgbClr val="9D174D"/>
+                </a:solidFill>
+                <a:latin typeface="Trebuchet MS" pitchFamily="34" charset="0"/>
+                <a:ea typeface="Trebuchet MS" pitchFamily="34" charset="-122"/>
+                <a:cs typeface="Trebuchet MS" pitchFamily="34" charset="-120"/>
+              </a:rPr>
+              <a:t>f</a:t>
+            </a:r>
+            <a:endParaRPr lang="en-US" sz="900" dirty="0"/>
+          </a:p>
+        </p:txBody>
+      </p:sp>
+      <p:sp>
+        <p:nvSpPr>
+          <p:cNvPr id="47" name="Shape 45"/>
+          <p:cNvSpPr/>
+          <p:nvPr/>
+        </p:nvSpPr>
+        <p:spPr>
+          <a:xfrm>
+            <a:off x="7677912" y="4169664"/>
+            <a:ext cx="685800" cy="475488"/>
+          </a:xfrm>
+          <a:prstGeom prst="rect">
+            <a:avLst>
+              <a:gd name="adj" fmla="val 7692"/>
+            </a:avLst>
+          </a:prstGeom>
+          <a:solidFill>
+            <a:srgbClr val="FFFFFF"/>
+          </a:solidFill>
+          <a:ln w="12700">
+            <a:solidFill>
+              <a:srgbClr val="DB2777"/>
+            </a:solidFill>
+            <a:prstDash val="solid"/>
+          </a:ln>
+        </p:spPr>
+      </p:sp>
+      <p:sp>
+        <p:nvSpPr>
+          <p:cNvPr id="48" name="Text 46"/>
+          <p:cNvSpPr/>
+          <p:nvPr/>
+        </p:nvSpPr>
+        <p:spPr>
+          <a:xfrm>
+            <a:off x="7677912" y="4169664"/>
+            <a:ext cx="685800" cy="475488"/>
+          </a:xfrm>
+          <a:prstGeom prst="rect">
+            <a:avLst/>
+          </a:prstGeom>
+          <a:noFill/>
+          <a:ln/>
+        </p:spPr>
+        <p:txBody>
+          <a:bodyPr wrap="square" lIns="0" tIns="0" rIns="0" bIns="0" rtlCol="0" anchor="ctr"/>
+          <a:lstStyle/>
+          <a:p>
+            <a:pPr algn="ctr" indent="0" marL="0">
+              <a:buNone/>
+            </a:pPr>
+            <a:r>
+              <a:rPr lang="en-US" sz="900" b="1" dirty="0">
+                <a:solidFill>
+                  <a:srgbClr val="9D174D"/>
+                </a:solidFill>
+                <a:latin typeface="Trebuchet MS" pitchFamily="34" charset="0"/>
+                <a:ea typeface="Trebuchet MS" pitchFamily="34" charset="-122"/>
+                <a:cs typeface="Trebuchet MS" pitchFamily="34" charset="-120"/>
+              </a:rPr>
+              <a:t>t</a:t>
             </a:r>
             <a:endParaRPr lang="en-US" sz="900" dirty="0"/>
           </a:p>
@@ -16615,7 +16879,7 @@
                 <a:ea typeface="Calibri" pitchFamily="34" charset="-122"/>
                 <a:cs typeface="Calibri" pitchFamily="34" charset="-120"/>
               </a:rPr>
-              <a:t>Word Labs  •  wordlabs.app  •  Root: 'make' = to create or produce something</a:t>
+              <a:t>Word Labs  •  wordlabs.app  •  Root: 'make' = to create or produce</a:t>
             </a:r>
             <a:endParaRPr lang="en-US" sz="800" dirty="0"/>
           </a:p>
@@ -16949,7 +17213,7 @@
                 <a:ea typeface="Trebuchet MS" pitchFamily="34" charset="-122"/>
                 <a:cs typeface="Trebuchet MS" pitchFamily="34" charset="-120"/>
               </a:rPr>
-              <a:t>2</a:t>
+              <a:t>1</a:t>
             </a:r>
             <a:pPr algn="ctr" indent="0" marL="0">
               <a:buNone/>
@@ -16963,7 +17227,7 @@
                 <a:ea typeface="Trebuchet MS" pitchFamily="34" charset="-122"/>
                 <a:cs typeface="Trebuchet MS" pitchFamily="34" charset="-120"/>
               </a:rPr>
-              <a:t>  punctuation marks</a:t>
+              <a:t>  punctuation mark</a:t>
             </a:r>
             <a:endParaRPr lang="en-US" sz="2800" dirty="0"/>
           </a:p>
@@ -17255,7 +17519,7 @@
                 <a:ea typeface="Calibri" pitchFamily="34" charset="-122"/>
                 <a:cs typeface="Calibri" pitchFamily="34" charset="-120"/>
               </a:rPr>
-              <a:t>Word Labs  •  wordlabs.app  •  Root: 'make' = to create or produce something</a:t>
+              <a:t>Word Labs  •  wordlabs.app  •  Root: 'make' = to create or produce</a:t>
             </a:r>
             <a:endParaRPr lang="en-US" sz="800" dirty="0"/>
           </a:p>
@@ -17384,7 +17648,7 @@
                 <a:ea typeface="Calibri" pitchFamily="34" charset="-122"/>
                 <a:cs typeface="Calibri" pitchFamily="34" charset="-120"/>
               </a:rPr>
-              <a:t>making</a:t>
+              <a:t>peacemaker</a:t>
             </a:r>
             <a:pPr algn="l" indent="0" marL="0">
               <a:buNone/>
@@ -17398,7 +17662,7 @@
                 <a:ea typeface="Calibri" pitchFamily="34" charset="-122"/>
                 <a:cs typeface="Calibri" pitchFamily="34" charset="-120"/>
               </a:rPr>
-              <a:t> of a </a:t>
+              <a:t> suggested a </a:t>
             </a:r>
             <a:pPr algn="l" indent="0" marL="0">
               <a:buNone/>
@@ -17415,7 +17679,7 @@
                 <a:ea typeface="Calibri" pitchFamily="34" charset="-122"/>
                 <a:cs typeface="Calibri" pitchFamily="34" charset="-120"/>
               </a:rPr>
-              <a:t>makeshift</a:t>
+              <a:t>remake</a:t>
             </a:r>
             <a:pPr algn="l" indent="0" marL="0">
               <a:buNone/>
@@ -17429,7 +17693,7 @@
                 <a:ea typeface="Calibri" pitchFamily="34" charset="-122"/>
                 <a:cs typeface="Calibri" pitchFamily="34" charset="-120"/>
               </a:rPr>
-              <a:t> raft was exciting, but we had to </a:t>
+              <a:t> of the plan, but first they needed a proper </a:t>
             </a:r>
             <a:pPr algn="l" indent="0" marL="0">
               <a:buNone/>
@@ -17446,7 +17710,7 @@
                 <a:ea typeface="Calibri" pitchFamily="34" charset="-122"/>
                 <a:cs typeface="Calibri" pitchFamily="34" charset="-120"/>
               </a:rPr>
-              <a:t>remake</a:t>
+              <a:t>makeover</a:t>
             </a:r>
             <a:pPr algn="l" indent="0" marL="0">
               <a:buNone/>
@@ -17460,7 +17724,7 @@
                 <a:ea typeface="Calibri" pitchFamily="34" charset="-122"/>
                 <a:cs typeface="Calibri" pitchFamily="34" charset="-120"/>
               </a:rPr>
-              <a:t> it after the first attempt fell apart!</a:t>
+              <a:t> of the old ideas.</a:t>
             </a:r>
             <a:endParaRPr lang="en-US" sz="1800" dirty="0"/>
           </a:p>
@@ -17615,7 +17879,7 @@
                 <a:ea typeface="Trebuchet MS" pitchFamily="34" charset="-122"/>
                 <a:cs typeface="Trebuchet MS" pitchFamily="34" charset="-120"/>
               </a:rPr>
-              <a:t>making</a:t>
+              <a:t>peacemaker</a:t>
             </a:r>
             <a:endParaRPr lang="en-US" sz="1400" dirty="0"/>
           </a:p>
@@ -17743,7 +18007,7 @@
                 <a:ea typeface="Trebuchet MS" pitchFamily="34" charset="-122"/>
                 <a:cs typeface="Trebuchet MS" pitchFamily="34" charset="-120"/>
               </a:rPr>
-              <a:t>makeshift</a:t>
+              <a:t>remake</a:t>
             </a:r>
             <a:endParaRPr lang="en-US" sz="1400" dirty="0"/>
           </a:p>
@@ -17871,7 +18135,7 @@
                 <a:ea typeface="Trebuchet MS" pitchFamily="34" charset="-122"/>
                 <a:cs typeface="Trebuchet MS" pitchFamily="34" charset="-120"/>
               </a:rPr>
-              <a:t>remake</a:t>
+              <a:t>makeover</a:t>
             </a:r>
             <a:endParaRPr lang="en-US" sz="1400" dirty="0"/>
           </a:p>
@@ -18202,7 +18466,7 @@
                 <a:ea typeface="Calibri" pitchFamily="34" charset="-122"/>
                 <a:cs typeface="Calibri" pitchFamily="34" charset="-120"/>
               </a:rPr>
-              <a:t>Word Labs  •  wordlabs.app  •  Root: 'make' = to create or produce something</a:t>
+              <a:t>Word Labs  •  wordlabs.app  •  Root: 'make' = to create or produce</a:t>
             </a:r>
             <a:endParaRPr lang="en-US" sz="800" dirty="0"/>
           </a:p>
@@ -18341,7 +18605,7 @@
                 <a:ea typeface="Trebuchet MS" pitchFamily="34" charset="-122"/>
                 <a:cs typeface="Trebuchet MS" pitchFamily="34" charset="-120"/>
               </a:rPr>
-              <a:t>making</a:t>
+              <a:t>peacemaker</a:t>
             </a:r>
             <a:endParaRPr lang="en-US" sz="2800" dirty="0"/>
           </a:p>
@@ -19029,7 +19293,7 @@
                 <a:ea typeface="Calibri" pitchFamily="34" charset="-122"/>
                 <a:cs typeface="Calibri" pitchFamily="34" charset="-120"/>
               </a:rPr>
-              <a:t>Word Labs  •  wordlabs.app  •  Root: 'make' = to create or produce something</a:t>
+              <a:t>Word Labs  •  wordlabs.app  •  Root: 'make' = to create or produce</a:t>
             </a:r>
             <a:endParaRPr lang="en-US" sz="800" dirty="0"/>
           </a:p>
@@ -19168,7 +19432,7 @@
                 <a:ea typeface="Trebuchet MS" pitchFamily="34" charset="-122"/>
                 <a:cs typeface="Trebuchet MS" pitchFamily="34" charset="-120"/>
               </a:rPr>
-              <a:t>making</a:t>
+              <a:t>peacemaker</a:t>
             </a:r>
             <a:endParaRPr lang="en-US" sz="2800" dirty="0"/>
           </a:p>
@@ -19248,7 +19512,7 @@
         </p:nvSpPr>
         <p:spPr>
           <a:xfrm>
-            <a:off x="2938272" y="2258568"/>
+            <a:off x="2221992" y="2258568"/>
             <a:ext cx="1828800" cy="292608"/>
           </a:xfrm>
           <a:prstGeom prst="rect">
@@ -19257,11 +19521,11 @@
             </a:avLst>
           </a:prstGeom>
           <a:solidFill>
-            <a:srgbClr val="CCFBF1"/>
+            <a:srgbClr val="DDD6FE"/>
           </a:solidFill>
           <a:ln w="19050">
             <a:solidFill>
-              <a:srgbClr val="0D9488"/>
+              <a:srgbClr val="7C3AED"/>
             </a:solidFill>
             <a:prstDash val="solid"/>
           </a:ln>
@@ -19282,7 +19546,7 @@
         </p:nvSpPr>
         <p:spPr>
           <a:xfrm>
-            <a:off x="2938272" y="2258568"/>
+            <a:off x="2221992" y="2258568"/>
             <a:ext cx="1828800" cy="292608"/>
           </a:xfrm>
           <a:prstGeom prst="rect">
@@ -19301,13 +19565,13 @@
             <a:r>
               <a:rPr lang="en-US" sz="1300" b="1" dirty="0">
                 <a:solidFill>
-                  <a:srgbClr val="0F766E"/>
+                  <a:srgbClr val="4C1D95"/>
                 </a:solidFill>
                 <a:latin typeface="Trebuchet MS" pitchFamily="34" charset="0"/>
                 <a:ea typeface="Trebuchet MS" pitchFamily="34" charset="-122"/>
                 <a:cs typeface="Trebuchet MS" pitchFamily="34" charset="-120"/>
               </a:rPr>
-              <a:t>make</a:t>
+              <a:t>peace</a:t>
             </a:r>
             <a:endParaRPr lang="en-US" sz="1300" dirty="0"/>
           </a:p>
@@ -19321,7 +19585,7 @@
         </p:nvSpPr>
         <p:spPr>
           <a:xfrm>
-            <a:off x="2938272" y="2569464"/>
+            <a:off x="2221992" y="2569464"/>
             <a:ext cx="1828800" cy="201168"/>
           </a:xfrm>
           <a:prstGeom prst="rect">
@@ -19346,7 +19610,7 @@
                 <a:ea typeface="Calibri" pitchFamily="34" charset="-122"/>
                 <a:cs typeface="Calibri" pitchFamily="34" charset="-120"/>
               </a:rPr>
-              <a:t>to create or produce</a:t>
+              <a:t>calm, no conflict</a:t>
             </a:r>
             <a:endParaRPr lang="en-US" sz="850" dirty="0"/>
           </a:p>
@@ -19354,52 +19618,13 @@
       </p:sp>
       <p:sp>
         <p:nvSpPr>
-          <p:cNvPr id="19" name="Text 17"/>
-          <p:cNvSpPr/>
-          <p:nvPr/>
-        </p:nvSpPr>
-        <p:spPr>
-          <a:xfrm>
-            <a:off x="2938272" y="2752344"/>
-            <a:ext cx="1828800" cy="182880"/>
-          </a:xfrm>
-          <a:prstGeom prst="rect">
-            <a:avLst/>
-          </a:prstGeom>
-          <a:noFill/>
-          <a:ln/>
-        </p:spPr>
-        <p:txBody>
-          <a:bodyPr wrap="square" lIns="0" tIns="0" rIns="0" bIns="0" rtlCol="0" anchor="t"/>
-          <a:lstStyle/>
-          <a:p>
-            <a:pPr algn="ctr" indent="0" marL="0">
-              <a:buNone/>
-            </a:pPr>
-            <a:r>
-              <a:rPr lang="en-US" sz="700" i="1" dirty="0">
-                <a:solidFill>
-                  <a:srgbClr val="94A3B8"/>
-                </a:solidFill>
-                <a:latin typeface="Calibri" pitchFamily="34" charset="0"/>
-                <a:ea typeface="Calibri" pitchFamily="34" charset="-122"/>
-                <a:cs typeface="Calibri" pitchFamily="34" charset="-120"/>
-              </a:rPr>
-              <a:t>'e' dropped before vowel suffix</a:t>
-            </a:r>
-            <a:endParaRPr lang="en-US" sz="700" dirty="0"/>
-          </a:p>
-        </p:txBody>
-      </p:sp>
-      <p:sp>
-        <p:nvSpPr>
-          <p:cNvPr id="20" name="Shape 18"/>
-          <p:cNvSpPr/>
-          <p:nvPr/>
-        </p:nvSpPr>
-        <p:spPr>
-          <a:xfrm>
-            <a:off x="5803392" y="2258568"/>
+          <p:cNvPr id="19" name="Shape 17"/>
+          <p:cNvSpPr/>
+          <p:nvPr/>
+        </p:nvSpPr>
+        <p:spPr>
+          <a:xfrm>
+            <a:off x="4370832" y="2258568"/>
             <a:ext cx="1828800" cy="292608"/>
           </a:xfrm>
           <a:prstGeom prst="rect">
@@ -19408,11 +19633,11 @@
             </a:avLst>
           </a:prstGeom>
           <a:solidFill>
-            <a:srgbClr val="FCE7F3"/>
+            <a:srgbClr val="CCFBF1"/>
           </a:solidFill>
           <a:ln w="19050">
             <a:solidFill>
-              <a:srgbClr val="DB2777"/>
+              <a:srgbClr val="0D9488"/>
             </a:solidFill>
             <a:prstDash val="solid"/>
           </a:ln>
@@ -19427,13 +19652,13 @@
       </p:sp>
       <p:sp>
         <p:nvSpPr>
-          <p:cNvPr id="21" name="Text 19"/>
-          <p:cNvSpPr/>
-          <p:nvPr/>
-        </p:nvSpPr>
-        <p:spPr>
-          <a:xfrm>
-            <a:off x="5803392" y="2258568"/>
+          <p:cNvPr id="20" name="Text 18"/>
+          <p:cNvSpPr/>
+          <p:nvPr/>
+        </p:nvSpPr>
+        <p:spPr>
+          <a:xfrm>
+            <a:off x="4370832" y="2258568"/>
             <a:ext cx="1828800" cy="292608"/>
           </a:xfrm>
           <a:prstGeom prst="rect">
@@ -19452,13 +19677,13 @@
             <a:r>
               <a:rPr lang="en-US" sz="1300" b="1" dirty="0">
                 <a:solidFill>
-                  <a:srgbClr val="9D174D"/>
+                  <a:srgbClr val="0F766E"/>
                 </a:solidFill>
                 <a:latin typeface="Trebuchet MS" pitchFamily="34" charset="0"/>
                 <a:ea typeface="Trebuchet MS" pitchFamily="34" charset="-122"/>
                 <a:cs typeface="Trebuchet MS" pitchFamily="34" charset="-120"/>
               </a:rPr>
-              <a:t>ing</a:t>
+              <a:t>make</a:t>
             </a:r>
             <a:endParaRPr lang="en-US" sz="1300" dirty="0"/>
           </a:p>
@@ -19466,13 +19691,13 @@
       </p:sp>
       <p:sp>
         <p:nvSpPr>
-          <p:cNvPr id="22" name="Text 20"/>
-          <p:cNvSpPr/>
-          <p:nvPr/>
-        </p:nvSpPr>
-        <p:spPr>
-          <a:xfrm>
-            <a:off x="5803392" y="2569464"/>
+          <p:cNvPr id="21" name="Text 19"/>
+          <p:cNvSpPr/>
+          <p:nvPr/>
+        </p:nvSpPr>
+        <p:spPr>
+          <a:xfrm>
+            <a:off x="4370832" y="2569464"/>
             <a:ext cx="1828800" cy="201168"/>
           </a:xfrm>
           <a:prstGeom prst="rect">
@@ -19497,7 +19722,7 @@
                 <a:ea typeface="Calibri" pitchFamily="34" charset="-122"/>
                 <a:cs typeface="Calibri" pitchFamily="34" charset="-120"/>
               </a:rPr>
-              <a:t>the process of doing something</a:t>
+              <a:t>to create</a:t>
             </a:r>
             <a:endParaRPr lang="en-US" sz="850" dirty="0"/>
           </a:p>
@@ -19505,7 +19730,119 @@
       </p:sp>
       <p:sp>
         <p:nvSpPr>
-          <p:cNvPr id="23" name="Shape 21"/>
+          <p:cNvPr id="22" name="Shape 20"/>
+          <p:cNvSpPr/>
+          <p:nvPr/>
+        </p:nvSpPr>
+        <p:spPr>
+          <a:xfrm>
+            <a:off x="6519672" y="2258568"/>
+            <a:ext cx="1828800" cy="292608"/>
+          </a:xfrm>
+          <a:prstGeom prst="rect">
+            <a:avLst>
+              <a:gd name="adj" fmla="val 25000"/>
+            </a:avLst>
+          </a:prstGeom>
+          <a:solidFill>
+            <a:srgbClr val="FCE7F3"/>
+          </a:solidFill>
+          <a:ln w="19050">
+            <a:solidFill>
+              <a:srgbClr val="DB2777"/>
+            </a:solidFill>
+            <a:prstDash val="solid"/>
+          </a:ln>
+          <a:effectLst>
+            <a:outerShdw sx="100000" sy="100000" kx="0" ky="0" algn="bl" rotWithShape="0" blurRad="101600" dist="38100" dir="8100000">
+              <a:srgbClr val="000000">
+                <a:alpha val="12000"/>
+              </a:srgbClr>
+            </a:outerShdw>
+          </a:effectLst>
+        </p:spPr>
+      </p:sp>
+      <p:sp>
+        <p:nvSpPr>
+          <p:cNvPr id="23" name="Text 21"/>
+          <p:cNvSpPr/>
+          <p:nvPr/>
+        </p:nvSpPr>
+        <p:spPr>
+          <a:xfrm>
+            <a:off x="6519672" y="2258568"/>
+            <a:ext cx="1828800" cy="292608"/>
+          </a:xfrm>
+          <a:prstGeom prst="rect">
+            <a:avLst/>
+          </a:prstGeom>
+          <a:noFill/>
+          <a:ln/>
+        </p:spPr>
+        <p:txBody>
+          <a:bodyPr wrap="square" lIns="0" tIns="0" rIns="0" bIns="0" rtlCol="0" anchor="ctr"/>
+          <a:lstStyle/>
+          <a:p>
+            <a:pPr algn="ctr" indent="0" marL="0">
+              <a:buNone/>
+            </a:pPr>
+            <a:r>
+              <a:rPr lang="en-US" sz="1300" b="1" dirty="0">
+                <a:solidFill>
+                  <a:srgbClr val="9D174D"/>
+                </a:solidFill>
+                <a:latin typeface="Trebuchet MS" pitchFamily="34" charset="0"/>
+                <a:ea typeface="Trebuchet MS" pitchFamily="34" charset="-122"/>
+                <a:cs typeface="Trebuchet MS" pitchFamily="34" charset="-120"/>
+              </a:rPr>
+              <a:t>er</a:t>
+            </a:r>
+            <a:endParaRPr lang="en-US" sz="1300" dirty="0"/>
+          </a:p>
+        </p:txBody>
+      </p:sp>
+      <p:sp>
+        <p:nvSpPr>
+          <p:cNvPr id="24" name="Text 22"/>
+          <p:cNvSpPr/>
+          <p:nvPr/>
+        </p:nvSpPr>
+        <p:spPr>
+          <a:xfrm>
+            <a:off x="6519672" y="2569464"/>
+            <a:ext cx="1828800" cy="201168"/>
+          </a:xfrm>
+          <a:prstGeom prst="rect">
+            <a:avLst/>
+          </a:prstGeom>
+          <a:noFill/>
+          <a:ln/>
+        </p:spPr>
+        <p:txBody>
+          <a:bodyPr wrap="square" lIns="0" tIns="0" rIns="0" bIns="0" rtlCol="0" anchor="t"/>
+          <a:lstStyle/>
+          <a:p>
+            <a:pPr algn="ctr" indent="0" marL="0">
+              <a:buNone/>
+            </a:pPr>
+            <a:r>
+              <a:rPr lang="en-US" sz="850" dirty="0">
+                <a:solidFill>
+                  <a:srgbClr val="475569"/>
+                </a:solidFill>
+                <a:latin typeface="Calibri" pitchFamily="34" charset="0"/>
+                <a:ea typeface="Calibri" pitchFamily="34" charset="-122"/>
+                <a:cs typeface="Calibri" pitchFamily="34" charset="-120"/>
+              </a:rPr>
+              <a:t>person who does</a:t>
+            </a:r>
+            <a:endParaRPr lang="en-US" sz="850" dirty="0"/>
+          </a:p>
+        </p:txBody>
+      </p:sp>
+      <p:sp>
+        <p:nvSpPr>
+          <p:cNvPr id="25" name="Shape 23"/>
           <p:cNvSpPr/>
           <p:nvPr/>
         </p:nvSpPr>
@@ -19532,7 +19869,7 @@
       </p:sp>
       <p:sp>
         <p:nvSpPr>
-          <p:cNvPr id="24" name="Text 22"/>
+          <p:cNvPr id="26" name="Text 24"/>
           <p:cNvSpPr/>
           <p:nvPr/>
         </p:nvSpPr>
@@ -19571,7 +19908,7 @@
       </p:sp>
       <p:sp>
         <p:nvSpPr>
-          <p:cNvPr id="25" name="Shape 23"/>
+          <p:cNvPr id="27" name="Shape 25"/>
           <p:cNvSpPr/>
           <p:nvPr/>
         </p:nvSpPr>
@@ -19598,7 +19935,7 @@
       </p:sp>
       <p:sp>
         <p:nvSpPr>
-          <p:cNvPr id="26" name="Text 24"/>
+          <p:cNvPr id="28" name="Text 26"/>
           <p:cNvSpPr/>
           <p:nvPr/>
         </p:nvSpPr>
@@ -19637,7 +19974,7 @@
       </p:sp>
       <p:sp>
         <p:nvSpPr>
-          <p:cNvPr id="27" name="Shape 25"/>
+          <p:cNvPr id="29" name="Shape 27"/>
           <p:cNvSpPr/>
           <p:nvPr/>
         </p:nvSpPr>
@@ -19664,7 +20001,7 @@
       </p:sp>
       <p:sp>
         <p:nvSpPr>
-          <p:cNvPr id="28" name="Text 26"/>
+          <p:cNvPr id="30" name="Text 28"/>
           <p:cNvSpPr/>
           <p:nvPr/>
         </p:nvSpPr>
@@ -19703,7 +20040,7 @@
       </p:sp>
       <p:sp>
         <p:nvSpPr>
-          <p:cNvPr id="29" name="Shape 27"/>
+          <p:cNvPr id="31" name="Shape 29"/>
           <p:cNvSpPr/>
           <p:nvPr/>
         </p:nvSpPr>
@@ -19730,7 +20067,7 @@
       </p:sp>
       <p:sp>
         <p:nvSpPr>
-          <p:cNvPr id="30" name="Text 28"/>
+          <p:cNvPr id="32" name="Text 30"/>
           <p:cNvSpPr/>
           <p:nvPr/>
         </p:nvSpPr>
@@ -20053,7 +20390,7 @@
                 <a:ea typeface="Calibri" pitchFamily="34" charset="-122"/>
                 <a:cs typeface="Calibri" pitchFamily="34" charset="-120"/>
               </a:rPr>
-              <a:t>Word Labs  •  wordlabs.app  •  Root: 'make' = to create or produce something</a:t>
+              <a:t>Word Labs  •  wordlabs.app  •  Root: 'make' = to create or produce</a:t>
             </a:r>
             <a:endParaRPr lang="en-US" sz="800" dirty="0"/>
           </a:p>
@@ -20192,7 +20529,7 @@
                 <a:ea typeface="Trebuchet MS" pitchFamily="34" charset="-122"/>
                 <a:cs typeface="Trebuchet MS" pitchFamily="34" charset="-120"/>
               </a:rPr>
-              <a:t>making</a:t>
+              <a:t>peacemaker</a:t>
             </a:r>
             <a:endParaRPr lang="en-US" sz="2800" dirty="0"/>
           </a:p>
@@ -20272,7 +20609,7 @@
         </p:nvSpPr>
         <p:spPr>
           <a:xfrm>
-            <a:off x="2938272" y="2258568"/>
+            <a:off x="2221992" y="2258568"/>
             <a:ext cx="1828800" cy="292608"/>
           </a:xfrm>
           <a:prstGeom prst="rect">
@@ -20281,11 +20618,11 @@
             </a:avLst>
           </a:prstGeom>
           <a:solidFill>
-            <a:srgbClr val="CCFBF1"/>
+            <a:srgbClr val="DDD6FE"/>
           </a:solidFill>
           <a:ln w="19050">
             <a:solidFill>
-              <a:srgbClr val="0D9488"/>
+              <a:srgbClr val="7C3AED"/>
             </a:solidFill>
             <a:prstDash val="solid"/>
           </a:ln>
@@ -20306,7 +20643,7 @@
         </p:nvSpPr>
         <p:spPr>
           <a:xfrm>
-            <a:off x="2938272" y="2258568"/>
+            <a:off x="2221992" y="2258568"/>
             <a:ext cx="1828800" cy="292608"/>
           </a:xfrm>
           <a:prstGeom prst="rect">
@@ -20325,13 +20662,13 @@
             <a:r>
               <a:rPr lang="en-US" sz="1300" b="1" dirty="0">
                 <a:solidFill>
-                  <a:srgbClr val="0F766E"/>
+                  <a:srgbClr val="4C1D95"/>
                 </a:solidFill>
                 <a:latin typeface="Trebuchet MS" pitchFamily="34" charset="0"/>
                 <a:ea typeface="Trebuchet MS" pitchFamily="34" charset="-122"/>
                 <a:cs typeface="Trebuchet MS" pitchFamily="34" charset="-120"/>
               </a:rPr>
-              <a:t>make</a:t>
+              <a:t>peace</a:t>
             </a:r>
             <a:endParaRPr lang="en-US" sz="1300" dirty="0"/>
           </a:p>
@@ -20345,7 +20682,7 @@
         </p:nvSpPr>
         <p:spPr>
           <a:xfrm>
-            <a:off x="2938272" y="2569464"/>
+            <a:off x="2221992" y="2569464"/>
             <a:ext cx="1828800" cy="201168"/>
           </a:xfrm>
           <a:prstGeom prst="rect">
@@ -20370,7 +20707,7 @@
                 <a:ea typeface="Calibri" pitchFamily="34" charset="-122"/>
                 <a:cs typeface="Calibri" pitchFamily="34" charset="-120"/>
               </a:rPr>
-              <a:t>to create or produce</a:t>
+              <a:t>calm, no conflict</a:t>
             </a:r>
             <a:endParaRPr lang="en-US" sz="850" dirty="0"/>
           </a:p>
@@ -20378,52 +20715,13 @@
       </p:sp>
       <p:sp>
         <p:nvSpPr>
-          <p:cNvPr id="19" name="Text 17"/>
-          <p:cNvSpPr/>
-          <p:nvPr/>
-        </p:nvSpPr>
-        <p:spPr>
-          <a:xfrm>
-            <a:off x="2938272" y="2752344"/>
-            <a:ext cx="1828800" cy="182880"/>
-          </a:xfrm>
-          <a:prstGeom prst="rect">
-            <a:avLst/>
-          </a:prstGeom>
-          <a:noFill/>
-          <a:ln/>
-        </p:spPr>
-        <p:txBody>
-          <a:bodyPr wrap="square" lIns="0" tIns="0" rIns="0" bIns="0" rtlCol="0" anchor="t"/>
-          <a:lstStyle/>
-          <a:p>
-            <a:pPr algn="ctr" indent="0" marL="0">
-              <a:buNone/>
-            </a:pPr>
-            <a:r>
-              <a:rPr lang="en-US" sz="700" i="1" dirty="0">
-                <a:solidFill>
-                  <a:srgbClr val="94A3B8"/>
-                </a:solidFill>
-                <a:latin typeface="Calibri" pitchFamily="34" charset="0"/>
-                <a:ea typeface="Calibri" pitchFamily="34" charset="-122"/>
-                <a:cs typeface="Calibri" pitchFamily="34" charset="-120"/>
-              </a:rPr>
-              <a:t>'e' dropped before vowel suffix</a:t>
-            </a:r>
-            <a:endParaRPr lang="en-US" sz="700" dirty="0"/>
-          </a:p>
-        </p:txBody>
-      </p:sp>
-      <p:sp>
-        <p:nvSpPr>
-          <p:cNvPr id="20" name="Shape 18"/>
-          <p:cNvSpPr/>
-          <p:nvPr/>
-        </p:nvSpPr>
-        <p:spPr>
-          <a:xfrm>
-            <a:off x="5803392" y="2258568"/>
+          <p:cNvPr id="19" name="Shape 17"/>
+          <p:cNvSpPr/>
+          <p:nvPr/>
+        </p:nvSpPr>
+        <p:spPr>
+          <a:xfrm>
+            <a:off x="4370832" y="2258568"/>
             <a:ext cx="1828800" cy="292608"/>
           </a:xfrm>
           <a:prstGeom prst="rect">
@@ -20432,11 +20730,11 @@
             </a:avLst>
           </a:prstGeom>
           <a:solidFill>
-            <a:srgbClr val="FCE7F3"/>
+            <a:srgbClr val="CCFBF1"/>
           </a:solidFill>
           <a:ln w="19050">
             <a:solidFill>
-              <a:srgbClr val="DB2777"/>
+              <a:srgbClr val="0D9488"/>
             </a:solidFill>
             <a:prstDash val="solid"/>
           </a:ln>
@@ -20451,13 +20749,13 @@
       </p:sp>
       <p:sp>
         <p:nvSpPr>
-          <p:cNvPr id="21" name="Text 19"/>
-          <p:cNvSpPr/>
-          <p:nvPr/>
-        </p:nvSpPr>
-        <p:spPr>
-          <a:xfrm>
-            <a:off x="5803392" y="2258568"/>
+          <p:cNvPr id="20" name="Text 18"/>
+          <p:cNvSpPr/>
+          <p:nvPr/>
+        </p:nvSpPr>
+        <p:spPr>
+          <a:xfrm>
+            <a:off x="4370832" y="2258568"/>
             <a:ext cx="1828800" cy="292608"/>
           </a:xfrm>
           <a:prstGeom prst="rect">
@@ -20476,13 +20774,13 @@
             <a:r>
               <a:rPr lang="en-US" sz="1300" b="1" dirty="0">
                 <a:solidFill>
-                  <a:srgbClr val="9D174D"/>
+                  <a:srgbClr val="0F766E"/>
                 </a:solidFill>
                 <a:latin typeface="Trebuchet MS" pitchFamily="34" charset="0"/>
                 <a:ea typeface="Trebuchet MS" pitchFamily="34" charset="-122"/>
                 <a:cs typeface="Trebuchet MS" pitchFamily="34" charset="-120"/>
               </a:rPr>
-              <a:t>ing</a:t>
+              <a:t>make</a:t>
             </a:r>
             <a:endParaRPr lang="en-US" sz="1300" dirty="0"/>
           </a:p>
@@ -20490,13 +20788,13 @@
       </p:sp>
       <p:sp>
         <p:nvSpPr>
-          <p:cNvPr id="22" name="Text 20"/>
-          <p:cNvSpPr/>
-          <p:nvPr/>
-        </p:nvSpPr>
-        <p:spPr>
-          <a:xfrm>
-            <a:off x="5803392" y="2569464"/>
+          <p:cNvPr id="21" name="Text 19"/>
+          <p:cNvSpPr/>
+          <p:nvPr/>
+        </p:nvSpPr>
+        <p:spPr>
+          <a:xfrm>
+            <a:off x="4370832" y="2569464"/>
             <a:ext cx="1828800" cy="201168"/>
           </a:xfrm>
           <a:prstGeom prst="rect">
@@ -20521,7 +20819,7 @@
                 <a:ea typeface="Calibri" pitchFamily="34" charset="-122"/>
                 <a:cs typeface="Calibri" pitchFamily="34" charset="-120"/>
               </a:rPr>
-              <a:t>the process of doing something</a:t>
+              <a:t>to create</a:t>
             </a:r>
             <a:endParaRPr lang="en-US" sz="850" dirty="0"/>
           </a:p>
@@ -20529,7 +20827,119 @@
       </p:sp>
       <p:sp>
         <p:nvSpPr>
-          <p:cNvPr id="23" name="Shape 21"/>
+          <p:cNvPr id="22" name="Shape 20"/>
+          <p:cNvSpPr/>
+          <p:nvPr/>
+        </p:nvSpPr>
+        <p:spPr>
+          <a:xfrm>
+            <a:off x="6519672" y="2258568"/>
+            <a:ext cx="1828800" cy="292608"/>
+          </a:xfrm>
+          <a:prstGeom prst="rect">
+            <a:avLst>
+              <a:gd name="adj" fmla="val 25000"/>
+            </a:avLst>
+          </a:prstGeom>
+          <a:solidFill>
+            <a:srgbClr val="FCE7F3"/>
+          </a:solidFill>
+          <a:ln w="19050">
+            <a:solidFill>
+              <a:srgbClr val="DB2777"/>
+            </a:solidFill>
+            <a:prstDash val="solid"/>
+          </a:ln>
+          <a:effectLst>
+            <a:outerShdw sx="100000" sy="100000" kx="0" ky="0" algn="bl" rotWithShape="0" blurRad="101600" dist="38100" dir="8100000">
+              <a:srgbClr val="000000">
+                <a:alpha val="12000"/>
+              </a:srgbClr>
+            </a:outerShdw>
+          </a:effectLst>
+        </p:spPr>
+      </p:sp>
+      <p:sp>
+        <p:nvSpPr>
+          <p:cNvPr id="23" name="Text 21"/>
+          <p:cNvSpPr/>
+          <p:nvPr/>
+        </p:nvSpPr>
+        <p:spPr>
+          <a:xfrm>
+            <a:off x="6519672" y="2258568"/>
+            <a:ext cx="1828800" cy="292608"/>
+          </a:xfrm>
+          <a:prstGeom prst="rect">
+            <a:avLst/>
+          </a:prstGeom>
+          <a:noFill/>
+          <a:ln/>
+        </p:spPr>
+        <p:txBody>
+          <a:bodyPr wrap="square" lIns="0" tIns="0" rIns="0" bIns="0" rtlCol="0" anchor="ctr"/>
+          <a:lstStyle/>
+          <a:p>
+            <a:pPr algn="ctr" indent="0" marL="0">
+              <a:buNone/>
+            </a:pPr>
+            <a:r>
+              <a:rPr lang="en-US" sz="1300" b="1" dirty="0">
+                <a:solidFill>
+                  <a:srgbClr val="9D174D"/>
+                </a:solidFill>
+                <a:latin typeface="Trebuchet MS" pitchFamily="34" charset="0"/>
+                <a:ea typeface="Trebuchet MS" pitchFamily="34" charset="-122"/>
+                <a:cs typeface="Trebuchet MS" pitchFamily="34" charset="-120"/>
+              </a:rPr>
+              <a:t>er</a:t>
+            </a:r>
+            <a:endParaRPr lang="en-US" sz="1300" dirty="0"/>
+          </a:p>
+        </p:txBody>
+      </p:sp>
+      <p:sp>
+        <p:nvSpPr>
+          <p:cNvPr id="24" name="Text 22"/>
+          <p:cNvSpPr/>
+          <p:nvPr/>
+        </p:nvSpPr>
+        <p:spPr>
+          <a:xfrm>
+            <a:off x="6519672" y="2569464"/>
+            <a:ext cx="1828800" cy="201168"/>
+          </a:xfrm>
+          <a:prstGeom prst="rect">
+            <a:avLst/>
+          </a:prstGeom>
+          <a:noFill/>
+          <a:ln/>
+        </p:spPr>
+        <p:txBody>
+          <a:bodyPr wrap="square" lIns="0" tIns="0" rIns="0" bIns="0" rtlCol="0" anchor="t"/>
+          <a:lstStyle/>
+          <a:p>
+            <a:pPr algn="ctr" indent="0" marL="0">
+              <a:buNone/>
+            </a:pPr>
+            <a:r>
+              <a:rPr lang="en-US" sz="850" dirty="0">
+                <a:solidFill>
+                  <a:srgbClr val="475569"/>
+                </a:solidFill>
+                <a:latin typeface="Calibri" pitchFamily="34" charset="0"/>
+                <a:ea typeface="Calibri" pitchFamily="34" charset="-122"/>
+                <a:cs typeface="Calibri" pitchFamily="34" charset="-120"/>
+              </a:rPr>
+              <a:t>person who does</a:t>
+            </a:r>
+            <a:endParaRPr lang="en-US" sz="850" dirty="0"/>
+          </a:p>
+        </p:txBody>
+      </p:sp>
+      <p:sp>
+        <p:nvSpPr>
+          <p:cNvPr id="25" name="Shape 23"/>
           <p:cNvSpPr/>
           <p:nvPr/>
         </p:nvSpPr>
@@ -20556,7 +20966,7 @@
       </p:sp>
       <p:sp>
         <p:nvSpPr>
-          <p:cNvPr id="24" name="Text 22"/>
+          <p:cNvPr id="26" name="Text 24"/>
           <p:cNvSpPr/>
           <p:nvPr/>
         </p:nvSpPr>
@@ -20595,7 +21005,7 @@
       </p:sp>
       <p:sp>
         <p:nvSpPr>
-          <p:cNvPr id="25" name="Shape 23"/>
+          <p:cNvPr id="27" name="Shape 25"/>
           <p:cNvSpPr/>
           <p:nvPr/>
         </p:nvSpPr>
@@ -20622,13 +21032,13 @@
       </p:sp>
       <p:sp>
         <p:nvSpPr>
-          <p:cNvPr id="26" name="Shape 24"/>
-          <p:cNvSpPr/>
-          <p:nvPr/>
-        </p:nvSpPr>
-        <p:spPr>
-          <a:xfrm>
-            <a:off x="2999232" y="3364992"/>
+          <p:cNvPr id="28" name="Shape 26"/>
+          <p:cNvSpPr/>
+          <p:nvPr/>
+        </p:nvSpPr>
+        <p:spPr>
+          <a:xfrm>
+            <a:off x="2313432" y="3364992"/>
             <a:ext cx="1645920" cy="475488"/>
           </a:xfrm>
           <a:prstGeom prst="rect">
@@ -20649,13 +21059,13 @@
       </p:sp>
       <p:sp>
         <p:nvSpPr>
-          <p:cNvPr id="27" name="Text 25"/>
-          <p:cNvSpPr/>
-          <p:nvPr/>
-        </p:nvSpPr>
-        <p:spPr>
-          <a:xfrm>
-            <a:off x="2999232" y="3364992"/>
+          <p:cNvPr id="29" name="Text 27"/>
+          <p:cNvSpPr/>
+          <p:nvPr/>
+        </p:nvSpPr>
+        <p:spPr>
+          <a:xfrm>
+            <a:off x="2313432" y="3364992"/>
             <a:ext cx="1645920" cy="475488"/>
           </a:xfrm>
           <a:prstGeom prst="rect">
@@ -20680,7 +21090,7 @@
                 <a:ea typeface="Trebuchet MS" pitchFamily="34" charset="-122"/>
                 <a:cs typeface="Trebuchet MS" pitchFamily="34" charset="-120"/>
               </a:rPr>
-              <a:t>ma</a:t>
+              <a:t>peace</a:t>
             </a:r>
             <a:endParaRPr lang="en-US" sz="1400" dirty="0"/>
           </a:p>
@@ -20688,14 +21098,14 @@
       </p:sp>
       <p:sp>
         <p:nvSpPr>
-          <p:cNvPr id="28" name="Text 26"/>
-          <p:cNvSpPr/>
-          <p:nvPr/>
-        </p:nvSpPr>
-        <p:spPr>
-          <a:xfrm>
-            <a:off x="4645152" y="3364992"/>
-            <a:ext cx="1097280" cy="475488"/>
+          <p:cNvPr id="30" name="Text 28"/>
+          <p:cNvSpPr/>
+          <p:nvPr/>
+        </p:nvSpPr>
+        <p:spPr>
+          <a:xfrm>
+            <a:off x="3959352" y="3364992"/>
+            <a:ext cx="411480" cy="475488"/>
           </a:xfrm>
           <a:prstGeom prst="rect">
             <a:avLst/>
@@ -20727,13 +21137,13 @@
       </p:sp>
       <p:sp>
         <p:nvSpPr>
-          <p:cNvPr id="29" name="Shape 27"/>
-          <p:cNvSpPr/>
-          <p:nvPr/>
-        </p:nvSpPr>
-        <p:spPr>
-          <a:xfrm>
-            <a:off x="5742432" y="3364992"/>
+          <p:cNvPr id="31" name="Shape 29"/>
+          <p:cNvSpPr/>
+          <p:nvPr/>
+        </p:nvSpPr>
+        <p:spPr>
+          <a:xfrm>
+            <a:off x="4370832" y="3364992"/>
             <a:ext cx="1645920" cy="475488"/>
           </a:xfrm>
           <a:prstGeom prst="rect">
@@ -20754,13 +21164,13 @@
       </p:sp>
       <p:sp>
         <p:nvSpPr>
-          <p:cNvPr id="30" name="Text 28"/>
-          <p:cNvSpPr/>
-          <p:nvPr/>
-        </p:nvSpPr>
-        <p:spPr>
-          <a:xfrm>
-            <a:off x="5742432" y="3364992"/>
+          <p:cNvPr id="32" name="Text 30"/>
+          <p:cNvSpPr/>
+          <p:nvPr/>
+        </p:nvSpPr>
+        <p:spPr>
+          <a:xfrm>
+            <a:off x="4370832" y="3364992"/>
             <a:ext cx="1645920" cy="475488"/>
           </a:xfrm>
           <a:prstGeom prst="rect">
@@ -20785,7 +21195,7 @@
                 <a:ea typeface="Trebuchet MS" pitchFamily="34" charset="-122"/>
                 <a:cs typeface="Trebuchet MS" pitchFamily="34" charset="-120"/>
               </a:rPr>
-              <a:t>king</a:t>
+              <a:t>ma</a:t>
             </a:r>
             <a:endParaRPr lang="en-US" sz="1400" dirty="0"/>
           </a:p>
@@ -20793,7 +21203,112 @@
       </p:sp>
       <p:sp>
         <p:nvSpPr>
-          <p:cNvPr id="31" name="Shape 29"/>
+          <p:cNvPr id="33" name="Text 31"/>
+          <p:cNvSpPr/>
+          <p:nvPr/>
+        </p:nvSpPr>
+        <p:spPr>
+          <a:xfrm>
+            <a:off x="6016752" y="3364992"/>
+            <a:ext cx="411480" cy="475488"/>
+          </a:xfrm>
+          <a:prstGeom prst="rect">
+            <a:avLst/>
+          </a:prstGeom>
+          <a:noFill/>
+          <a:ln/>
+        </p:spPr>
+        <p:txBody>
+          <a:bodyPr wrap="square" lIns="0" tIns="0" rIns="0" bIns="0" rtlCol="0" anchor="ctr"/>
+          <a:lstStyle/>
+          <a:p>
+            <a:pPr algn="ctr" indent="0" marL="0">
+              <a:buNone/>
+            </a:pPr>
+            <a:r>
+              <a:rPr lang="en-US" sz="1600" b="1" dirty="0">
+                <a:solidFill>
+                  <a:srgbClr val="0D9488"/>
+                </a:solidFill>
+                <a:latin typeface="Trebuchet MS" pitchFamily="34" charset="0"/>
+                <a:ea typeface="Trebuchet MS" pitchFamily="34" charset="-122"/>
+                <a:cs typeface="Trebuchet MS" pitchFamily="34" charset="-120"/>
+              </a:rPr>
+              <a:t>·</a:t>
+            </a:r>
+            <a:endParaRPr lang="en-US" sz="1600" dirty="0"/>
+          </a:p>
+        </p:txBody>
+      </p:sp>
+      <p:sp>
+        <p:nvSpPr>
+          <p:cNvPr id="34" name="Shape 32"/>
+          <p:cNvSpPr/>
+          <p:nvPr/>
+        </p:nvSpPr>
+        <p:spPr>
+          <a:xfrm>
+            <a:off x="6428232" y="3364992"/>
+            <a:ext cx="1645920" cy="475488"/>
+          </a:xfrm>
+          <a:prstGeom prst="rect">
+            <a:avLst>
+              <a:gd name="adj" fmla="val 9615"/>
+            </a:avLst>
+          </a:prstGeom>
+          <a:solidFill>
+            <a:srgbClr val="FFFFFF"/>
+          </a:solidFill>
+          <a:ln w="12700">
+            <a:solidFill>
+              <a:srgbClr val="0D9488"/>
+            </a:solidFill>
+            <a:prstDash val="solid"/>
+          </a:ln>
+        </p:spPr>
+      </p:sp>
+      <p:sp>
+        <p:nvSpPr>
+          <p:cNvPr id="35" name="Text 33"/>
+          <p:cNvSpPr/>
+          <p:nvPr/>
+        </p:nvSpPr>
+        <p:spPr>
+          <a:xfrm>
+            <a:off x="6428232" y="3364992"/>
+            <a:ext cx="1645920" cy="475488"/>
+          </a:xfrm>
+          <a:prstGeom prst="rect">
+            <a:avLst/>
+          </a:prstGeom>
+          <a:noFill/>
+          <a:ln/>
+        </p:spPr>
+        <p:txBody>
+          <a:bodyPr wrap="square" lIns="0" tIns="0" rIns="0" bIns="0" rtlCol="0" anchor="ctr"/>
+          <a:lstStyle/>
+          <a:p>
+            <a:pPr algn="ctr" indent="0" marL="0">
+              <a:buNone/>
+            </a:pPr>
+            <a:r>
+              <a:rPr lang="en-US" sz="1400" b="1" dirty="0">
+                <a:solidFill>
+                  <a:srgbClr val="0D9488"/>
+                </a:solidFill>
+                <a:latin typeface="Trebuchet MS" pitchFamily="34" charset="0"/>
+                <a:ea typeface="Trebuchet MS" pitchFamily="34" charset="-122"/>
+                <a:cs typeface="Trebuchet MS" pitchFamily="34" charset="-120"/>
+              </a:rPr>
+              <a:t>ker</a:t>
+            </a:r>
+            <a:endParaRPr lang="en-US" sz="1400" dirty="0"/>
+          </a:p>
+        </p:txBody>
+      </p:sp>
+      <p:sp>
+        <p:nvSpPr>
+          <p:cNvPr id="36" name="Shape 34"/>
           <p:cNvSpPr/>
           <p:nvPr/>
         </p:nvSpPr>
@@ -20820,7 +21335,7 @@
       </p:sp>
       <p:sp>
         <p:nvSpPr>
-          <p:cNvPr id="32" name="Text 30"/>
+          <p:cNvPr id="37" name="Text 35"/>
           <p:cNvSpPr/>
           <p:nvPr/>
         </p:nvSpPr>
@@ -20859,7 +21374,7 @@
       </p:sp>
       <p:sp>
         <p:nvSpPr>
-          <p:cNvPr id="33" name="Shape 31"/>
+          <p:cNvPr id="38" name="Shape 36"/>
           <p:cNvSpPr/>
           <p:nvPr/>
         </p:nvSpPr>
@@ -20886,7 +21401,7 @@
       </p:sp>
       <p:sp>
         <p:nvSpPr>
-          <p:cNvPr id="34" name="Text 32"/>
+          <p:cNvPr id="39" name="Text 37"/>
           <p:cNvSpPr/>
           <p:nvPr/>
         </p:nvSpPr>
@@ -21209,7 +21724,7 @@
                 <a:ea typeface="Calibri" pitchFamily="34" charset="-122"/>
                 <a:cs typeface="Calibri" pitchFamily="34" charset="-120"/>
               </a:rPr>
-              <a:t>Word Labs  •  wordlabs.app  •  Root: 'make' = to create or produce something</a:t>
+              <a:t>Word Labs  •  wordlabs.app  •  Root: 'make' = to create or produce</a:t>
             </a:r>
             <a:endParaRPr lang="en-US" sz="800" dirty="0"/>
           </a:p>
@@ -21348,7 +21863,7 @@
                 <a:ea typeface="Trebuchet MS" pitchFamily="34" charset="-122"/>
                 <a:cs typeface="Trebuchet MS" pitchFamily="34" charset="-120"/>
               </a:rPr>
-              <a:t>making</a:t>
+              <a:t>peacemaker</a:t>
             </a:r>
             <a:endParaRPr lang="en-US" sz="2800" dirty="0"/>
           </a:p>
@@ -21428,7 +21943,7 @@
         </p:nvSpPr>
         <p:spPr>
           <a:xfrm>
-            <a:off x="2938272" y="2258568"/>
+            <a:off x="2221992" y="2258568"/>
             <a:ext cx="1828800" cy="292608"/>
           </a:xfrm>
           <a:prstGeom prst="rect">
@@ -21437,11 +21952,11 @@
             </a:avLst>
           </a:prstGeom>
           <a:solidFill>
-            <a:srgbClr val="CCFBF1"/>
+            <a:srgbClr val="DDD6FE"/>
           </a:solidFill>
           <a:ln w="19050">
             <a:solidFill>
-              <a:srgbClr val="0D9488"/>
+              <a:srgbClr val="7C3AED"/>
             </a:solidFill>
             <a:prstDash val="solid"/>
           </a:ln>
@@ -21462,7 +21977,7 @@
         </p:nvSpPr>
         <p:spPr>
           <a:xfrm>
-            <a:off x="2938272" y="2258568"/>
+            <a:off x="2221992" y="2258568"/>
             <a:ext cx="1828800" cy="292608"/>
           </a:xfrm>
           <a:prstGeom prst="rect">
@@ -21481,13 +21996,13 @@
             <a:r>
               <a:rPr lang="en-US" sz="1300" b="1" dirty="0">
                 <a:solidFill>
-                  <a:srgbClr val="0F766E"/>
+                  <a:srgbClr val="4C1D95"/>
                 </a:solidFill>
                 <a:latin typeface="Trebuchet MS" pitchFamily="34" charset="0"/>
                 <a:ea typeface="Trebuchet MS" pitchFamily="34" charset="-122"/>
                 <a:cs typeface="Trebuchet MS" pitchFamily="34" charset="-120"/>
               </a:rPr>
-              <a:t>make</a:t>
+              <a:t>peace</a:t>
             </a:r>
             <a:endParaRPr lang="en-US" sz="1300" dirty="0"/>
           </a:p>
@@ -21501,7 +22016,7 @@
         </p:nvSpPr>
         <p:spPr>
           <a:xfrm>
-            <a:off x="2938272" y="2569464"/>
+            <a:off x="2221992" y="2569464"/>
             <a:ext cx="1828800" cy="201168"/>
           </a:xfrm>
           <a:prstGeom prst="rect">
@@ -21526,7 +22041,7 @@
                 <a:ea typeface="Calibri" pitchFamily="34" charset="-122"/>
                 <a:cs typeface="Calibri" pitchFamily="34" charset="-120"/>
               </a:rPr>
-              <a:t>to create or produce</a:t>
+              <a:t>calm, no conflict</a:t>
             </a:r>
             <a:endParaRPr lang="en-US" sz="850" dirty="0"/>
           </a:p>
@@ -21534,52 +22049,13 @@
       </p:sp>
       <p:sp>
         <p:nvSpPr>
-          <p:cNvPr id="19" name="Text 17"/>
-          <p:cNvSpPr/>
-          <p:nvPr/>
-        </p:nvSpPr>
-        <p:spPr>
-          <a:xfrm>
-            <a:off x="2938272" y="2752344"/>
-            <a:ext cx="1828800" cy="182880"/>
-          </a:xfrm>
-          <a:prstGeom prst="rect">
-            <a:avLst/>
-          </a:prstGeom>
-          <a:noFill/>
-          <a:ln/>
-        </p:spPr>
-        <p:txBody>
-          <a:bodyPr wrap="square" lIns="0" tIns="0" rIns="0" bIns="0" rtlCol="0" anchor="t"/>
-          <a:lstStyle/>
-          <a:p>
-            <a:pPr algn="ctr" indent="0" marL="0">
-              <a:buNone/>
-            </a:pPr>
-            <a:r>
-              <a:rPr lang="en-US" sz="700" i="1" dirty="0">
-                <a:solidFill>
-                  <a:srgbClr val="94A3B8"/>
-                </a:solidFill>
-                <a:latin typeface="Calibri" pitchFamily="34" charset="0"/>
-                <a:ea typeface="Calibri" pitchFamily="34" charset="-122"/>
-                <a:cs typeface="Calibri" pitchFamily="34" charset="-120"/>
-              </a:rPr>
-              <a:t>'e' dropped before vowel suffix</a:t>
-            </a:r>
-            <a:endParaRPr lang="en-US" sz="700" dirty="0"/>
-          </a:p>
-        </p:txBody>
-      </p:sp>
-      <p:sp>
-        <p:nvSpPr>
-          <p:cNvPr id="20" name="Shape 18"/>
-          <p:cNvSpPr/>
-          <p:nvPr/>
-        </p:nvSpPr>
-        <p:spPr>
-          <a:xfrm>
-            <a:off x="5803392" y="2258568"/>
+          <p:cNvPr id="19" name="Shape 17"/>
+          <p:cNvSpPr/>
+          <p:nvPr/>
+        </p:nvSpPr>
+        <p:spPr>
+          <a:xfrm>
+            <a:off x="4370832" y="2258568"/>
             <a:ext cx="1828800" cy="292608"/>
           </a:xfrm>
           <a:prstGeom prst="rect">
@@ -21588,11 +22064,11 @@
             </a:avLst>
           </a:prstGeom>
           <a:solidFill>
-            <a:srgbClr val="FCE7F3"/>
+            <a:srgbClr val="CCFBF1"/>
           </a:solidFill>
           <a:ln w="19050">
             <a:solidFill>
-              <a:srgbClr val="DB2777"/>
+              <a:srgbClr val="0D9488"/>
             </a:solidFill>
             <a:prstDash val="solid"/>
           </a:ln>
@@ -21607,13 +22083,13 @@
       </p:sp>
       <p:sp>
         <p:nvSpPr>
-          <p:cNvPr id="21" name="Text 19"/>
-          <p:cNvSpPr/>
-          <p:nvPr/>
-        </p:nvSpPr>
-        <p:spPr>
-          <a:xfrm>
-            <a:off x="5803392" y="2258568"/>
+          <p:cNvPr id="20" name="Text 18"/>
+          <p:cNvSpPr/>
+          <p:nvPr/>
+        </p:nvSpPr>
+        <p:spPr>
+          <a:xfrm>
+            <a:off x="4370832" y="2258568"/>
             <a:ext cx="1828800" cy="292608"/>
           </a:xfrm>
           <a:prstGeom prst="rect">
@@ -21632,13 +22108,13 @@
             <a:r>
               <a:rPr lang="en-US" sz="1300" b="1" dirty="0">
                 <a:solidFill>
-                  <a:srgbClr val="9D174D"/>
+                  <a:srgbClr val="0F766E"/>
                 </a:solidFill>
                 <a:latin typeface="Trebuchet MS" pitchFamily="34" charset="0"/>
                 <a:ea typeface="Trebuchet MS" pitchFamily="34" charset="-122"/>
                 <a:cs typeface="Trebuchet MS" pitchFamily="34" charset="-120"/>
               </a:rPr>
-              <a:t>ing</a:t>
+              <a:t>make</a:t>
             </a:r>
             <a:endParaRPr lang="en-US" sz="1300" dirty="0"/>
           </a:p>
@@ -21646,13 +22122,13 @@
       </p:sp>
       <p:sp>
         <p:nvSpPr>
-          <p:cNvPr id="22" name="Text 20"/>
-          <p:cNvSpPr/>
-          <p:nvPr/>
-        </p:nvSpPr>
-        <p:spPr>
-          <a:xfrm>
-            <a:off x="5803392" y="2569464"/>
+          <p:cNvPr id="21" name="Text 19"/>
+          <p:cNvSpPr/>
+          <p:nvPr/>
+        </p:nvSpPr>
+        <p:spPr>
+          <a:xfrm>
+            <a:off x="4370832" y="2569464"/>
             <a:ext cx="1828800" cy="201168"/>
           </a:xfrm>
           <a:prstGeom prst="rect">
@@ -21677,7 +22153,7 @@
                 <a:ea typeface="Calibri" pitchFamily="34" charset="-122"/>
                 <a:cs typeface="Calibri" pitchFamily="34" charset="-120"/>
               </a:rPr>
-              <a:t>the process of doing something</a:t>
+              <a:t>to create</a:t>
             </a:r>
             <a:endParaRPr lang="en-US" sz="850" dirty="0"/>
           </a:p>
@@ -21685,7 +22161,119 @@
       </p:sp>
       <p:sp>
         <p:nvSpPr>
-          <p:cNvPr id="23" name="Shape 21"/>
+          <p:cNvPr id="22" name="Shape 20"/>
+          <p:cNvSpPr/>
+          <p:nvPr/>
+        </p:nvSpPr>
+        <p:spPr>
+          <a:xfrm>
+            <a:off x="6519672" y="2258568"/>
+            <a:ext cx="1828800" cy="292608"/>
+          </a:xfrm>
+          <a:prstGeom prst="rect">
+            <a:avLst>
+              <a:gd name="adj" fmla="val 25000"/>
+            </a:avLst>
+          </a:prstGeom>
+          <a:solidFill>
+            <a:srgbClr val="FCE7F3"/>
+          </a:solidFill>
+          <a:ln w="19050">
+            <a:solidFill>
+              <a:srgbClr val="DB2777"/>
+            </a:solidFill>
+            <a:prstDash val="solid"/>
+          </a:ln>
+          <a:effectLst>
+            <a:outerShdw sx="100000" sy="100000" kx="0" ky="0" algn="bl" rotWithShape="0" blurRad="101600" dist="38100" dir="8100000">
+              <a:srgbClr val="000000">
+                <a:alpha val="12000"/>
+              </a:srgbClr>
+            </a:outerShdw>
+          </a:effectLst>
+        </p:spPr>
+      </p:sp>
+      <p:sp>
+        <p:nvSpPr>
+          <p:cNvPr id="23" name="Text 21"/>
+          <p:cNvSpPr/>
+          <p:nvPr/>
+        </p:nvSpPr>
+        <p:spPr>
+          <a:xfrm>
+            <a:off x="6519672" y="2258568"/>
+            <a:ext cx="1828800" cy="292608"/>
+          </a:xfrm>
+          <a:prstGeom prst="rect">
+            <a:avLst/>
+          </a:prstGeom>
+          <a:noFill/>
+          <a:ln/>
+        </p:spPr>
+        <p:txBody>
+          <a:bodyPr wrap="square" lIns="0" tIns="0" rIns="0" bIns="0" rtlCol="0" anchor="ctr"/>
+          <a:lstStyle/>
+          <a:p>
+            <a:pPr algn="ctr" indent="0" marL="0">
+              <a:buNone/>
+            </a:pPr>
+            <a:r>
+              <a:rPr lang="en-US" sz="1300" b="1" dirty="0">
+                <a:solidFill>
+                  <a:srgbClr val="9D174D"/>
+                </a:solidFill>
+                <a:latin typeface="Trebuchet MS" pitchFamily="34" charset="0"/>
+                <a:ea typeface="Trebuchet MS" pitchFamily="34" charset="-122"/>
+                <a:cs typeface="Trebuchet MS" pitchFamily="34" charset="-120"/>
+              </a:rPr>
+              <a:t>er</a:t>
+            </a:r>
+            <a:endParaRPr lang="en-US" sz="1300" dirty="0"/>
+          </a:p>
+        </p:txBody>
+      </p:sp>
+      <p:sp>
+        <p:nvSpPr>
+          <p:cNvPr id="24" name="Text 22"/>
+          <p:cNvSpPr/>
+          <p:nvPr/>
+        </p:nvSpPr>
+        <p:spPr>
+          <a:xfrm>
+            <a:off x="6519672" y="2569464"/>
+            <a:ext cx="1828800" cy="201168"/>
+          </a:xfrm>
+          <a:prstGeom prst="rect">
+            <a:avLst/>
+          </a:prstGeom>
+          <a:noFill/>
+          <a:ln/>
+        </p:spPr>
+        <p:txBody>
+          <a:bodyPr wrap="square" lIns="0" tIns="0" rIns="0" bIns="0" rtlCol="0" anchor="t"/>
+          <a:lstStyle/>
+          <a:p>
+            <a:pPr algn="ctr" indent="0" marL="0">
+              <a:buNone/>
+            </a:pPr>
+            <a:r>
+              <a:rPr lang="en-US" sz="850" dirty="0">
+                <a:solidFill>
+                  <a:srgbClr val="475569"/>
+                </a:solidFill>
+                <a:latin typeface="Calibri" pitchFamily="34" charset="0"/>
+                <a:ea typeface="Calibri" pitchFamily="34" charset="-122"/>
+                <a:cs typeface="Calibri" pitchFamily="34" charset="-120"/>
+              </a:rPr>
+              <a:t>person who does</a:t>
+            </a:r>
+            <a:endParaRPr lang="en-US" sz="850" dirty="0"/>
+          </a:p>
+        </p:txBody>
+      </p:sp>
+      <p:sp>
+        <p:nvSpPr>
+          <p:cNvPr id="25" name="Shape 23"/>
           <p:cNvSpPr/>
           <p:nvPr/>
         </p:nvSpPr>
@@ -21712,7 +22300,7 @@
       </p:sp>
       <p:sp>
         <p:nvSpPr>
-          <p:cNvPr id="24" name="Text 22"/>
+          <p:cNvPr id="26" name="Text 24"/>
           <p:cNvSpPr/>
           <p:nvPr/>
         </p:nvSpPr>
@@ -21751,7 +22339,7 @@
       </p:sp>
       <p:sp>
         <p:nvSpPr>
-          <p:cNvPr id="25" name="Shape 23"/>
+          <p:cNvPr id="27" name="Shape 25"/>
           <p:cNvSpPr/>
           <p:nvPr/>
         </p:nvSpPr>
@@ -21778,13 +22366,13 @@
       </p:sp>
       <p:sp>
         <p:nvSpPr>
-          <p:cNvPr id="26" name="Shape 24"/>
-          <p:cNvSpPr/>
-          <p:nvPr/>
-        </p:nvSpPr>
-        <p:spPr>
-          <a:xfrm>
-            <a:off x="2999232" y="3364992"/>
+          <p:cNvPr id="28" name="Shape 26"/>
+          <p:cNvSpPr/>
+          <p:nvPr/>
+        </p:nvSpPr>
+        <p:spPr>
+          <a:xfrm>
+            <a:off x="2313432" y="3364992"/>
             <a:ext cx="1645920" cy="475488"/>
           </a:xfrm>
           <a:prstGeom prst="rect">
@@ -21805,13 +22393,13 @@
       </p:sp>
       <p:sp>
         <p:nvSpPr>
-          <p:cNvPr id="27" name="Text 25"/>
-          <p:cNvSpPr/>
-          <p:nvPr/>
-        </p:nvSpPr>
-        <p:spPr>
-          <a:xfrm>
-            <a:off x="2999232" y="3364992"/>
+          <p:cNvPr id="29" name="Text 27"/>
+          <p:cNvSpPr/>
+          <p:nvPr/>
+        </p:nvSpPr>
+        <p:spPr>
+          <a:xfrm>
+            <a:off x="2313432" y="3364992"/>
             <a:ext cx="1645920" cy="475488"/>
           </a:xfrm>
           <a:prstGeom prst="rect">
@@ -21836,7 +22424,7 @@
                 <a:ea typeface="Trebuchet MS" pitchFamily="34" charset="-122"/>
                 <a:cs typeface="Trebuchet MS" pitchFamily="34" charset="-120"/>
               </a:rPr>
-              <a:t>ma</a:t>
+              <a:t>peace</a:t>
             </a:r>
             <a:endParaRPr lang="en-US" sz="1400" dirty="0"/>
           </a:p>
@@ -21844,14 +22432,14 @@
       </p:sp>
       <p:sp>
         <p:nvSpPr>
-          <p:cNvPr id="28" name="Text 26"/>
-          <p:cNvSpPr/>
-          <p:nvPr/>
-        </p:nvSpPr>
-        <p:spPr>
-          <a:xfrm>
-            <a:off x="4645152" y="3364992"/>
-            <a:ext cx="1097280" cy="475488"/>
+          <p:cNvPr id="30" name="Text 28"/>
+          <p:cNvSpPr/>
+          <p:nvPr/>
+        </p:nvSpPr>
+        <p:spPr>
+          <a:xfrm>
+            <a:off x="3959352" y="3364992"/>
+            <a:ext cx="411480" cy="475488"/>
           </a:xfrm>
           <a:prstGeom prst="rect">
             <a:avLst/>
@@ -21883,13 +22471,13 @@
       </p:sp>
       <p:sp>
         <p:nvSpPr>
-          <p:cNvPr id="29" name="Shape 27"/>
-          <p:cNvSpPr/>
-          <p:nvPr/>
-        </p:nvSpPr>
-        <p:spPr>
-          <a:xfrm>
-            <a:off x="5742432" y="3364992"/>
+          <p:cNvPr id="31" name="Shape 29"/>
+          <p:cNvSpPr/>
+          <p:nvPr/>
+        </p:nvSpPr>
+        <p:spPr>
+          <a:xfrm>
+            <a:off x="4370832" y="3364992"/>
             <a:ext cx="1645920" cy="475488"/>
           </a:xfrm>
           <a:prstGeom prst="rect">
@@ -21910,13 +22498,13 @@
       </p:sp>
       <p:sp>
         <p:nvSpPr>
-          <p:cNvPr id="30" name="Text 28"/>
-          <p:cNvSpPr/>
-          <p:nvPr/>
-        </p:nvSpPr>
-        <p:spPr>
-          <a:xfrm>
-            <a:off x="5742432" y="3364992"/>
+          <p:cNvPr id="32" name="Text 30"/>
+          <p:cNvSpPr/>
+          <p:nvPr/>
+        </p:nvSpPr>
+        <p:spPr>
+          <a:xfrm>
+            <a:off x="4370832" y="3364992"/>
             <a:ext cx="1645920" cy="475488"/>
           </a:xfrm>
           <a:prstGeom prst="rect">
@@ -21941,7 +22529,7 @@
                 <a:ea typeface="Trebuchet MS" pitchFamily="34" charset="-122"/>
                 <a:cs typeface="Trebuchet MS" pitchFamily="34" charset="-120"/>
               </a:rPr>
-              <a:t>king</a:t>
+              <a:t>ma</a:t>
             </a:r>
             <a:endParaRPr lang="en-US" sz="1400" dirty="0"/>
           </a:p>
@@ -21949,7 +22537,112 @@
       </p:sp>
       <p:sp>
         <p:nvSpPr>
-          <p:cNvPr id="31" name="Shape 29"/>
+          <p:cNvPr id="33" name="Text 31"/>
+          <p:cNvSpPr/>
+          <p:nvPr/>
+        </p:nvSpPr>
+        <p:spPr>
+          <a:xfrm>
+            <a:off x="6016752" y="3364992"/>
+            <a:ext cx="411480" cy="475488"/>
+          </a:xfrm>
+          <a:prstGeom prst="rect">
+            <a:avLst/>
+          </a:prstGeom>
+          <a:noFill/>
+          <a:ln/>
+        </p:spPr>
+        <p:txBody>
+          <a:bodyPr wrap="square" lIns="0" tIns="0" rIns="0" bIns="0" rtlCol="0" anchor="ctr"/>
+          <a:lstStyle/>
+          <a:p>
+            <a:pPr algn="ctr" indent="0" marL="0">
+              <a:buNone/>
+            </a:pPr>
+            <a:r>
+              <a:rPr lang="en-US" sz="1600" b="1" dirty="0">
+                <a:solidFill>
+                  <a:srgbClr val="0D9488"/>
+                </a:solidFill>
+                <a:latin typeface="Trebuchet MS" pitchFamily="34" charset="0"/>
+                <a:ea typeface="Trebuchet MS" pitchFamily="34" charset="-122"/>
+                <a:cs typeface="Trebuchet MS" pitchFamily="34" charset="-120"/>
+              </a:rPr>
+              <a:t>·</a:t>
+            </a:r>
+            <a:endParaRPr lang="en-US" sz="1600" dirty="0"/>
+          </a:p>
+        </p:txBody>
+      </p:sp>
+      <p:sp>
+        <p:nvSpPr>
+          <p:cNvPr id="34" name="Shape 32"/>
+          <p:cNvSpPr/>
+          <p:nvPr/>
+        </p:nvSpPr>
+        <p:spPr>
+          <a:xfrm>
+            <a:off x="6428232" y="3364992"/>
+            <a:ext cx="1645920" cy="475488"/>
+          </a:xfrm>
+          <a:prstGeom prst="rect">
+            <a:avLst>
+              <a:gd name="adj" fmla="val 9615"/>
+            </a:avLst>
+          </a:prstGeom>
+          <a:solidFill>
+            <a:srgbClr val="FFFFFF"/>
+          </a:solidFill>
+          <a:ln w="12700">
+            <a:solidFill>
+              <a:srgbClr val="0D9488"/>
+            </a:solidFill>
+            <a:prstDash val="solid"/>
+          </a:ln>
+        </p:spPr>
+      </p:sp>
+      <p:sp>
+        <p:nvSpPr>
+          <p:cNvPr id="35" name="Text 33"/>
+          <p:cNvSpPr/>
+          <p:nvPr/>
+        </p:nvSpPr>
+        <p:spPr>
+          <a:xfrm>
+            <a:off x="6428232" y="3364992"/>
+            <a:ext cx="1645920" cy="475488"/>
+          </a:xfrm>
+          <a:prstGeom prst="rect">
+            <a:avLst/>
+          </a:prstGeom>
+          <a:noFill/>
+          <a:ln/>
+        </p:spPr>
+        <p:txBody>
+          <a:bodyPr wrap="square" lIns="0" tIns="0" rIns="0" bIns="0" rtlCol="0" anchor="ctr"/>
+          <a:lstStyle/>
+          <a:p>
+            <a:pPr algn="ctr" indent="0" marL="0">
+              <a:buNone/>
+            </a:pPr>
+            <a:r>
+              <a:rPr lang="en-US" sz="1400" b="1" dirty="0">
+                <a:solidFill>
+                  <a:srgbClr val="0D9488"/>
+                </a:solidFill>
+                <a:latin typeface="Trebuchet MS" pitchFamily="34" charset="0"/>
+                <a:ea typeface="Trebuchet MS" pitchFamily="34" charset="-122"/>
+                <a:cs typeface="Trebuchet MS" pitchFamily="34" charset="-120"/>
+              </a:rPr>
+              <a:t>ker</a:t>
+            </a:r>
+            <a:endParaRPr lang="en-US" sz="1400" dirty="0"/>
+          </a:p>
+        </p:txBody>
+      </p:sp>
+      <p:sp>
+        <p:nvSpPr>
+          <p:cNvPr id="36" name="Shape 34"/>
           <p:cNvSpPr/>
           <p:nvPr/>
         </p:nvSpPr>
@@ -21976,7 +22669,7 @@
       </p:sp>
       <p:sp>
         <p:nvSpPr>
-          <p:cNvPr id="32" name="Text 30"/>
+          <p:cNvPr id="37" name="Text 35"/>
           <p:cNvSpPr/>
           <p:nvPr/>
         </p:nvSpPr>
@@ -22015,18 +22708,18 @@
       </p:sp>
       <p:sp>
         <p:nvSpPr>
-          <p:cNvPr id="33" name="Shape 31"/>
+          <p:cNvPr id="38" name="Shape 36"/>
           <p:cNvSpPr/>
           <p:nvPr/>
         </p:nvSpPr>
         <p:spPr>
           <a:xfrm>
             <a:off x="1874520" y="4096512"/>
-            <a:ext cx="6903720" cy="658368"/>
+            <a:ext cx="6903720" cy="804672"/>
           </a:xfrm>
           <a:prstGeom prst="rect">
             <a:avLst>
-              <a:gd name="adj" fmla="val 8333"/>
+              <a:gd name="adj" fmla="val 6818"/>
             </a:avLst>
           </a:prstGeom>
           <a:solidFill>
@@ -22042,18 +22735,18 @@
       </p:sp>
       <p:sp>
         <p:nvSpPr>
-          <p:cNvPr id="34" name="Shape 32"/>
-          <p:cNvSpPr/>
-          <p:nvPr/>
-        </p:nvSpPr>
-        <p:spPr>
-          <a:xfrm>
-            <a:off x="2670048" y="4169664"/>
-            <a:ext cx="685800" cy="475488"/>
+          <p:cNvPr id="39" name="Shape 37"/>
+          <p:cNvSpPr/>
+          <p:nvPr/>
+        </p:nvSpPr>
+        <p:spPr>
+          <a:xfrm>
+            <a:off x="2124837" y="4169664"/>
+            <a:ext cx="685800" cy="384048"/>
           </a:xfrm>
           <a:prstGeom prst="rect">
             <a:avLst>
-              <a:gd name="adj" fmla="val 7692"/>
+              <a:gd name="adj" fmla="val 9524"/>
             </a:avLst>
           </a:prstGeom>
           <a:solidFill>
@@ -22069,14 +22762,14 @@
       </p:sp>
       <p:sp>
         <p:nvSpPr>
-          <p:cNvPr id="35" name="Text 33"/>
-          <p:cNvSpPr/>
-          <p:nvPr/>
-        </p:nvSpPr>
-        <p:spPr>
-          <a:xfrm>
-            <a:off x="2670048" y="4169664"/>
-            <a:ext cx="685800" cy="475488"/>
+          <p:cNvPr id="40" name="Text 38"/>
+          <p:cNvSpPr/>
+          <p:nvPr/>
+        </p:nvSpPr>
+        <p:spPr>
+          <a:xfrm>
+            <a:off x="2124837" y="4169664"/>
+            <a:ext cx="685800" cy="384048"/>
           </a:xfrm>
           <a:prstGeom prst="rect">
             <a:avLst/>
@@ -22100,7 +22793,7 @@
                 <a:ea typeface="Trebuchet MS" pitchFamily="34" charset="-122"/>
                 <a:cs typeface="Trebuchet MS" pitchFamily="34" charset="-120"/>
               </a:rPr>
-              <a:t>m</a:t>
+              <a:t>p</a:t>
             </a:r>
             <a:endParaRPr lang="en-US" sz="900" dirty="0"/>
           </a:p>
@@ -22108,18 +22801,18 @@
       </p:sp>
       <p:sp>
         <p:nvSpPr>
-          <p:cNvPr id="36" name="Shape 34"/>
-          <p:cNvSpPr/>
-          <p:nvPr/>
-        </p:nvSpPr>
-        <p:spPr>
-          <a:xfrm>
-            <a:off x="4123944" y="4169664"/>
-            <a:ext cx="685800" cy="475488"/>
+          <p:cNvPr id="41" name="Shape 39"/>
+          <p:cNvSpPr/>
+          <p:nvPr/>
+        </p:nvSpPr>
+        <p:spPr>
+          <a:xfrm>
+            <a:off x="3033522" y="4169664"/>
+            <a:ext cx="685800" cy="384048"/>
           </a:xfrm>
           <a:prstGeom prst="rect">
             <a:avLst>
-              <a:gd name="adj" fmla="val 7692"/>
+              <a:gd name="adj" fmla="val 9524"/>
             </a:avLst>
           </a:prstGeom>
           <a:solidFill>
@@ -22135,14 +22828,14 @@
       </p:sp>
       <p:sp>
         <p:nvSpPr>
-          <p:cNvPr id="37" name="Text 35"/>
-          <p:cNvSpPr/>
-          <p:nvPr/>
-        </p:nvSpPr>
-        <p:spPr>
-          <a:xfrm>
-            <a:off x="4123944" y="4169664"/>
-            <a:ext cx="685800" cy="475488"/>
+          <p:cNvPr id="42" name="Text 40"/>
+          <p:cNvSpPr/>
+          <p:nvPr/>
+        </p:nvSpPr>
+        <p:spPr>
+          <a:xfrm>
+            <a:off x="3033522" y="4169664"/>
+            <a:ext cx="685800" cy="384048"/>
           </a:xfrm>
           <a:prstGeom prst="rect">
             <a:avLst/>
@@ -22166,7 +22859,7 @@
                 <a:ea typeface="Trebuchet MS" pitchFamily="34" charset="-122"/>
                 <a:cs typeface="Trebuchet MS" pitchFamily="34" charset="-120"/>
               </a:rPr>
-              <a:t>a</a:t>
+              <a:t>ea</a:t>
             </a:r>
             <a:endParaRPr lang="en-US" sz="900" dirty="0"/>
           </a:p>
@@ -22174,18 +22867,18 @@
       </p:sp>
       <p:sp>
         <p:nvSpPr>
-          <p:cNvPr id="38" name="Shape 36"/>
-          <p:cNvSpPr/>
-          <p:nvPr/>
-        </p:nvSpPr>
-        <p:spPr>
-          <a:xfrm>
-            <a:off x="5577840" y="4169664"/>
-            <a:ext cx="685800" cy="475488"/>
+          <p:cNvPr id="43" name="Shape 41"/>
+          <p:cNvSpPr/>
+          <p:nvPr/>
+        </p:nvSpPr>
+        <p:spPr>
+          <a:xfrm>
+            <a:off x="3942207" y="4169664"/>
+            <a:ext cx="685800" cy="384048"/>
           </a:xfrm>
           <a:prstGeom prst="rect">
             <a:avLst>
-              <a:gd name="adj" fmla="val 7692"/>
+              <a:gd name="adj" fmla="val 9524"/>
             </a:avLst>
           </a:prstGeom>
           <a:solidFill>
@@ -22201,14 +22894,14 @@
       </p:sp>
       <p:sp>
         <p:nvSpPr>
-          <p:cNvPr id="39" name="Text 37"/>
-          <p:cNvSpPr/>
-          <p:nvPr/>
-        </p:nvSpPr>
-        <p:spPr>
-          <a:xfrm>
-            <a:off x="5577840" y="4169664"/>
-            <a:ext cx="685800" cy="475488"/>
+          <p:cNvPr id="44" name="Text 42"/>
+          <p:cNvSpPr/>
+          <p:nvPr/>
+        </p:nvSpPr>
+        <p:spPr>
+          <a:xfrm>
+            <a:off x="3942207" y="4169664"/>
+            <a:ext cx="685800" cy="384048"/>
           </a:xfrm>
           <a:prstGeom prst="rect">
             <a:avLst/>
@@ -22232,7 +22925,7 @@
                 <a:ea typeface="Trebuchet MS" pitchFamily="34" charset="-122"/>
                 <a:cs typeface="Trebuchet MS" pitchFamily="34" charset="-120"/>
               </a:rPr>
-              <a:t>k</a:t>
+              <a:t>ce</a:t>
             </a:r>
             <a:endParaRPr lang="en-US" sz="900" dirty="0"/>
           </a:p>
@@ -22240,18 +22933,57 @@
       </p:sp>
       <p:sp>
         <p:nvSpPr>
-          <p:cNvPr id="40" name="Shape 38"/>
-          <p:cNvSpPr/>
-          <p:nvPr/>
-        </p:nvSpPr>
-        <p:spPr>
-          <a:xfrm>
-            <a:off x="7031736" y="4169664"/>
-            <a:ext cx="685800" cy="475488"/>
+          <p:cNvPr id="45" name="Text 43"/>
+          <p:cNvSpPr/>
+          <p:nvPr/>
+        </p:nvSpPr>
+        <p:spPr>
+          <a:xfrm>
+            <a:off x="3942207" y="4572000"/>
+            <a:ext cx="685800" cy="219456"/>
+          </a:xfrm>
+          <a:prstGeom prst="rect">
+            <a:avLst/>
+          </a:prstGeom>
+          <a:noFill/>
+          <a:ln/>
+        </p:spPr>
+        <p:txBody>
+          <a:bodyPr wrap="square" lIns="0" tIns="0" rIns="0" bIns="0" rtlCol="0" anchor="t"/>
+          <a:lstStyle/>
+          <a:p>
+            <a:pPr algn="ctr" indent="0" marL="0">
+              <a:buNone/>
+            </a:pPr>
+            <a:r>
+              <a:rPr lang="en-US" sz="750" i="1" dirty="0">
+                <a:solidFill>
+                  <a:srgbClr val="94A3B8"/>
+                </a:solidFill>
+                <a:latin typeface="Calibri" pitchFamily="34" charset="0"/>
+                <a:ea typeface="Calibri" pitchFamily="34" charset="-122"/>
+                <a:cs typeface="Calibri" pitchFamily="34" charset="-120"/>
+              </a:rPr>
+              <a:t>/s/</a:t>
+            </a:r>
+            <a:endParaRPr lang="en-US" sz="750" dirty="0"/>
+          </a:p>
+        </p:txBody>
+      </p:sp>
+      <p:sp>
+        <p:nvSpPr>
+          <p:cNvPr id="46" name="Shape 44"/>
+          <p:cNvSpPr/>
+          <p:nvPr/>
+        </p:nvSpPr>
+        <p:spPr>
+          <a:xfrm>
+            <a:off x="4850892" y="4169664"/>
+            <a:ext cx="685800" cy="384048"/>
           </a:xfrm>
           <a:prstGeom prst="rect">
             <a:avLst>
-              <a:gd name="adj" fmla="val 7692"/>
+              <a:gd name="adj" fmla="val 9524"/>
             </a:avLst>
           </a:prstGeom>
           <a:solidFill>
@@ -22267,14 +22999,14 @@
       </p:sp>
       <p:sp>
         <p:nvSpPr>
-          <p:cNvPr id="41" name="Text 39"/>
-          <p:cNvSpPr/>
-          <p:nvPr/>
-        </p:nvSpPr>
-        <p:spPr>
-          <a:xfrm>
-            <a:off x="7031736" y="4169664"/>
-            <a:ext cx="685800" cy="475488"/>
+          <p:cNvPr id="47" name="Text 45"/>
+          <p:cNvSpPr/>
+          <p:nvPr/>
+        </p:nvSpPr>
+        <p:spPr>
+          <a:xfrm>
+            <a:off x="4850892" y="4169664"/>
+            <a:ext cx="685800" cy="384048"/>
           </a:xfrm>
           <a:prstGeom prst="rect">
             <a:avLst/>
@@ -22298,7 +23030,205 @@
                 <a:ea typeface="Trebuchet MS" pitchFamily="34" charset="-122"/>
                 <a:cs typeface="Trebuchet MS" pitchFamily="34" charset="-120"/>
               </a:rPr>
-              <a:t>ing</a:t>
+              <a:t>m</a:t>
+            </a:r>
+            <a:endParaRPr lang="en-US" sz="900" dirty="0"/>
+          </a:p>
+        </p:txBody>
+      </p:sp>
+      <p:sp>
+        <p:nvSpPr>
+          <p:cNvPr id="48" name="Shape 46"/>
+          <p:cNvSpPr/>
+          <p:nvPr/>
+        </p:nvSpPr>
+        <p:spPr>
+          <a:xfrm>
+            <a:off x="5759577" y="4169664"/>
+            <a:ext cx="685800" cy="384048"/>
+          </a:xfrm>
+          <a:prstGeom prst="rect">
+            <a:avLst>
+              <a:gd name="adj" fmla="val 9524"/>
+            </a:avLst>
+          </a:prstGeom>
+          <a:solidFill>
+            <a:srgbClr val="FFFFFF"/>
+          </a:solidFill>
+          <a:ln w="12700">
+            <a:solidFill>
+              <a:srgbClr val="DB2777"/>
+            </a:solidFill>
+            <a:prstDash val="solid"/>
+          </a:ln>
+        </p:spPr>
+      </p:sp>
+      <p:sp>
+        <p:nvSpPr>
+          <p:cNvPr id="49" name="Text 47"/>
+          <p:cNvSpPr/>
+          <p:nvPr/>
+        </p:nvSpPr>
+        <p:spPr>
+          <a:xfrm>
+            <a:off x="5759577" y="4169664"/>
+            <a:ext cx="685800" cy="384048"/>
+          </a:xfrm>
+          <a:prstGeom prst="rect">
+            <a:avLst/>
+          </a:prstGeom>
+          <a:noFill/>
+          <a:ln/>
+        </p:spPr>
+        <p:txBody>
+          <a:bodyPr wrap="square" lIns="0" tIns="0" rIns="0" bIns="0" rtlCol="0" anchor="ctr"/>
+          <a:lstStyle/>
+          <a:p>
+            <a:pPr algn="ctr" indent="0" marL="0">
+              <a:buNone/>
+            </a:pPr>
+            <a:r>
+              <a:rPr lang="en-US" sz="900" b="1" dirty="0">
+                <a:solidFill>
+                  <a:srgbClr val="9D174D"/>
+                </a:solidFill>
+                <a:latin typeface="Trebuchet MS" pitchFamily="34" charset="0"/>
+                <a:ea typeface="Trebuchet MS" pitchFamily="34" charset="-122"/>
+                <a:cs typeface="Trebuchet MS" pitchFamily="34" charset="-120"/>
+              </a:rPr>
+              <a:t>a</a:t>
+            </a:r>
+            <a:endParaRPr lang="en-US" sz="900" dirty="0"/>
+          </a:p>
+        </p:txBody>
+      </p:sp>
+      <p:sp>
+        <p:nvSpPr>
+          <p:cNvPr id="50" name="Shape 48"/>
+          <p:cNvSpPr/>
+          <p:nvPr/>
+        </p:nvSpPr>
+        <p:spPr>
+          <a:xfrm>
+            <a:off x="6668262" y="4169664"/>
+            <a:ext cx="685800" cy="384048"/>
+          </a:xfrm>
+          <a:prstGeom prst="rect">
+            <a:avLst>
+              <a:gd name="adj" fmla="val 9524"/>
+            </a:avLst>
+          </a:prstGeom>
+          <a:solidFill>
+            <a:srgbClr val="FFFFFF"/>
+          </a:solidFill>
+          <a:ln w="12700">
+            <a:solidFill>
+              <a:srgbClr val="DB2777"/>
+            </a:solidFill>
+            <a:prstDash val="solid"/>
+          </a:ln>
+        </p:spPr>
+      </p:sp>
+      <p:sp>
+        <p:nvSpPr>
+          <p:cNvPr id="51" name="Text 49"/>
+          <p:cNvSpPr/>
+          <p:nvPr/>
+        </p:nvSpPr>
+        <p:spPr>
+          <a:xfrm>
+            <a:off x="6668262" y="4169664"/>
+            <a:ext cx="685800" cy="384048"/>
+          </a:xfrm>
+          <a:prstGeom prst="rect">
+            <a:avLst/>
+          </a:prstGeom>
+          <a:noFill/>
+          <a:ln/>
+        </p:spPr>
+        <p:txBody>
+          <a:bodyPr wrap="square" lIns="0" tIns="0" rIns="0" bIns="0" rtlCol="0" anchor="ctr"/>
+          <a:lstStyle/>
+          <a:p>
+            <a:pPr algn="ctr" indent="0" marL="0">
+              <a:buNone/>
+            </a:pPr>
+            <a:r>
+              <a:rPr lang="en-US" sz="900" b="1" dirty="0">
+                <a:solidFill>
+                  <a:srgbClr val="9D174D"/>
+                </a:solidFill>
+                <a:latin typeface="Trebuchet MS" pitchFamily="34" charset="0"/>
+                <a:ea typeface="Trebuchet MS" pitchFamily="34" charset="-122"/>
+                <a:cs typeface="Trebuchet MS" pitchFamily="34" charset="-120"/>
+              </a:rPr>
+              <a:t>k</a:t>
+            </a:r>
+            <a:endParaRPr lang="en-US" sz="900" dirty="0"/>
+          </a:p>
+        </p:txBody>
+      </p:sp>
+      <p:sp>
+        <p:nvSpPr>
+          <p:cNvPr id="52" name="Shape 50"/>
+          <p:cNvSpPr/>
+          <p:nvPr/>
+        </p:nvSpPr>
+        <p:spPr>
+          <a:xfrm>
+            <a:off x="7576947" y="4169664"/>
+            <a:ext cx="685800" cy="384048"/>
+          </a:xfrm>
+          <a:prstGeom prst="rect">
+            <a:avLst>
+              <a:gd name="adj" fmla="val 9524"/>
+            </a:avLst>
+          </a:prstGeom>
+          <a:solidFill>
+            <a:srgbClr val="FFFFFF"/>
+          </a:solidFill>
+          <a:ln w="12700">
+            <a:solidFill>
+              <a:srgbClr val="DB2777"/>
+            </a:solidFill>
+            <a:prstDash val="solid"/>
+          </a:ln>
+        </p:spPr>
+      </p:sp>
+      <p:sp>
+        <p:nvSpPr>
+          <p:cNvPr id="53" name="Text 51"/>
+          <p:cNvSpPr/>
+          <p:nvPr/>
+        </p:nvSpPr>
+        <p:spPr>
+          <a:xfrm>
+            <a:off x="7576947" y="4169664"/>
+            <a:ext cx="685800" cy="384048"/>
+          </a:xfrm>
+          <a:prstGeom prst="rect">
+            <a:avLst/>
+          </a:prstGeom>
+          <a:noFill/>
+          <a:ln/>
+        </p:spPr>
+        <p:txBody>
+          <a:bodyPr wrap="square" lIns="0" tIns="0" rIns="0" bIns="0" rtlCol="0" anchor="ctr"/>
+          <a:lstStyle/>
+          <a:p>
+            <a:pPr algn="ctr" indent="0" marL="0">
+              <a:buNone/>
+            </a:pPr>
+            <a:r>
+              <a:rPr lang="en-US" sz="900" b="1" dirty="0">
+                <a:solidFill>
+                  <a:srgbClr val="9D174D"/>
+                </a:solidFill>
+                <a:latin typeface="Trebuchet MS" pitchFamily="34" charset="0"/>
+                <a:ea typeface="Trebuchet MS" pitchFamily="34" charset="-122"/>
+                <a:cs typeface="Trebuchet MS" pitchFamily="34" charset="-120"/>
+              </a:rPr>
+              <a:t>er</a:t>
             </a:r>
             <a:endParaRPr lang="en-US" sz="900" dirty="0"/>
           </a:p>
@@ -22590,7 +23520,7 @@
                 <a:ea typeface="Calibri" pitchFamily="34" charset="-122"/>
                 <a:cs typeface="Calibri" pitchFamily="34" charset="-120"/>
               </a:rPr>
-              <a:t>Word Labs  •  wordlabs.app  •  Root: 'make' = to create or produce something</a:t>
+              <a:t>Word Labs  •  wordlabs.app  •  Root: 'make' = to create or produce</a:t>
             </a:r>
             <a:endParaRPr lang="en-US" sz="800" dirty="0"/>
           </a:p>
@@ -22729,7 +23659,7 @@
                 <a:ea typeface="Trebuchet MS" pitchFamily="34" charset="-122"/>
                 <a:cs typeface="Trebuchet MS" pitchFamily="34" charset="-120"/>
               </a:rPr>
-              <a:t>makeshift</a:t>
+              <a:t>remake</a:t>
             </a:r>
             <a:endParaRPr lang="en-US" sz="2800" dirty="0"/>
           </a:p>
@@ -23417,7 +24347,7 @@
                 <a:ea typeface="Calibri" pitchFamily="34" charset="-122"/>
                 <a:cs typeface="Calibri" pitchFamily="34" charset="-120"/>
               </a:rPr>
-              <a:t>Word Labs  •  wordlabs.app  •  Root: 'make' = to create or produce something</a:t>
+              <a:t>Word Labs  •  wordlabs.app  •  Root: 'make' = to create or produce</a:t>
             </a:r>
             <a:endParaRPr lang="en-US" sz="800" dirty="0"/>
           </a:p>
@@ -23556,7 +24486,7 @@
                 <a:ea typeface="Trebuchet MS" pitchFamily="34" charset="-122"/>
                 <a:cs typeface="Trebuchet MS" pitchFamily="34" charset="-120"/>
               </a:rPr>
-              <a:t>makeshift</a:t>
+              <a:t>remake</a:t>
             </a:r>
             <a:endParaRPr lang="en-US" sz="2800" dirty="0"/>
           </a:p>
@@ -23645,11 +24575,11 @@
             </a:avLst>
           </a:prstGeom>
           <a:solidFill>
-            <a:srgbClr val="CCFBF1"/>
+            <a:srgbClr val="DDD6FE"/>
           </a:solidFill>
           <a:ln w="19050">
             <a:solidFill>
-              <a:srgbClr val="0D9488"/>
+              <a:srgbClr val="7C3AED"/>
             </a:solidFill>
             <a:prstDash val="solid"/>
           </a:ln>
@@ -23689,13 +24619,13 @@
             <a:r>
               <a:rPr lang="en-US" sz="1300" b="1" dirty="0">
                 <a:solidFill>
-                  <a:srgbClr val="0F766E"/>
+                  <a:srgbClr val="4C1D95"/>
                 </a:solidFill>
                 <a:latin typeface="Trebuchet MS" pitchFamily="34" charset="0"/>
                 <a:ea typeface="Trebuchet MS" pitchFamily="34" charset="-122"/>
                 <a:cs typeface="Trebuchet MS" pitchFamily="34" charset="-120"/>
               </a:rPr>
-              <a:t>make</a:t>
+              <a:t>re</a:t>
             </a:r>
             <a:endParaRPr lang="en-US" sz="1300" dirty="0"/>
           </a:p>
@@ -23734,7 +24664,7 @@
                 <a:ea typeface="Calibri" pitchFamily="34" charset="-122"/>
                 <a:cs typeface="Calibri" pitchFamily="34" charset="-120"/>
               </a:rPr>
-              <a:t>to create or produce</a:t>
+              <a:t>again</a:t>
             </a:r>
             <a:endParaRPr lang="en-US" sz="850" dirty="0"/>
           </a:p>
@@ -23757,11 +24687,11 @@
             </a:avLst>
           </a:prstGeom>
           <a:solidFill>
-            <a:srgbClr val="FCE7F3"/>
+            <a:srgbClr val="CCFBF1"/>
           </a:solidFill>
           <a:ln w="19050">
             <a:solidFill>
-              <a:srgbClr val="DB2777"/>
+              <a:srgbClr val="0D9488"/>
             </a:solidFill>
             <a:prstDash val="solid"/>
           </a:ln>
@@ -23801,13 +24731,13 @@
             <a:r>
               <a:rPr lang="en-US" sz="1300" b="1" dirty="0">
                 <a:solidFill>
-                  <a:srgbClr val="9D174D"/>
+                  <a:srgbClr val="0F766E"/>
                 </a:solidFill>
                 <a:latin typeface="Trebuchet MS" pitchFamily="34" charset="0"/>
                 <a:ea typeface="Trebuchet MS" pitchFamily="34" charset="-122"/>
                 <a:cs typeface="Trebuchet MS" pitchFamily="34" charset="-120"/>
               </a:rPr>
-              <a:t>shift</a:t>
+              <a:t>make</a:t>
             </a:r>
             <a:endParaRPr lang="en-US" sz="1300" dirty="0"/>
           </a:p>
@@ -23846,7 +24776,7 @@
                 <a:ea typeface="Calibri" pitchFamily="34" charset="-122"/>
                 <a:cs typeface="Calibri" pitchFamily="34" charset="-120"/>
               </a:rPr>
-              <a:t>a change or temporary arrangement</a:t>
+              <a:t>to create</a:t>
             </a:r>
             <a:endParaRPr lang="en-US" sz="850" dirty="0"/>
           </a:p>
@@ -24402,7 +25332,7 @@
                 <a:ea typeface="Calibri" pitchFamily="34" charset="-122"/>
                 <a:cs typeface="Calibri" pitchFamily="34" charset="-120"/>
               </a:rPr>
-              <a:t>Word Labs  •  wordlabs.app  •  Root: 'make' = to create or produce something</a:t>
+              <a:t>Word Labs  •  wordlabs.app  •  Root: 'make' = to create or produce</a:t>
             </a:r>
             <a:endParaRPr lang="en-US" sz="800" dirty="0"/>
           </a:p>
@@ -24475,7 +25405,7 @@
                 <a:ea typeface="Trebuchet MS" pitchFamily="34" charset="-122"/>
                 <a:cs typeface="Trebuchet MS" pitchFamily="34" charset="-120"/>
               </a:rPr>
-              <a:t>We are learning that the root 'make' means 'to create or produce something'.</a:t>
+              <a:t>We are learning that the root 'make' means 'to create or produce'.</a:t>
             </a:r>
             <a:endParaRPr lang="en-US" sz="2000" dirty="0"/>
           </a:p>
@@ -25121,7 +26051,7 @@
                 <a:ea typeface="Calibri" pitchFamily="34" charset="-122"/>
                 <a:cs typeface="Calibri" pitchFamily="34" charset="-120"/>
               </a:rPr>
-              <a:t>Word Labs  •  wordlabs.app  •  Root: 'make' = to create or produce something</a:t>
+              <a:t>Word Labs  •  wordlabs.app  •  Root: 'make' = to create or produce</a:t>
             </a:r>
             <a:endParaRPr lang="en-US" sz="800" dirty="0"/>
           </a:p>
@@ -25260,7 +26190,7 @@
                 <a:ea typeface="Trebuchet MS" pitchFamily="34" charset="-122"/>
                 <a:cs typeface="Trebuchet MS" pitchFamily="34" charset="-120"/>
               </a:rPr>
-              <a:t>makeshift</a:t>
+              <a:t>remake</a:t>
             </a:r>
             <a:endParaRPr lang="en-US" sz="2800" dirty="0"/>
           </a:p>
@@ -25349,11 +26279,11 @@
             </a:avLst>
           </a:prstGeom>
           <a:solidFill>
-            <a:srgbClr val="CCFBF1"/>
+            <a:srgbClr val="DDD6FE"/>
           </a:solidFill>
           <a:ln w="19050">
             <a:solidFill>
-              <a:srgbClr val="0D9488"/>
+              <a:srgbClr val="7C3AED"/>
             </a:solidFill>
             <a:prstDash val="solid"/>
           </a:ln>
@@ -25393,13 +26323,13 @@
             <a:r>
               <a:rPr lang="en-US" sz="1300" b="1" dirty="0">
                 <a:solidFill>
-                  <a:srgbClr val="0F766E"/>
+                  <a:srgbClr val="4C1D95"/>
                 </a:solidFill>
                 <a:latin typeface="Trebuchet MS" pitchFamily="34" charset="0"/>
                 <a:ea typeface="Trebuchet MS" pitchFamily="34" charset="-122"/>
                 <a:cs typeface="Trebuchet MS" pitchFamily="34" charset="-120"/>
               </a:rPr>
-              <a:t>make</a:t>
+              <a:t>re</a:t>
             </a:r>
             <a:endParaRPr lang="en-US" sz="1300" dirty="0"/>
           </a:p>
@@ -25438,7 +26368,7 @@
                 <a:ea typeface="Calibri" pitchFamily="34" charset="-122"/>
                 <a:cs typeface="Calibri" pitchFamily="34" charset="-120"/>
               </a:rPr>
-              <a:t>to create or produce</a:t>
+              <a:t>again</a:t>
             </a:r>
             <a:endParaRPr lang="en-US" sz="850" dirty="0"/>
           </a:p>
@@ -25461,11 +26391,11 @@
             </a:avLst>
           </a:prstGeom>
           <a:solidFill>
-            <a:srgbClr val="FCE7F3"/>
+            <a:srgbClr val="CCFBF1"/>
           </a:solidFill>
           <a:ln w="19050">
             <a:solidFill>
-              <a:srgbClr val="DB2777"/>
+              <a:srgbClr val="0D9488"/>
             </a:solidFill>
             <a:prstDash val="solid"/>
           </a:ln>
@@ -25505,13 +26435,13 @@
             <a:r>
               <a:rPr lang="en-US" sz="1300" b="1" dirty="0">
                 <a:solidFill>
-                  <a:srgbClr val="9D174D"/>
+                  <a:srgbClr val="0F766E"/>
                 </a:solidFill>
                 <a:latin typeface="Trebuchet MS" pitchFamily="34" charset="0"/>
                 <a:ea typeface="Trebuchet MS" pitchFamily="34" charset="-122"/>
                 <a:cs typeface="Trebuchet MS" pitchFamily="34" charset="-120"/>
               </a:rPr>
-              <a:t>shift</a:t>
+              <a:t>make</a:t>
             </a:r>
             <a:endParaRPr lang="en-US" sz="1300" dirty="0"/>
           </a:p>
@@ -25550,7 +26480,7 @@
                 <a:ea typeface="Calibri" pitchFamily="34" charset="-122"/>
                 <a:cs typeface="Calibri" pitchFamily="34" charset="-120"/>
               </a:rPr>
-              <a:t>a change or temporary arrangement</a:t>
+              <a:t>to create</a:t>
             </a:r>
             <a:endParaRPr lang="en-US" sz="850" dirty="0"/>
           </a:p>
@@ -25709,7 +26639,7 @@
                 <a:ea typeface="Trebuchet MS" pitchFamily="34" charset="-122"/>
                 <a:cs typeface="Trebuchet MS" pitchFamily="34" charset="-120"/>
               </a:rPr>
-              <a:t>make</a:t>
+              <a:t>re</a:t>
             </a:r>
             <a:endParaRPr lang="en-US" sz="1400" dirty="0"/>
           </a:p>
@@ -25814,7 +26744,7 @@
                 <a:ea typeface="Trebuchet MS" pitchFamily="34" charset="-122"/>
                 <a:cs typeface="Trebuchet MS" pitchFamily="34" charset="-120"/>
               </a:rPr>
-              <a:t>shift</a:t>
+              <a:t>make</a:t>
             </a:r>
             <a:endParaRPr lang="en-US" sz="1400" dirty="0"/>
           </a:p>
@@ -26238,7 +27168,7 @@
                 <a:ea typeface="Calibri" pitchFamily="34" charset="-122"/>
                 <a:cs typeface="Calibri" pitchFamily="34" charset="-120"/>
               </a:rPr>
-              <a:t>Word Labs  •  wordlabs.app  •  Root: 'make' = to create or produce something</a:t>
+              <a:t>Word Labs  •  wordlabs.app  •  Root: 'make' = to create or produce</a:t>
             </a:r>
             <a:endParaRPr lang="en-US" sz="800" dirty="0"/>
           </a:p>
@@ -26377,7 +27307,7 @@
                 <a:ea typeface="Trebuchet MS" pitchFamily="34" charset="-122"/>
                 <a:cs typeface="Trebuchet MS" pitchFamily="34" charset="-120"/>
               </a:rPr>
-              <a:t>makeshift</a:t>
+              <a:t>remake</a:t>
             </a:r>
             <a:endParaRPr lang="en-US" sz="2800" dirty="0"/>
           </a:p>
@@ -26466,11 +27396,11 @@
             </a:avLst>
           </a:prstGeom>
           <a:solidFill>
-            <a:srgbClr val="CCFBF1"/>
+            <a:srgbClr val="DDD6FE"/>
           </a:solidFill>
           <a:ln w="19050">
             <a:solidFill>
-              <a:srgbClr val="0D9488"/>
+              <a:srgbClr val="7C3AED"/>
             </a:solidFill>
             <a:prstDash val="solid"/>
           </a:ln>
@@ -26510,13 +27440,13 @@
             <a:r>
               <a:rPr lang="en-US" sz="1300" b="1" dirty="0">
                 <a:solidFill>
-                  <a:srgbClr val="0F766E"/>
+                  <a:srgbClr val="4C1D95"/>
                 </a:solidFill>
                 <a:latin typeface="Trebuchet MS" pitchFamily="34" charset="0"/>
                 <a:ea typeface="Trebuchet MS" pitchFamily="34" charset="-122"/>
                 <a:cs typeface="Trebuchet MS" pitchFamily="34" charset="-120"/>
               </a:rPr>
-              <a:t>make</a:t>
+              <a:t>re</a:t>
             </a:r>
             <a:endParaRPr lang="en-US" sz="1300" dirty="0"/>
           </a:p>
@@ -26555,7 +27485,7 @@
                 <a:ea typeface="Calibri" pitchFamily="34" charset="-122"/>
                 <a:cs typeface="Calibri" pitchFamily="34" charset="-120"/>
               </a:rPr>
-              <a:t>to create or produce</a:t>
+              <a:t>again</a:t>
             </a:r>
             <a:endParaRPr lang="en-US" sz="850" dirty="0"/>
           </a:p>
@@ -26578,11 +27508,11 @@
             </a:avLst>
           </a:prstGeom>
           <a:solidFill>
-            <a:srgbClr val="FCE7F3"/>
+            <a:srgbClr val="CCFBF1"/>
           </a:solidFill>
           <a:ln w="19050">
             <a:solidFill>
-              <a:srgbClr val="DB2777"/>
+              <a:srgbClr val="0D9488"/>
             </a:solidFill>
             <a:prstDash val="solid"/>
           </a:ln>
@@ -26622,13 +27552,13 @@
             <a:r>
               <a:rPr lang="en-US" sz="1300" b="1" dirty="0">
                 <a:solidFill>
-                  <a:srgbClr val="9D174D"/>
+                  <a:srgbClr val="0F766E"/>
                 </a:solidFill>
                 <a:latin typeface="Trebuchet MS" pitchFamily="34" charset="0"/>
                 <a:ea typeface="Trebuchet MS" pitchFamily="34" charset="-122"/>
                 <a:cs typeface="Trebuchet MS" pitchFamily="34" charset="-120"/>
               </a:rPr>
-              <a:t>shift</a:t>
+              <a:t>make</a:t>
             </a:r>
             <a:endParaRPr lang="en-US" sz="1300" dirty="0"/>
           </a:p>
@@ -26667,7 +27597,7 @@
                 <a:ea typeface="Calibri" pitchFamily="34" charset="-122"/>
                 <a:cs typeface="Calibri" pitchFamily="34" charset="-120"/>
               </a:rPr>
-              <a:t>a change or temporary arrangement</a:t>
+              <a:t>to create</a:t>
             </a:r>
             <a:endParaRPr lang="en-US" sz="850" dirty="0"/>
           </a:p>
@@ -26826,7 +27756,7 @@
                 <a:ea typeface="Trebuchet MS" pitchFamily="34" charset="-122"/>
                 <a:cs typeface="Trebuchet MS" pitchFamily="34" charset="-120"/>
               </a:rPr>
-              <a:t>make</a:t>
+              <a:t>re</a:t>
             </a:r>
             <a:endParaRPr lang="en-US" sz="1400" dirty="0"/>
           </a:p>
@@ -26931,7 +27861,7 @@
                 <a:ea typeface="Trebuchet MS" pitchFamily="34" charset="-122"/>
                 <a:cs typeface="Trebuchet MS" pitchFamily="34" charset="-120"/>
               </a:rPr>
-              <a:t>shift</a:t>
+              <a:t>make</a:t>
             </a:r>
             <a:endParaRPr lang="en-US" sz="1400" dirty="0"/>
           </a:p>
@@ -27038,7 +27968,7 @@
         </p:nvSpPr>
         <p:spPr>
           <a:xfrm>
-            <a:off x="2124837" y="4169664"/>
+            <a:off x="2254649" y="4169664"/>
             <a:ext cx="685800" cy="475488"/>
           </a:xfrm>
           <a:prstGeom prst="rect">
@@ -27065,7 +27995,7 @@
         </p:nvSpPr>
         <p:spPr>
           <a:xfrm>
-            <a:off x="2124837" y="4169664"/>
+            <a:off x="2254649" y="4169664"/>
             <a:ext cx="685800" cy="475488"/>
           </a:xfrm>
           <a:prstGeom prst="rect">
@@ -27090,7 +28020,7 @@
                 <a:ea typeface="Trebuchet MS" pitchFamily="34" charset="-122"/>
                 <a:cs typeface="Trebuchet MS" pitchFamily="34" charset="-120"/>
               </a:rPr>
-              <a:t>m</a:t>
+              <a:t>r</a:t>
             </a:r>
             <a:endParaRPr lang="en-US" sz="900" dirty="0"/>
           </a:p>
@@ -27104,7 +28034,7 @@
         </p:nvSpPr>
         <p:spPr>
           <a:xfrm>
-            <a:off x="3033522" y="4169664"/>
+            <a:off x="3293146" y="4169664"/>
             <a:ext cx="685800" cy="475488"/>
           </a:xfrm>
           <a:prstGeom prst="rect">
@@ -27131,7 +28061,7 @@
         </p:nvSpPr>
         <p:spPr>
           <a:xfrm>
-            <a:off x="3033522" y="4169664"/>
+            <a:off x="3293146" y="4169664"/>
             <a:ext cx="685800" cy="475488"/>
           </a:xfrm>
           <a:prstGeom prst="rect">
@@ -27156,7 +28086,7 @@
                 <a:ea typeface="Trebuchet MS" pitchFamily="34" charset="-122"/>
                 <a:cs typeface="Trebuchet MS" pitchFamily="34" charset="-120"/>
               </a:rPr>
-              <a:t>a</a:t>
+              <a:t>e</a:t>
             </a:r>
             <a:endParaRPr lang="en-US" sz="900" dirty="0"/>
           </a:p>
@@ -27170,7 +28100,7 @@
         </p:nvSpPr>
         <p:spPr>
           <a:xfrm>
-            <a:off x="3942207" y="4169664"/>
+            <a:off x="4331643" y="4169664"/>
             <a:ext cx="685800" cy="475488"/>
           </a:xfrm>
           <a:prstGeom prst="rect">
@@ -27197,7 +28127,7 @@
         </p:nvSpPr>
         <p:spPr>
           <a:xfrm>
-            <a:off x="3942207" y="4169664"/>
+            <a:off x="4331643" y="4169664"/>
             <a:ext cx="685800" cy="475488"/>
           </a:xfrm>
           <a:prstGeom prst="rect">
@@ -27222,7 +28152,7 @@
                 <a:ea typeface="Trebuchet MS" pitchFamily="34" charset="-122"/>
                 <a:cs typeface="Trebuchet MS" pitchFamily="34" charset="-120"/>
               </a:rPr>
-              <a:t>ke</a:t>
+              <a:t>m</a:t>
             </a:r>
             <a:endParaRPr lang="en-US" sz="900" dirty="0"/>
           </a:p>
@@ -27236,7 +28166,7 @@
         </p:nvSpPr>
         <p:spPr>
           <a:xfrm>
-            <a:off x="4850892" y="4169664"/>
+            <a:off x="5370141" y="4169664"/>
             <a:ext cx="685800" cy="475488"/>
           </a:xfrm>
           <a:prstGeom prst="rect">
@@ -27263,7 +28193,7 @@
         </p:nvSpPr>
         <p:spPr>
           <a:xfrm>
-            <a:off x="4850892" y="4169664"/>
+            <a:off x="5370141" y="4169664"/>
             <a:ext cx="685800" cy="475488"/>
           </a:xfrm>
           <a:prstGeom prst="rect">
@@ -27288,7 +28218,7 @@
                 <a:ea typeface="Trebuchet MS" pitchFamily="34" charset="-122"/>
                 <a:cs typeface="Trebuchet MS" pitchFamily="34" charset="-120"/>
               </a:rPr>
-              <a:t>sh</a:t>
+              <a:t>a</a:t>
             </a:r>
             <a:endParaRPr lang="en-US" sz="900" dirty="0"/>
           </a:p>
@@ -27302,7 +28232,7 @@
         </p:nvSpPr>
         <p:spPr>
           <a:xfrm>
-            <a:off x="5759577" y="4169664"/>
+            <a:off x="6408638" y="4169664"/>
             <a:ext cx="685800" cy="475488"/>
           </a:xfrm>
           <a:prstGeom prst="rect">
@@ -27329,7 +28259,7 @@
         </p:nvSpPr>
         <p:spPr>
           <a:xfrm>
-            <a:off x="5759577" y="4169664"/>
+            <a:off x="6408638" y="4169664"/>
             <a:ext cx="685800" cy="475488"/>
           </a:xfrm>
           <a:prstGeom prst="rect">
@@ -27354,7 +28284,7 @@
                 <a:ea typeface="Trebuchet MS" pitchFamily="34" charset="-122"/>
                 <a:cs typeface="Trebuchet MS" pitchFamily="34" charset="-120"/>
               </a:rPr>
-              <a:t>i</a:t>
+              <a:t>k</a:t>
             </a:r>
             <a:endParaRPr lang="en-US" sz="900" dirty="0"/>
           </a:p>
@@ -27368,7 +28298,7 @@
         </p:nvSpPr>
         <p:spPr>
           <a:xfrm>
-            <a:off x="6668262" y="4169664"/>
+            <a:off x="7447135" y="4169664"/>
             <a:ext cx="685800" cy="475488"/>
           </a:xfrm>
           <a:prstGeom prst="rect">
@@ -27395,7 +28325,7 @@
         </p:nvSpPr>
         <p:spPr>
           <a:xfrm>
-            <a:off x="6668262" y="4169664"/>
+            <a:off x="7447135" y="4169664"/>
             <a:ext cx="685800" cy="475488"/>
           </a:xfrm>
           <a:prstGeom prst="rect">
@@ -27420,73 +28350,7 @@
                 <a:ea typeface="Trebuchet MS" pitchFamily="34" charset="-122"/>
                 <a:cs typeface="Trebuchet MS" pitchFamily="34" charset="-120"/>
               </a:rPr>
-              <a:t>f</a:t>
-            </a:r>
-            <a:endParaRPr lang="en-US" sz="900" dirty="0"/>
-          </a:p>
-        </p:txBody>
-      </p:sp>
-      <p:sp>
-        <p:nvSpPr>
-          <p:cNvPr id="45" name="Shape 43"/>
-          <p:cNvSpPr/>
-          <p:nvPr/>
-        </p:nvSpPr>
-        <p:spPr>
-          <a:xfrm>
-            <a:off x="7576947" y="4169664"/>
-            <a:ext cx="685800" cy="475488"/>
-          </a:xfrm>
-          <a:prstGeom prst="rect">
-            <a:avLst>
-              <a:gd name="adj" fmla="val 7692"/>
-            </a:avLst>
-          </a:prstGeom>
-          <a:solidFill>
-            <a:srgbClr val="FFFFFF"/>
-          </a:solidFill>
-          <a:ln w="12700">
-            <a:solidFill>
-              <a:srgbClr val="DB2777"/>
-            </a:solidFill>
-            <a:prstDash val="solid"/>
-          </a:ln>
-        </p:spPr>
-      </p:sp>
-      <p:sp>
-        <p:nvSpPr>
-          <p:cNvPr id="46" name="Text 44"/>
-          <p:cNvSpPr/>
-          <p:nvPr/>
-        </p:nvSpPr>
-        <p:spPr>
-          <a:xfrm>
-            <a:off x="7576947" y="4169664"/>
-            <a:ext cx="685800" cy="475488"/>
-          </a:xfrm>
-          <a:prstGeom prst="rect">
-            <a:avLst/>
-          </a:prstGeom>
-          <a:noFill/>
-          <a:ln/>
-        </p:spPr>
-        <p:txBody>
-          <a:bodyPr wrap="square" lIns="0" tIns="0" rIns="0" bIns="0" rtlCol="0" anchor="ctr"/>
-          <a:lstStyle/>
-          <a:p>
-            <a:pPr algn="ctr" indent="0" marL="0">
-              <a:buNone/>
-            </a:pPr>
-            <a:r>
-              <a:rPr lang="en-US" sz="900" b="1" dirty="0">
-                <a:solidFill>
-                  <a:srgbClr val="9D174D"/>
-                </a:solidFill>
-                <a:latin typeface="Trebuchet MS" pitchFamily="34" charset="0"/>
-                <a:ea typeface="Trebuchet MS" pitchFamily="34" charset="-122"/>
-                <a:cs typeface="Trebuchet MS" pitchFamily="34" charset="-120"/>
-              </a:rPr>
-              <a:t>t</a:t>
+              <a:t>e</a:t>
             </a:r>
             <a:endParaRPr lang="en-US" sz="900" dirty="0"/>
           </a:p>
@@ -27778,7 +28642,7 @@
                 <a:ea typeface="Calibri" pitchFamily="34" charset="-122"/>
                 <a:cs typeface="Calibri" pitchFamily="34" charset="-120"/>
               </a:rPr>
-              <a:t>Word Labs  •  wordlabs.app  •  Root: 'make' = to create or produce something</a:t>
+              <a:t>Word Labs  •  wordlabs.app  •  Root: 'make' = to create or produce</a:t>
             </a:r>
             <a:endParaRPr lang="en-US" sz="800" dirty="0"/>
           </a:p>
@@ -27917,7 +28781,7 @@
                 <a:ea typeface="Trebuchet MS" pitchFamily="34" charset="-122"/>
                 <a:cs typeface="Trebuchet MS" pitchFamily="34" charset="-120"/>
               </a:rPr>
-              <a:t>remake</a:t>
+              <a:t>makeover</a:t>
             </a:r>
             <a:endParaRPr lang="en-US" sz="2800" dirty="0"/>
           </a:p>
@@ -28605,7 +29469,7 @@
                 <a:ea typeface="Calibri" pitchFamily="34" charset="-122"/>
                 <a:cs typeface="Calibri" pitchFamily="34" charset="-120"/>
               </a:rPr>
-              <a:t>Word Labs  •  wordlabs.app  •  Root: 'make' = to create or produce something</a:t>
+              <a:t>Word Labs  •  wordlabs.app  •  Root: 'make' = to create or produce</a:t>
             </a:r>
             <a:endParaRPr lang="en-US" sz="800" dirty="0"/>
           </a:p>
@@ -28744,7 +29608,7 @@
                 <a:ea typeface="Trebuchet MS" pitchFamily="34" charset="-122"/>
                 <a:cs typeface="Trebuchet MS" pitchFamily="34" charset="-120"/>
               </a:rPr>
-              <a:t>remake</a:t>
+              <a:t>makeover</a:t>
             </a:r>
             <a:endParaRPr lang="en-US" sz="2800" dirty="0"/>
           </a:p>
@@ -28833,11 +29697,11 @@
             </a:avLst>
           </a:prstGeom>
           <a:solidFill>
-            <a:srgbClr val="DDD6FE"/>
+            <a:srgbClr val="CCFBF1"/>
           </a:solidFill>
           <a:ln w="19050">
             <a:solidFill>
-              <a:srgbClr val="7C3AED"/>
+              <a:srgbClr val="0D9488"/>
             </a:solidFill>
             <a:prstDash val="solid"/>
           </a:ln>
@@ -28877,13 +29741,13 @@
             <a:r>
               <a:rPr lang="en-US" sz="1300" b="1" dirty="0">
                 <a:solidFill>
-                  <a:srgbClr val="4C1D95"/>
+                  <a:srgbClr val="0F766E"/>
                 </a:solidFill>
                 <a:latin typeface="Trebuchet MS" pitchFamily="34" charset="0"/>
                 <a:ea typeface="Trebuchet MS" pitchFamily="34" charset="-122"/>
                 <a:cs typeface="Trebuchet MS" pitchFamily="34" charset="-120"/>
               </a:rPr>
-              <a:t>re</a:t>
+              <a:t>make</a:t>
             </a:r>
             <a:endParaRPr lang="en-US" sz="1300" dirty="0"/>
           </a:p>
@@ -28922,7 +29786,7 @@
                 <a:ea typeface="Calibri" pitchFamily="34" charset="-122"/>
                 <a:cs typeface="Calibri" pitchFamily="34" charset="-120"/>
               </a:rPr>
-              <a:t>again</a:t>
+              <a:t>to create</a:t>
             </a:r>
             <a:endParaRPr lang="en-US" sz="850" dirty="0"/>
           </a:p>
@@ -28945,11 +29809,11 @@
             </a:avLst>
           </a:prstGeom>
           <a:solidFill>
-            <a:srgbClr val="CCFBF1"/>
+            <a:srgbClr val="FCE7F3"/>
           </a:solidFill>
           <a:ln w="19050">
             <a:solidFill>
-              <a:srgbClr val="0D9488"/>
+              <a:srgbClr val="DB2777"/>
             </a:solidFill>
             <a:prstDash val="solid"/>
           </a:ln>
@@ -28989,13 +29853,13 @@
             <a:r>
               <a:rPr lang="en-US" sz="1300" b="1" dirty="0">
                 <a:solidFill>
-                  <a:srgbClr val="0F766E"/>
+                  <a:srgbClr val="9D174D"/>
                 </a:solidFill>
                 <a:latin typeface="Trebuchet MS" pitchFamily="34" charset="0"/>
                 <a:ea typeface="Trebuchet MS" pitchFamily="34" charset="-122"/>
                 <a:cs typeface="Trebuchet MS" pitchFamily="34" charset="-120"/>
               </a:rPr>
-              <a:t>make</a:t>
+              <a:t>over</a:t>
             </a:r>
             <a:endParaRPr lang="en-US" sz="1300" dirty="0"/>
           </a:p>
@@ -29034,7 +29898,7 @@
                 <a:ea typeface="Calibri" pitchFamily="34" charset="-122"/>
                 <a:cs typeface="Calibri" pitchFamily="34" charset="-120"/>
               </a:rPr>
-              <a:t>to create or produce</a:t>
+              <a:t>completely, from the beginning</a:t>
             </a:r>
             <a:endParaRPr lang="en-US" sz="850" dirty="0"/>
           </a:p>
@@ -29590,7 +30454,7 @@
                 <a:ea typeface="Calibri" pitchFamily="34" charset="-122"/>
                 <a:cs typeface="Calibri" pitchFamily="34" charset="-120"/>
               </a:rPr>
-              <a:t>Word Labs  •  wordlabs.app  •  Root: 'make' = to create or produce something</a:t>
+              <a:t>Word Labs  •  wordlabs.app  •  Root: 'make' = to create or produce</a:t>
             </a:r>
             <a:endParaRPr lang="en-US" sz="800" dirty="0"/>
           </a:p>
@@ -29729,7 +30593,7 @@
                 <a:ea typeface="Trebuchet MS" pitchFamily="34" charset="-122"/>
                 <a:cs typeface="Trebuchet MS" pitchFamily="34" charset="-120"/>
               </a:rPr>
-              <a:t>remake</a:t>
+              <a:t>makeover</a:t>
             </a:r>
             <a:endParaRPr lang="en-US" sz="2800" dirty="0"/>
           </a:p>
@@ -29818,11 +30682,11 @@
             </a:avLst>
           </a:prstGeom>
           <a:solidFill>
-            <a:srgbClr val="DDD6FE"/>
+            <a:srgbClr val="CCFBF1"/>
           </a:solidFill>
           <a:ln w="19050">
             <a:solidFill>
-              <a:srgbClr val="7C3AED"/>
+              <a:srgbClr val="0D9488"/>
             </a:solidFill>
             <a:prstDash val="solid"/>
           </a:ln>
@@ -29862,13 +30726,13 @@
             <a:r>
               <a:rPr lang="en-US" sz="1300" b="1" dirty="0">
                 <a:solidFill>
-                  <a:srgbClr val="4C1D95"/>
+                  <a:srgbClr val="0F766E"/>
                 </a:solidFill>
                 <a:latin typeface="Trebuchet MS" pitchFamily="34" charset="0"/>
                 <a:ea typeface="Trebuchet MS" pitchFamily="34" charset="-122"/>
                 <a:cs typeface="Trebuchet MS" pitchFamily="34" charset="-120"/>
               </a:rPr>
-              <a:t>re</a:t>
+              <a:t>make</a:t>
             </a:r>
             <a:endParaRPr lang="en-US" sz="1300" dirty="0"/>
           </a:p>
@@ -29907,7 +30771,7 @@
                 <a:ea typeface="Calibri" pitchFamily="34" charset="-122"/>
                 <a:cs typeface="Calibri" pitchFamily="34" charset="-120"/>
               </a:rPr>
-              <a:t>again</a:t>
+              <a:t>to create</a:t>
             </a:r>
             <a:endParaRPr lang="en-US" sz="850" dirty="0"/>
           </a:p>
@@ -29930,11 +30794,11 @@
             </a:avLst>
           </a:prstGeom>
           <a:solidFill>
-            <a:srgbClr val="CCFBF1"/>
+            <a:srgbClr val="FCE7F3"/>
           </a:solidFill>
           <a:ln w="19050">
             <a:solidFill>
-              <a:srgbClr val="0D9488"/>
+              <a:srgbClr val="DB2777"/>
             </a:solidFill>
             <a:prstDash val="solid"/>
           </a:ln>
@@ -29974,13 +30838,13 @@
             <a:r>
               <a:rPr lang="en-US" sz="1300" b="1" dirty="0">
                 <a:solidFill>
-                  <a:srgbClr val="0F766E"/>
+                  <a:srgbClr val="9D174D"/>
                 </a:solidFill>
                 <a:latin typeface="Trebuchet MS" pitchFamily="34" charset="0"/>
                 <a:ea typeface="Trebuchet MS" pitchFamily="34" charset="-122"/>
                 <a:cs typeface="Trebuchet MS" pitchFamily="34" charset="-120"/>
               </a:rPr>
-              <a:t>make</a:t>
+              <a:t>over</a:t>
             </a:r>
             <a:endParaRPr lang="en-US" sz="1300" dirty="0"/>
           </a:p>
@@ -30019,7 +30883,7 @@
                 <a:ea typeface="Calibri" pitchFamily="34" charset="-122"/>
                 <a:cs typeface="Calibri" pitchFamily="34" charset="-120"/>
               </a:rPr>
-              <a:t>to create or produce</a:t>
+              <a:t>completely, from the beginning</a:t>
             </a:r>
             <a:endParaRPr lang="en-US" sz="850" dirty="0"/>
           </a:p>
@@ -30126,7 +30990,7 @@
         </p:nvSpPr>
         <p:spPr>
           <a:xfrm>
-            <a:off x="2999232" y="3364992"/>
+            <a:off x="2313432" y="3364992"/>
             <a:ext cx="1645920" cy="475488"/>
           </a:xfrm>
           <a:prstGeom prst="rect">
@@ -30153,7 +31017,7 @@
         </p:nvSpPr>
         <p:spPr>
           <a:xfrm>
-            <a:off x="2999232" y="3364992"/>
+            <a:off x="2313432" y="3364992"/>
             <a:ext cx="1645920" cy="475488"/>
           </a:xfrm>
           <a:prstGeom prst="rect">
@@ -30178,7 +31042,7 @@
                 <a:ea typeface="Trebuchet MS" pitchFamily="34" charset="-122"/>
                 <a:cs typeface="Trebuchet MS" pitchFamily="34" charset="-120"/>
               </a:rPr>
-              <a:t>re</a:t>
+              <a:t>make</a:t>
             </a:r>
             <a:endParaRPr lang="en-US" sz="1400" dirty="0"/>
           </a:p>
@@ -30192,8 +31056,8 @@
         </p:nvSpPr>
         <p:spPr>
           <a:xfrm>
-            <a:off x="4645152" y="3364992"/>
-            <a:ext cx="1097280" cy="475488"/>
+            <a:off x="3959352" y="3364992"/>
+            <a:ext cx="411480" cy="475488"/>
           </a:xfrm>
           <a:prstGeom prst="rect">
             <a:avLst/>
@@ -30231,7 +31095,7 @@
         </p:nvSpPr>
         <p:spPr>
           <a:xfrm>
-            <a:off x="5742432" y="3364992"/>
+            <a:off x="4370832" y="3364992"/>
             <a:ext cx="1645920" cy="475488"/>
           </a:xfrm>
           <a:prstGeom prst="rect">
@@ -30258,7 +31122,7 @@
         </p:nvSpPr>
         <p:spPr>
           <a:xfrm>
-            <a:off x="5742432" y="3364992"/>
+            <a:off x="4370832" y="3364992"/>
             <a:ext cx="1645920" cy="475488"/>
           </a:xfrm>
           <a:prstGeom prst="rect">
@@ -30283,7 +31147,7 @@
                 <a:ea typeface="Trebuchet MS" pitchFamily="34" charset="-122"/>
                 <a:cs typeface="Trebuchet MS" pitchFamily="34" charset="-120"/>
               </a:rPr>
-              <a:t>make</a:t>
+              <a:t>o</a:t>
             </a:r>
             <a:endParaRPr lang="en-US" sz="1400" dirty="0"/>
           </a:p>
@@ -30291,7 +31155,112 @@
       </p:sp>
       <p:sp>
         <p:nvSpPr>
-          <p:cNvPr id="30" name="Shape 28"/>
+          <p:cNvPr id="30" name="Text 28"/>
+          <p:cNvSpPr/>
+          <p:nvPr/>
+        </p:nvSpPr>
+        <p:spPr>
+          <a:xfrm>
+            <a:off x="6016752" y="3364992"/>
+            <a:ext cx="411480" cy="475488"/>
+          </a:xfrm>
+          <a:prstGeom prst="rect">
+            <a:avLst/>
+          </a:prstGeom>
+          <a:noFill/>
+          <a:ln/>
+        </p:spPr>
+        <p:txBody>
+          <a:bodyPr wrap="square" lIns="0" tIns="0" rIns="0" bIns="0" rtlCol="0" anchor="ctr"/>
+          <a:lstStyle/>
+          <a:p>
+            <a:pPr algn="ctr" indent="0" marL="0">
+              <a:buNone/>
+            </a:pPr>
+            <a:r>
+              <a:rPr lang="en-US" sz="1600" b="1" dirty="0">
+                <a:solidFill>
+                  <a:srgbClr val="0D9488"/>
+                </a:solidFill>
+                <a:latin typeface="Trebuchet MS" pitchFamily="34" charset="0"/>
+                <a:ea typeface="Trebuchet MS" pitchFamily="34" charset="-122"/>
+                <a:cs typeface="Trebuchet MS" pitchFamily="34" charset="-120"/>
+              </a:rPr>
+              <a:t>·</a:t>
+            </a:r>
+            <a:endParaRPr lang="en-US" sz="1600" dirty="0"/>
+          </a:p>
+        </p:txBody>
+      </p:sp>
+      <p:sp>
+        <p:nvSpPr>
+          <p:cNvPr id="31" name="Shape 29"/>
+          <p:cNvSpPr/>
+          <p:nvPr/>
+        </p:nvSpPr>
+        <p:spPr>
+          <a:xfrm>
+            <a:off x="6428232" y="3364992"/>
+            <a:ext cx="1645920" cy="475488"/>
+          </a:xfrm>
+          <a:prstGeom prst="rect">
+            <a:avLst>
+              <a:gd name="adj" fmla="val 9615"/>
+            </a:avLst>
+          </a:prstGeom>
+          <a:solidFill>
+            <a:srgbClr val="FFFFFF"/>
+          </a:solidFill>
+          <a:ln w="12700">
+            <a:solidFill>
+              <a:srgbClr val="0D9488"/>
+            </a:solidFill>
+            <a:prstDash val="solid"/>
+          </a:ln>
+        </p:spPr>
+      </p:sp>
+      <p:sp>
+        <p:nvSpPr>
+          <p:cNvPr id="32" name="Text 30"/>
+          <p:cNvSpPr/>
+          <p:nvPr/>
+        </p:nvSpPr>
+        <p:spPr>
+          <a:xfrm>
+            <a:off x="6428232" y="3364992"/>
+            <a:ext cx="1645920" cy="475488"/>
+          </a:xfrm>
+          <a:prstGeom prst="rect">
+            <a:avLst/>
+          </a:prstGeom>
+          <a:noFill/>
+          <a:ln/>
+        </p:spPr>
+        <p:txBody>
+          <a:bodyPr wrap="square" lIns="0" tIns="0" rIns="0" bIns="0" rtlCol="0" anchor="ctr"/>
+          <a:lstStyle/>
+          <a:p>
+            <a:pPr algn="ctr" indent="0" marL="0">
+              <a:buNone/>
+            </a:pPr>
+            <a:r>
+              <a:rPr lang="en-US" sz="1400" b="1" dirty="0">
+                <a:solidFill>
+                  <a:srgbClr val="0D9488"/>
+                </a:solidFill>
+                <a:latin typeface="Trebuchet MS" pitchFamily="34" charset="0"/>
+                <a:ea typeface="Trebuchet MS" pitchFamily="34" charset="-122"/>
+                <a:cs typeface="Trebuchet MS" pitchFamily="34" charset="-120"/>
+              </a:rPr>
+              <a:t>ver</a:t>
+            </a:r>
+            <a:endParaRPr lang="en-US" sz="1400" dirty="0"/>
+          </a:p>
+        </p:txBody>
+      </p:sp>
+      <p:sp>
+        <p:nvSpPr>
+          <p:cNvPr id="33" name="Shape 31"/>
           <p:cNvSpPr/>
           <p:nvPr/>
         </p:nvSpPr>
@@ -30318,7 +31287,7 @@
       </p:sp>
       <p:sp>
         <p:nvSpPr>
-          <p:cNvPr id="31" name="Text 29"/>
+          <p:cNvPr id="34" name="Text 32"/>
           <p:cNvSpPr/>
           <p:nvPr/>
         </p:nvSpPr>
@@ -30357,7 +31326,7 @@
       </p:sp>
       <p:sp>
         <p:nvSpPr>
-          <p:cNvPr id="32" name="Shape 30"/>
+          <p:cNvPr id="35" name="Shape 33"/>
           <p:cNvSpPr/>
           <p:nvPr/>
         </p:nvSpPr>
@@ -30384,7 +31353,7 @@
       </p:sp>
       <p:sp>
         <p:nvSpPr>
-          <p:cNvPr id="33" name="Text 31"/>
+          <p:cNvPr id="36" name="Text 34"/>
           <p:cNvSpPr/>
           <p:nvPr/>
         </p:nvSpPr>
@@ -30707,7 +31676,7 @@
                 <a:ea typeface="Calibri" pitchFamily="34" charset="-122"/>
                 <a:cs typeface="Calibri" pitchFamily="34" charset="-120"/>
               </a:rPr>
-              <a:t>Word Labs  •  wordlabs.app  •  Root: 'make' = to create or produce something</a:t>
+              <a:t>Word Labs  •  wordlabs.app  •  Root: 'make' = to create or produce</a:t>
             </a:r>
             <a:endParaRPr lang="en-US" sz="800" dirty="0"/>
           </a:p>
@@ -30846,7 +31815,7 @@
                 <a:ea typeface="Trebuchet MS" pitchFamily="34" charset="-122"/>
                 <a:cs typeface="Trebuchet MS" pitchFamily="34" charset="-120"/>
               </a:rPr>
-              <a:t>remake</a:t>
+              <a:t>makeover</a:t>
             </a:r>
             <a:endParaRPr lang="en-US" sz="2800" dirty="0"/>
           </a:p>
@@ -30935,11 +31904,11 @@
             </a:avLst>
           </a:prstGeom>
           <a:solidFill>
-            <a:srgbClr val="DDD6FE"/>
+            <a:srgbClr val="CCFBF1"/>
           </a:solidFill>
           <a:ln w="19050">
             <a:solidFill>
-              <a:srgbClr val="7C3AED"/>
+              <a:srgbClr val="0D9488"/>
             </a:solidFill>
             <a:prstDash val="solid"/>
           </a:ln>
@@ -30979,13 +31948,13 @@
             <a:r>
               <a:rPr lang="en-US" sz="1300" b="1" dirty="0">
                 <a:solidFill>
-                  <a:srgbClr val="4C1D95"/>
+                  <a:srgbClr val="0F766E"/>
                 </a:solidFill>
                 <a:latin typeface="Trebuchet MS" pitchFamily="34" charset="0"/>
                 <a:ea typeface="Trebuchet MS" pitchFamily="34" charset="-122"/>
                 <a:cs typeface="Trebuchet MS" pitchFamily="34" charset="-120"/>
               </a:rPr>
-              <a:t>re</a:t>
+              <a:t>make</a:t>
             </a:r>
             <a:endParaRPr lang="en-US" sz="1300" dirty="0"/>
           </a:p>
@@ -31024,7 +31993,7 @@
                 <a:ea typeface="Calibri" pitchFamily="34" charset="-122"/>
                 <a:cs typeface="Calibri" pitchFamily="34" charset="-120"/>
               </a:rPr>
-              <a:t>again</a:t>
+              <a:t>to create</a:t>
             </a:r>
             <a:endParaRPr lang="en-US" sz="850" dirty="0"/>
           </a:p>
@@ -31047,11 +32016,11 @@
             </a:avLst>
           </a:prstGeom>
           <a:solidFill>
-            <a:srgbClr val="CCFBF1"/>
+            <a:srgbClr val="FCE7F3"/>
           </a:solidFill>
           <a:ln w="19050">
             <a:solidFill>
-              <a:srgbClr val="0D9488"/>
+              <a:srgbClr val="DB2777"/>
             </a:solidFill>
             <a:prstDash val="solid"/>
           </a:ln>
@@ -31091,13 +32060,13 @@
             <a:r>
               <a:rPr lang="en-US" sz="1300" b="1" dirty="0">
                 <a:solidFill>
-                  <a:srgbClr val="0F766E"/>
+                  <a:srgbClr val="9D174D"/>
                 </a:solidFill>
                 <a:latin typeface="Trebuchet MS" pitchFamily="34" charset="0"/>
                 <a:ea typeface="Trebuchet MS" pitchFamily="34" charset="-122"/>
                 <a:cs typeface="Trebuchet MS" pitchFamily="34" charset="-120"/>
               </a:rPr>
-              <a:t>make</a:t>
+              <a:t>over</a:t>
             </a:r>
             <a:endParaRPr lang="en-US" sz="1300" dirty="0"/>
           </a:p>
@@ -31136,7 +32105,7 @@
                 <a:ea typeface="Calibri" pitchFamily="34" charset="-122"/>
                 <a:cs typeface="Calibri" pitchFamily="34" charset="-120"/>
               </a:rPr>
-              <a:t>to create or produce</a:t>
+              <a:t>completely, from the beginning</a:t>
             </a:r>
             <a:endParaRPr lang="en-US" sz="850" dirty="0"/>
           </a:p>
@@ -31243,7 +32212,7 @@
         </p:nvSpPr>
         <p:spPr>
           <a:xfrm>
-            <a:off x="2999232" y="3364992"/>
+            <a:off x="2313432" y="3364992"/>
             <a:ext cx="1645920" cy="475488"/>
           </a:xfrm>
           <a:prstGeom prst="rect">
@@ -31270,7 +32239,7 @@
         </p:nvSpPr>
         <p:spPr>
           <a:xfrm>
-            <a:off x="2999232" y="3364992"/>
+            <a:off x="2313432" y="3364992"/>
             <a:ext cx="1645920" cy="475488"/>
           </a:xfrm>
           <a:prstGeom prst="rect">
@@ -31295,7 +32264,7 @@
                 <a:ea typeface="Trebuchet MS" pitchFamily="34" charset="-122"/>
                 <a:cs typeface="Trebuchet MS" pitchFamily="34" charset="-120"/>
               </a:rPr>
-              <a:t>re</a:t>
+              <a:t>make</a:t>
             </a:r>
             <a:endParaRPr lang="en-US" sz="1400" dirty="0"/>
           </a:p>
@@ -31309,8 +32278,8 @@
         </p:nvSpPr>
         <p:spPr>
           <a:xfrm>
-            <a:off x="4645152" y="3364992"/>
-            <a:ext cx="1097280" cy="475488"/>
+            <a:off x="3959352" y="3364992"/>
+            <a:ext cx="411480" cy="475488"/>
           </a:xfrm>
           <a:prstGeom prst="rect">
             <a:avLst/>
@@ -31348,7 +32317,7 @@
         </p:nvSpPr>
         <p:spPr>
           <a:xfrm>
-            <a:off x="5742432" y="3364992"/>
+            <a:off x="4370832" y="3364992"/>
             <a:ext cx="1645920" cy="475488"/>
           </a:xfrm>
           <a:prstGeom prst="rect">
@@ -31375,7 +32344,7 @@
         </p:nvSpPr>
         <p:spPr>
           <a:xfrm>
-            <a:off x="5742432" y="3364992"/>
+            <a:off x="4370832" y="3364992"/>
             <a:ext cx="1645920" cy="475488"/>
           </a:xfrm>
           <a:prstGeom prst="rect">
@@ -31400,7 +32369,7 @@
                 <a:ea typeface="Trebuchet MS" pitchFamily="34" charset="-122"/>
                 <a:cs typeface="Trebuchet MS" pitchFamily="34" charset="-120"/>
               </a:rPr>
-              <a:t>make</a:t>
+              <a:t>o</a:t>
             </a:r>
             <a:endParaRPr lang="en-US" sz="1400" dirty="0"/>
           </a:p>
@@ -31408,7 +32377,112 @@
       </p:sp>
       <p:sp>
         <p:nvSpPr>
-          <p:cNvPr id="30" name="Shape 28"/>
+          <p:cNvPr id="30" name="Text 28"/>
+          <p:cNvSpPr/>
+          <p:nvPr/>
+        </p:nvSpPr>
+        <p:spPr>
+          <a:xfrm>
+            <a:off x="6016752" y="3364992"/>
+            <a:ext cx="411480" cy="475488"/>
+          </a:xfrm>
+          <a:prstGeom prst="rect">
+            <a:avLst/>
+          </a:prstGeom>
+          <a:noFill/>
+          <a:ln/>
+        </p:spPr>
+        <p:txBody>
+          <a:bodyPr wrap="square" lIns="0" tIns="0" rIns="0" bIns="0" rtlCol="0" anchor="ctr"/>
+          <a:lstStyle/>
+          <a:p>
+            <a:pPr algn="ctr" indent="0" marL="0">
+              <a:buNone/>
+            </a:pPr>
+            <a:r>
+              <a:rPr lang="en-US" sz="1600" b="1" dirty="0">
+                <a:solidFill>
+                  <a:srgbClr val="0D9488"/>
+                </a:solidFill>
+                <a:latin typeface="Trebuchet MS" pitchFamily="34" charset="0"/>
+                <a:ea typeface="Trebuchet MS" pitchFamily="34" charset="-122"/>
+                <a:cs typeface="Trebuchet MS" pitchFamily="34" charset="-120"/>
+              </a:rPr>
+              <a:t>·</a:t>
+            </a:r>
+            <a:endParaRPr lang="en-US" sz="1600" dirty="0"/>
+          </a:p>
+        </p:txBody>
+      </p:sp>
+      <p:sp>
+        <p:nvSpPr>
+          <p:cNvPr id="31" name="Shape 29"/>
+          <p:cNvSpPr/>
+          <p:nvPr/>
+        </p:nvSpPr>
+        <p:spPr>
+          <a:xfrm>
+            <a:off x="6428232" y="3364992"/>
+            <a:ext cx="1645920" cy="475488"/>
+          </a:xfrm>
+          <a:prstGeom prst="rect">
+            <a:avLst>
+              <a:gd name="adj" fmla="val 9615"/>
+            </a:avLst>
+          </a:prstGeom>
+          <a:solidFill>
+            <a:srgbClr val="FFFFFF"/>
+          </a:solidFill>
+          <a:ln w="12700">
+            <a:solidFill>
+              <a:srgbClr val="0D9488"/>
+            </a:solidFill>
+            <a:prstDash val="solid"/>
+          </a:ln>
+        </p:spPr>
+      </p:sp>
+      <p:sp>
+        <p:nvSpPr>
+          <p:cNvPr id="32" name="Text 30"/>
+          <p:cNvSpPr/>
+          <p:nvPr/>
+        </p:nvSpPr>
+        <p:spPr>
+          <a:xfrm>
+            <a:off x="6428232" y="3364992"/>
+            <a:ext cx="1645920" cy="475488"/>
+          </a:xfrm>
+          <a:prstGeom prst="rect">
+            <a:avLst/>
+          </a:prstGeom>
+          <a:noFill/>
+          <a:ln/>
+        </p:spPr>
+        <p:txBody>
+          <a:bodyPr wrap="square" lIns="0" tIns="0" rIns="0" bIns="0" rtlCol="0" anchor="ctr"/>
+          <a:lstStyle/>
+          <a:p>
+            <a:pPr algn="ctr" indent="0" marL="0">
+              <a:buNone/>
+            </a:pPr>
+            <a:r>
+              <a:rPr lang="en-US" sz="1400" b="1" dirty="0">
+                <a:solidFill>
+                  <a:srgbClr val="0D9488"/>
+                </a:solidFill>
+                <a:latin typeface="Trebuchet MS" pitchFamily="34" charset="0"/>
+                <a:ea typeface="Trebuchet MS" pitchFamily="34" charset="-122"/>
+                <a:cs typeface="Trebuchet MS" pitchFamily="34" charset="-120"/>
+              </a:rPr>
+              <a:t>ver</a:t>
+            </a:r>
+            <a:endParaRPr lang="en-US" sz="1400" dirty="0"/>
+          </a:p>
+        </p:txBody>
+      </p:sp>
+      <p:sp>
+        <p:nvSpPr>
+          <p:cNvPr id="33" name="Shape 31"/>
           <p:cNvSpPr/>
           <p:nvPr/>
         </p:nvSpPr>
@@ -31435,7 +32509,7 @@
       </p:sp>
       <p:sp>
         <p:nvSpPr>
-          <p:cNvPr id="31" name="Text 29"/>
+          <p:cNvPr id="34" name="Text 32"/>
           <p:cNvSpPr/>
           <p:nvPr/>
         </p:nvSpPr>
@@ -31474,7 +32548,7 @@
       </p:sp>
       <p:sp>
         <p:nvSpPr>
-          <p:cNvPr id="32" name="Shape 30"/>
+          <p:cNvPr id="35" name="Shape 33"/>
           <p:cNvSpPr/>
           <p:nvPr/>
         </p:nvSpPr>
@@ -31501,13 +32575,13 @@
       </p:sp>
       <p:sp>
         <p:nvSpPr>
-          <p:cNvPr id="33" name="Shape 31"/>
-          <p:cNvSpPr/>
-          <p:nvPr/>
-        </p:nvSpPr>
-        <p:spPr>
-          <a:xfrm>
-            <a:off x="2427732" y="4169664"/>
+          <p:cNvPr id="36" name="Shape 34"/>
+          <p:cNvSpPr/>
+          <p:nvPr/>
+        </p:nvSpPr>
+        <p:spPr>
+          <a:xfrm>
+            <a:off x="2124837" y="4169664"/>
             <a:ext cx="685800" cy="475488"/>
           </a:xfrm>
           <a:prstGeom prst="rect">
@@ -31528,13 +32602,13 @@
       </p:sp>
       <p:sp>
         <p:nvSpPr>
-          <p:cNvPr id="34" name="Text 32"/>
-          <p:cNvSpPr/>
-          <p:nvPr/>
-        </p:nvSpPr>
-        <p:spPr>
-          <a:xfrm>
-            <a:off x="2427732" y="4169664"/>
+          <p:cNvPr id="37" name="Text 35"/>
+          <p:cNvSpPr/>
+          <p:nvPr/>
+        </p:nvSpPr>
+        <p:spPr>
+          <a:xfrm>
+            <a:off x="2124837" y="4169664"/>
             <a:ext cx="685800" cy="475488"/>
           </a:xfrm>
           <a:prstGeom prst="rect">
@@ -31559,7 +32633,7 @@
                 <a:ea typeface="Trebuchet MS" pitchFamily="34" charset="-122"/>
                 <a:cs typeface="Trebuchet MS" pitchFamily="34" charset="-120"/>
               </a:rPr>
-              <a:t>r</a:t>
+              <a:t>m</a:t>
             </a:r>
             <a:endParaRPr lang="en-US" sz="900" dirty="0"/>
           </a:p>
@@ -31567,13 +32641,13 @@
       </p:sp>
       <p:sp>
         <p:nvSpPr>
-          <p:cNvPr id="35" name="Shape 33"/>
-          <p:cNvSpPr/>
-          <p:nvPr/>
-        </p:nvSpPr>
-        <p:spPr>
-          <a:xfrm>
-            <a:off x="3639312" y="4169664"/>
+          <p:cNvPr id="38" name="Shape 36"/>
+          <p:cNvSpPr/>
+          <p:nvPr/>
+        </p:nvSpPr>
+        <p:spPr>
+          <a:xfrm>
+            <a:off x="3033522" y="4169664"/>
             <a:ext cx="685800" cy="475488"/>
           </a:xfrm>
           <a:prstGeom prst="rect">
@@ -31594,13 +32668,13 @@
       </p:sp>
       <p:sp>
         <p:nvSpPr>
-          <p:cNvPr id="36" name="Text 34"/>
-          <p:cNvSpPr/>
-          <p:nvPr/>
-        </p:nvSpPr>
-        <p:spPr>
-          <a:xfrm>
-            <a:off x="3639312" y="4169664"/>
+          <p:cNvPr id="39" name="Text 37"/>
+          <p:cNvSpPr/>
+          <p:nvPr/>
+        </p:nvSpPr>
+        <p:spPr>
+          <a:xfrm>
+            <a:off x="3033522" y="4169664"/>
             <a:ext cx="685800" cy="475488"/>
           </a:xfrm>
           <a:prstGeom prst="rect">
@@ -31625,7 +32699,7 @@
                 <a:ea typeface="Trebuchet MS" pitchFamily="34" charset="-122"/>
                 <a:cs typeface="Trebuchet MS" pitchFamily="34" charset="-120"/>
               </a:rPr>
-              <a:t>e</a:t>
+              <a:t>a</a:t>
             </a:r>
             <a:endParaRPr lang="en-US" sz="900" dirty="0"/>
           </a:p>
@@ -31633,13 +32707,13 @@
       </p:sp>
       <p:sp>
         <p:nvSpPr>
-          <p:cNvPr id="37" name="Shape 35"/>
-          <p:cNvSpPr/>
-          <p:nvPr/>
-        </p:nvSpPr>
-        <p:spPr>
-          <a:xfrm>
-            <a:off x="4850892" y="4169664"/>
+          <p:cNvPr id="40" name="Shape 38"/>
+          <p:cNvSpPr/>
+          <p:nvPr/>
+        </p:nvSpPr>
+        <p:spPr>
+          <a:xfrm>
+            <a:off x="3942207" y="4169664"/>
             <a:ext cx="685800" cy="475488"/>
           </a:xfrm>
           <a:prstGeom prst="rect">
@@ -31660,13 +32734,13 @@
       </p:sp>
       <p:sp>
         <p:nvSpPr>
-          <p:cNvPr id="38" name="Text 36"/>
-          <p:cNvSpPr/>
-          <p:nvPr/>
-        </p:nvSpPr>
-        <p:spPr>
-          <a:xfrm>
-            <a:off x="4850892" y="4169664"/>
+          <p:cNvPr id="41" name="Text 39"/>
+          <p:cNvSpPr/>
+          <p:nvPr/>
+        </p:nvSpPr>
+        <p:spPr>
+          <a:xfrm>
+            <a:off x="3942207" y="4169664"/>
             <a:ext cx="685800" cy="475488"/>
           </a:xfrm>
           <a:prstGeom prst="rect">
@@ -31691,7 +32765,7 @@
                 <a:ea typeface="Trebuchet MS" pitchFamily="34" charset="-122"/>
                 <a:cs typeface="Trebuchet MS" pitchFamily="34" charset="-120"/>
               </a:rPr>
-              <a:t>m</a:t>
+              <a:t>k</a:t>
             </a:r>
             <a:endParaRPr lang="en-US" sz="900" dirty="0"/>
           </a:p>
@@ -31699,13 +32773,13 @@
       </p:sp>
       <p:sp>
         <p:nvSpPr>
-          <p:cNvPr id="39" name="Shape 37"/>
-          <p:cNvSpPr/>
-          <p:nvPr/>
-        </p:nvSpPr>
-        <p:spPr>
-          <a:xfrm>
-            <a:off x="6062472" y="4169664"/>
+          <p:cNvPr id="42" name="Shape 40"/>
+          <p:cNvSpPr/>
+          <p:nvPr/>
+        </p:nvSpPr>
+        <p:spPr>
+          <a:xfrm>
+            <a:off x="4850892" y="4169664"/>
             <a:ext cx="685800" cy="475488"/>
           </a:xfrm>
           <a:prstGeom prst="rect">
@@ -31726,13 +32800,13 @@
       </p:sp>
       <p:sp>
         <p:nvSpPr>
-          <p:cNvPr id="40" name="Text 38"/>
-          <p:cNvSpPr/>
-          <p:nvPr/>
-        </p:nvSpPr>
-        <p:spPr>
-          <a:xfrm>
-            <a:off x="6062472" y="4169664"/>
+          <p:cNvPr id="43" name="Text 41"/>
+          <p:cNvSpPr/>
+          <p:nvPr/>
+        </p:nvSpPr>
+        <p:spPr>
+          <a:xfrm>
+            <a:off x="4850892" y="4169664"/>
             <a:ext cx="685800" cy="475488"/>
           </a:xfrm>
           <a:prstGeom prst="rect">
@@ -31757,7 +32831,7 @@
                 <a:ea typeface="Trebuchet MS" pitchFamily="34" charset="-122"/>
                 <a:cs typeface="Trebuchet MS" pitchFamily="34" charset="-120"/>
               </a:rPr>
-              <a:t>a</a:t>
+              <a:t>e</a:t>
             </a:r>
             <a:endParaRPr lang="en-US" sz="900" dirty="0"/>
           </a:p>
@@ -31765,13 +32839,13 @@
       </p:sp>
       <p:sp>
         <p:nvSpPr>
-          <p:cNvPr id="41" name="Shape 39"/>
-          <p:cNvSpPr/>
-          <p:nvPr/>
-        </p:nvSpPr>
-        <p:spPr>
-          <a:xfrm>
-            <a:off x="7274052" y="4169664"/>
+          <p:cNvPr id="44" name="Shape 42"/>
+          <p:cNvSpPr/>
+          <p:nvPr/>
+        </p:nvSpPr>
+        <p:spPr>
+          <a:xfrm>
+            <a:off x="5759577" y="4169664"/>
             <a:ext cx="685800" cy="475488"/>
           </a:xfrm>
           <a:prstGeom prst="rect">
@@ -31792,13 +32866,13 @@
       </p:sp>
       <p:sp>
         <p:nvSpPr>
-          <p:cNvPr id="42" name="Text 40"/>
-          <p:cNvSpPr/>
-          <p:nvPr/>
-        </p:nvSpPr>
-        <p:spPr>
-          <a:xfrm>
-            <a:off x="7274052" y="4169664"/>
+          <p:cNvPr id="45" name="Text 43"/>
+          <p:cNvSpPr/>
+          <p:nvPr/>
+        </p:nvSpPr>
+        <p:spPr>
+          <a:xfrm>
+            <a:off x="5759577" y="4169664"/>
             <a:ext cx="685800" cy="475488"/>
           </a:xfrm>
           <a:prstGeom prst="rect">
@@ -31823,7 +32897,139 @@
                 <a:ea typeface="Trebuchet MS" pitchFamily="34" charset="-122"/>
                 <a:cs typeface="Trebuchet MS" pitchFamily="34" charset="-120"/>
               </a:rPr>
-              <a:t>ke</a:t>
+              <a:t>o</a:t>
+            </a:r>
+            <a:endParaRPr lang="en-US" sz="900" dirty="0"/>
+          </a:p>
+        </p:txBody>
+      </p:sp>
+      <p:sp>
+        <p:nvSpPr>
+          <p:cNvPr id="46" name="Shape 44"/>
+          <p:cNvSpPr/>
+          <p:nvPr/>
+        </p:nvSpPr>
+        <p:spPr>
+          <a:xfrm>
+            <a:off x="6668262" y="4169664"/>
+            <a:ext cx="685800" cy="475488"/>
+          </a:xfrm>
+          <a:prstGeom prst="rect">
+            <a:avLst>
+              <a:gd name="adj" fmla="val 7692"/>
+            </a:avLst>
+          </a:prstGeom>
+          <a:solidFill>
+            <a:srgbClr val="FFFFFF"/>
+          </a:solidFill>
+          <a:ln w="12700">
+            <a:solidFill>
+              <a:srgbClr val="DB2777"/>
+            </a:solidFill>
+            <a:prstDash val="solid"/>
+          </a:ln>
+        </p:spPr>
+      </p:sp>
+      <p:sp>
+        <p:nvSpPr>
+          <p:cNvPr id="47" name="Text 45"/>
+          <p:cNvSpPr/>
+          <p:nvPr/>
+        </p:nvSpPr>
+        <p:spPr>
+          <a:xfrm>
+            <a:off x="6668262" y="4169664"/>
+            <a:ext cx="685800" cy="475488"/>
+          </a:xfrm>
+          <a:prstGeom prst="rect">
+            <a:avLst/>
+          </a:prstGeom>
+          <a:noFill/>
+          <a:ln/>
+        </p:spPr>
+        <p:txBody>
+          <a:bodyPr wrap="square" lIns="0" tIns="0" rIns="0" bIns="0" rtlCol="0" anchor="ctr"/>
+          <a:lstStyle/>
+          <a:p>
+            <a:pPr algn="ctr" indent="0" marL="0">
+              <a:buNone/>
+            </a:pPr>
+            <a:r>
+              <a:rPr lang="en-US" sz="900" b="1" dirty="0">
+                <a:solidFill>
+                  <a:srgbClr val="9D174D"/>
+                </a:solidFill>
+                <a:latin typeface="Trebuchet MS" pitchFamily="34" charset="0"/>
+                <a:ea typeface="Trebuchet MS" pitchFamily="34" charset="-122"/>
+                <a:cs typeface="Trebuchet MS" pitchFamily="34" charset="-120"/>
+              </a:rPr>
+              <a:t>v</a:t>
+            </a:r>
+            <a:endParaRPr lang="en-US" sz="900" dirty="0"/>
+          </a:p>
+        </p:txBody>
+      </p:sp>
+      <p:sp>
+        <p:nvSpPr>
+          <p:cNvPr id="48" name="Shape 46"/>
+          <p:cNvSpPr/>
+          <p:nvPr/>
+        </p:nvSpPr>
+        <p:spPr>
+          <a:xfrm>
+            <a:off x="7576947" y="4169664"/>
+            <a:ext cx="685800" cy="475488"/>
+          </a:xfrm>
+          <a:prstGeom prst="rect">
+            <a:avLst>
+              <a:gd name="adj" fmla="val 7692"/>
+            </a:avLst>
+          </a:prstGeom>
+          <a:solidFill>
+            <a:srgbClr val="FFFFFF"/>
+          </a:solidFill>
+          <a:ln w="12700">
+            <a:solidFill>
+              <a:srgbClr val="DB2777"/>
+            </a:solidFill>
+            <a:prstDash val="solid"/>
+          </a:ln>
+        </p:spPr>
+      </p:sp>
+      <p:sp>
+        <p:nvSpPr>
+          <p:cNvPr id="49" name="Text 47"/>
+          <p:cNvSpPr/>
+          <p:nvPr/>
+        </p:nvSpPr>
+        <p:spPr>
+          <a:xfrm>
+            <a:off x="7576947" y="4169664"/>
+            <a:ext cx="685800" cy="475488"/>
+          </a:xfrm>
+          <a:prstGeom prst="rect">
+            <a:avLst/>
+          </a:prstGeom>
+          <a:noFill/>
+          <a:ln/>
+        </p:spPr>
+        <p:txBody>
+          <a:bodyPr wrap="square" lIns="0" tIns="0" rIns="0" bIns="0" rtlCol="0" anchor="ctr"/>
+          <a:lstStyle/>
+          <a:p>
+            <a:pPr algn="ctr" indent="0" marL="0">
+              <a:buNone/>
+            </a:pPr>
+            <a:r>
+              <a:rPr lang="en-US" sz="900" b="1" dirty="0">
+                <a:solidFill>
+                  <a:srgbClr val="9D174D"/>
+                </a:solidFill>
+                <a:latin typeface="Trebuchet MS" pitchFamily="34" charset="0"/>
+                <a:ea typeface="Trebuchet MS" pitchFamily="34" charset="-122"/>
+                <a:cs typeface="Trebuchet MS" pitchFamily="34" charset="-120"/>
+              </a:rPr>
+              <a:t>er</a:t>
             </a:r>
             <a:endParaRPr lang="en-US" sz="900" dirty="0"/>
           </a:p>
@@ -32115,7 +33321,7 @@
                 <a:ea typeface="Calibri" pitchFamily="34" charset="-122"/>
                 <a:cs typeface="Calibri" pitchFamily="34" charset="-120"/>
               </a:rPr>
-              <a:t>Word Labs  •  wordlabs.app  •  Root: 'make' = to create or produce something</a:t>
+              <a:t>Word Labs  •  wordlabs.app  •  Root: 'make' = to create or produce</a:t>
             </a:r>
             <a:endParaRPr lang="en-US" sz="800" dirty="0"/>
           </a:p>
@@ -33284,7 +34490,7 @@
                 <a:ea typeface="Calibri" pitchFamily="34" charset="-122"/>
                 <a:cs typeface="Calibri" pitchFamily="34" charset="-120"/>
               </a:rPr>
-              <a:t>Word Labs  •  wordlabs.app  •  Root: 'make' = to create or produce something</a:t>
+              <a:t>Word Labs  •  wordlabs.app  •  Root: 'make' = to create or produce</a:t>
             </a:r>
             <a:endParaRPr lang="en-US" sz="800" dirty="0"/>
           </a:p>
@@ -34083,7 +35289,7 @@
                 <a:ea typeface="Trebuchet MS" pitchFamily="34" charset="-122"/>
                 <a:cs typeface="Trebuchet MS" pitchFamily="34" charset="-120"/>
               </a:rPr>
-              <a:t>home-</a:t>
+              <a:t>self-</a:t>
             </a:r>
             <a:endParaRPr lang="en-US" sz="1300" dirty="0"/>
           </a:p>
@@ -34236,7 +35442,7 @@
                 <a:ea typeface="Trebuchet MS" pitchFamily="34" charset="-122"/>
                 <a:cs typeface="Trebuchet MS" pitchFamily="34" charset="-120"/>
               </a:rPr>
-              <a:t>hand-</a:t>
+              <a:t>home-</a:t>
             </a:r>
             <a:endParaRPr lang="en-US" sz="1300" dirty="0"/>
           </a:p>
@@ -34628,7 +35834,7 @@
                 <a:ea typeface="Trebuchet MS" pitchFamily="34" charset="-122"/>
                 <a:cs typeface="Trebuchet MS" pitchFamily="34" charset="-120"/>
               </a:rPr>
-              <a:t>making</a:t>
+              <a:t>makeshift</a:t>
             </a:r>
             <a:endParaRPr lang="en-US" sz="1200" dirty="0"/>
           </a:p>
@@ -34694,7 +35900,7 @@
                 <a:ea typeface="Trebuchet MS" pitchFamily="34" charset="-122"/>
                 <a:cs typeface="Trebuchet MS" pitchFamily="34" charset="-120"/>
               </a:rPr>
-              <a:t>makeshift</a:t>
+              <a:t>makeover</a:t>
             </a:r>
             <a:endParaRPr lang="en-US" sz="1200" dirty="0"/>
           </a:p>
@@ -34760,7 +35966,7 @@
                 <a:ea typeface="Trebuchet MS" pitchFamily="34" charset="-122"/>
                 <a:cs typeface="Trebuchet MS" pitchFamily="34" charset="-120"/>
               </a:rPr>
-              <a:t>makeover</a:t>
+              <a:t>homemaker</a:t>
             </a:r>
             <a:endParaRPr lang="en-US" sz="1200" dirty="0"/>
           </a:p>
@@ -34826,7 +36032,7 @@
                 <a:ea typeface="Trebuchet MS" pitchFamily="34" charset="-122"/>
                 <a:cs typeface="Trebuchet MS" pitchFamily="34" charset="-120"/>
               </a:rPr>
-              <a:t>homemaker</a:t>
+              <a:t>dressmaker</a:t>
             </a:r>
             <a:endParaRPr lang="en-US" sz="1200" dirty="0"/>
           </a:p>
@@ -34892,7 +36098,7 @@
                 <a:ea typeface="Trebuchet MS" pitchFamily="34" charset="-122"/>
                 <a:cs typeface="Trebuchet MS" pitchFamily="34" charset="-120"/>
               </a:rPr>
-              <a:t>handmade</a:t>
+              <a:t>peacemaker</a:t>
             </a:r>
             <a:endParaRPr lang="en-US" sz="1200" dirty="0"/>
           </a:p>
@@ -35184,7 +36390,7 @@
                 <a:ea typeface="Calibri" pitchFamily="34" charset="-122"/>
                 <a:cs typeface="Calibri" pitchFamily="34" charset="-120"/>
               </a:rPr>
-              <a:t>Word Labs  •  wordlabs.app  •  Root: 'make' = to create or produce something</a:t>
+              <a:t>Word Labs  •  wordlabs.app  •  Root: 'make' = to create or produce</a:t>
             </a:r>
             <a:endParaRPr lang="en-US" sz="800" dirty="0"/>
           </a:p>
@@ -35348,7 +36554,7 @@
                 <a:ea typeface="Calibri" pitchFamily="34" charset="-122"/>
                 <a:cs typeface="Calibri" pitchFamily="34" charset="-120"/>
               </a:rPr>
-              <a:t>The core part of a word carrying its basic meaning. For example, 'make' means 'to create or produce something'.</a:t>
+              <a:t>The core part of a word carrying its basic meaning. For example, 'make' means 'to create or produce'.</a:t>
             </a:r>
             <a:endParaRPr lang="en-US" sz="1350" dirty="0"/>
           </a:p>
@@ -35968,7 +37174,7 @@
                 <a:ea typeface="Calibri" pitchFamily="34" charset="-122"/>
                 <a:cs typeface="Calibri" pitchFamily="34" charset="-120"/>
               </a:rPr>
-              <a:t>Word Labs  •  wordlabs.app  •  Root: 'make' = to create or produce something</a:t>
+              <a:t>Word Labs  •  wordlabs.app  •  Root: 'make' = to create or produce</a:t>
             </a:r>
             <a:endParaRPr lang="en-US" sz="800" dirty="0"/>
           </a:p>
@@ -36080,7 +37286,7 @@
                 <a:ea typeface="Calibri" pitchFamily="34" charset="-122"/>
                 <a:cs typeface="Calibri" pitchFamily="34" charset="-120"/>
               </a:rPr>
-              <a:t>1.  The word 'remake' contains the root 'make' and the prefix 're', meaning again.</a:t>
+              <a:t>1.  The word 'remake' contains the root 'make' meaning to create.</a:t>
             </a:r>
             <a:endParaRPr lang="en-US" sz="1300" dirty="0"/>
           </a:p>
@@ -36219,7 +37425,7 @@
                 <a:ea typeface="Calibri" pitchFamily="34" charset="-122"/>
                 <a:cs typeface="Calibri" pitchFamily="34" charset="-120"/>
               </a:rPr>
-              <a:t>2.  The word 'makeshift' means a permanent and carefully planned solution.</a:t>
+              <a:t>2.  The root 'make' comes from the French word 'faire'.</a:t>
             </a:r>
             <a:endParaRPr lang="en-US" sz="1300" dirty="0"/>
           </a:p>
@@ -36358,7 +37564,7 @@
                 <a:ea typeface="Calibri" pitchFamily="34" charset="-122"/>
                 <a:cs typeface="Calibri" pitchFamily="34" charset="-120"/>
               </a:rPr>
-              <a:t>3.  A 'homemaker' is a person who takes care of their home and family.</a:t>
+              <a:t>3.  Adding 're-' before 'make' means to make something for the first time.</a:t>
             </a:r>
             <a:endParaRPr lang="en-US" sz="1300" dirty="0"/>
           </a:p>
@@ -36381,11 +37587,11 @@
             </a:avLst>
           </a:prstGeom>
           <a:solidFill>
-            <a:srgbClr val="DCFCE7"/>
-          </a:solidFill>
-          <a:ln w="12700">
-            <a:solidFill>
-              <a:srgbClr val="16A34A"/>
+            <a:srgbClr val="FEE2E2"/>
+          </a:solidFill>
+          <a:ln w="12700">
+            <a:solidFill>
+              <a:srgbClr val="DC2626"/>
             </a:solidFill>
             <a:prstDash val="solid"/>
           </a:ln>
@@ -36418,13 +37624,13 @@
             <a:r>
               <a:rPr lang="en-US" sz="1100" b="1" dirty="0">
                 <a:solidFill>
-                  <a:srgbClr val="16A34A"/>
+                  <a:srgbClr val="DC2626"/>
                 </a:solidFill>
                 <a:latin typeface="Trebuchet MS" pitchFamily="34" charset="0"/>
                 <a:ea typeface="Trebuchet MS" pitchFamily="34" charset="-122"/>
                 <a:cs typeface="Trebuchet MS" pitchFamily="34" charset="-120"/>
               </a:rPr>
-              <a:t>TRUE</a:t>
+              <a:t>FALSE</a:t>
             </a:r>
             <a:endParaRPr lang="en-US" sz="1100" dirty="0"/>
           </a:p>
@@ -36497,7 +37703,7 @@
                 <a:ea typeface="Calibri" pitchFamily="34" charset="-122"/>
                 <a:cs typeface="Calibri" pitchFamily="34" charset="-120"/>
               </a:rPr>
-              <a:t>4.  The root 'make' comes from Old English and means to create or produce.</a:t>
+              <a:t>4.  A 'homemaker' is a compound word that contains the root 'make'.</a:t>
             </a:r>
             <a:endParaRPr lang="en-US" sz="1300" dirty="0"/>
           </a:p>
@@ -36636,7 +37842,7 @@
                 <a:ea typeface="Calibri" pitchFamily="34" charset="-122"/>
                 <a:cs typeface="Calibri" pitchFamily="34" charset="-120"/>
               </a:rPr>
-              <a:t>5.  The word 'handmade' means something was built by a large factory machine.</a:t>
+              <a:t>5.  A 'peacemaker' is a person who helps create peace.</a:t>
             </a:r>
             <a:endParaRPr lang="en-US" sz="1300" dirty="0"/>
           </a:p>
@@ -36659,11 +37865,11 @@
             </a:avLst>
           </a:prstGeom>
           <a:solidFill>
-            <a:srgbClr val="FEE2E2"/>
-          </a:solidFill>
-          <a:ln w="12700">
-            <a:solidFill>
-              <a:srgbClr val="DC2626"/>
+            <a:srgbClr val="DCFCE7"/>
+          </a:solidFill>
+          <a:ln w="12700">
+            <a:solidFill>
+              <a:srgbClr val="16A34A"/>
             </a:solidFill>
             <a:prstDash val="solid"/>
           </a:ln>
@@ -36696,13 +37902,13 @@
             <a:r>
               <a:rPr lang="en-US" sz="1100" b="1" dirty="0">
                 <a:solidFill>
-                  <a:srgbClr val="DC2626"/>
+                  <a:srgbClr val="16A34A"/>
                 </a:solidFill>
                 <a:latin typeface="Trebuchet MS" pitchFamily="34" charset="0"/>
                 <a:ea typeface="Trebuchet MS" pitchFamily="34" charset="-122"/>
                 <a:cs typeface="Trebuchet MS" pitchFamily="34" charset="-120"/>
               </a:rPr>
-              <a:t>FALSE</a:t>
+              <a:t>TRUE</a:t>
             </a:r>
             <a:endParaRPr lang="en-US" sz="1100" dirty="0"/>
           </a:p>
@@ -36994,7 +38200,7 @@
                 <a:ea typeface="Calibri" pitchFamily="34" charset="-122"/>
                 <a:cs typeface="Calibri" pitchFamily="34" charset="-120"/>
               </a:rPr>
-              <a:t>Word Labs  •  wordlabs.app  •  Root: 'make' = to create or produce something</a:t>
+              <a:t>Word Labs  •  wordlabs.app  •  Root: 'make' = to create or produce</a:t>
             </a:r>
             <a:endParaRPr lang="en-US" sz="800" dirty="0"/>
           </a:p>
@@ -37131,7 +38337,7 @@
                 <a:ea typeface="Trebuchet MS" pitchFamily="34" charset="-122"/>
                 <a:cs typeface="Trebuchet MS" pitchFamily="34" charset="-120"/>
               </a:rPr>
-              <a:t>to create or produce something</a:t>
+              <a:t>to create or produce</a:t>
             </a:r>
             <a:endParaRPr lang="en-US" sz="2000" dirty="0"/>
           </a:p>
@@ -37170,7 +38376,7 @@
                 <a:ea typeface="Calibri" pitchFamily="34" charset="-122"/>
                 <a:cs typeface="Calibri" pitchFamily="34" charset="-120"/>
               </a:rPr>
-              <a:t>Origin: Old English: macian</a:t>
+              <a:t>Origin: Latin: machinare</a:t>
             </a:r>
             <a:endParaRPr lang="en-US" sz="1100" dirty="0"/>
           </a:p>
@@ -37473,7 +38679,7 @@
                 <a:ea typeface="Trebuchet MS" pitchFamily="34" charset="-122"/>
                 <a:cs typeface="Trebuchet MS" pitchFamily="34" charset="-120"/>
               </a:rPr>
-              <a:t>making</a:t>
+              <a:t>makeshift</a:t>
             </a:r>
             <a:endParaRPr lang="en-US" sz="1300" dirty="0"/>
           </a:p>
@@ -37539,7 +38745,7 @@
                 <a:ea typeface="Trebuchet MS" pitchFamily="34" charset="-122"/>
                 <a:cs typeface="Trebuchet MS" pitchFamily="34" charset="-120"/>
               </a:rPr>
-              <a:t>makeshift</a:t>
+              <a:t>makeover</a:t>
             </a:r>
             <a:endParaRPr lang="en-US" sz="1300" dirty="0"/>
           </a:p>
@@ -37605,7 +38811,7 @@
                 <a:ea typeface="Trebuchet MS" pitchFamily="34" charset="-122"/>
                 <a:cs typeface="Trebuchet MS" pitchFamily="34" charset="-120"/>
               </a:rPr>
-              <a:t>makeover</a:t>
+              <a:t>homemaker</a:t>
             </a:r>
             <a:endParaRPr lang="en-US" sz="1300" dirty="0"/>
           </a:p>
@@ -37671,7 +38877,7 @@
                 <a:ea typeface="Trebuchet MS" pitchFamily="34" charset="-122"/>
                 <a:cs typeface="Trebuchet MS" pitchFamily="34" charset="-120"/>
               </a:rPr>
-              <a:t>homemaker</a:t>
+              <a:t>dressmaker</a:t>
             </a:r>
             <a:endParaRPr lang="en-US" sz="1300" dirty="0"/>
           </a:p>
@@ -37963,7 +39169,7 @@
                 <a:ea typeface="Calibri" pitchFamily="34" charset="-122"/>
                 <a:cs typeface="Calibri" pitchFamily="34" charset="-120"/>
               </a:rPr>
-              <a:t>Word Labs  •  wordlabs.app  •  Root: 'make' = to create or produce something</a:t>
+              <a:t>Word Labs  •  wordlabs.app  •  Root: 'make' = to create or produce</a:t>
             </a:r>
             <a:endParaRPr lang="en-US" sz="800" dirty="0"/>
           </a:p>
@@ -38762,7 +39968,7 @@
                 <a:ea typeface="Trebuchet MS" pitchFamily="34" charset="-122"/>
                 <a:cs typeface="Trebuchet MS" pitchFamily="34" charset="-120"/>
               </a:rPr>
-              <a:t>home-</a:t>
+              <a:t>self-</a:t>
             </a:r>
             <a:endParaRPr lang="en-US" sz="1300" dirty="0"/>
           </a:p>
@@ -38915,7 +40121,7 @@
                 <a:ea typeface="Trebuchet MS" pitchFamily="34" charset="-122"/>
                 <a:cs typeface="Trebuchet MS" pitchFamily="34" charset="-120"/>
               </a:rPr>
-              <a:t>hand-</a:t>
+              <a:t>home-</a:t>
             </a:r>
             <a:endParaRPr lang="en-US" sz="1300" dirty="0"/>
           </a:p>
@@ -39737,7 +40943,7 @@
                 <a:ea typeface="Calibri" pitchFamily="34" charset="-122"/>
                 <a:cs typeface="Calibri" pitchFamily="34" charset="-120"/>
               </a:rPr>
-              <a:t>Word Labs  •  wordlabs.app  •  Root: 'make' = to create or produce something</a:t>
+              <a:t>Word Labs  •  wordlabs.app  •  Root: 'make' = to create or produce</a:t>
             </a:r>
             <a:endParaRPr lang="en-US" sz="800" dirty="0"/>
           </a:p>
@@ -39915,7 +41121,7 @@
                 <a:ea typeface="Calibri" pitchFamily="34" charset="-122"/>
                 <a:cs typeface="Calibri" pitchFamily="34" charset="-120"/>
               </a:rPr>
-              <a:t>A person who manages and cares for their home and family.</a:t>
+              <a:t>A person who makes clothes, especially dresses.</a:t>
             </a:r>
             <a:endParaRPr lang="en-US" sz="1200" dirty="0"/>
           </a:p>
@@ -40054,7 +41260,7 @@
                 <a:ea typeface="Calibri" pitchFamily="34" charset="-122"/>
                 <a:cs typeface="Calibri" pitchFamily="34" charset="-120"/>
               </a:rPr>
-              <a:t>The process of creating or producing something.</a:t>
+              <a:t>Something put together quickly as a temporary fix, like a makeshift shelter from branches.</a:t>
             </a:r>
             <a:endParaRPr lang="en-US" sz="1200" dirty="0"/>
           </a:p>
@@ -40193,7 +41399,7 @@
                 <a:ea typeface="Calibri" pitchFamily="34" charset="-122"/>
                 <a:cs typeface="Calibri" pitchFamily="34" charset="-120"/>
               </a:rPr>
-              <a:t>A temporary solution made quickly from whatever is available.</a:t>
+              <a:t>When something or someone is changed to look completely different.</a:t>
             </a:r>
             <a:endParaRPr lang="en-US" sz="1200" dirty="0"/>
           </a:p>
@@ -40266,7 +41472,7 @@
                 <a:ea typeface="Trebuchet MS" pitchFamily="34" charset="-122"/>
                 <a:cs typeface="Trebuchet MS" pitchFamily="34" charset="-120"/>
               </a:rPr>
-              <a:t>making</a:t>
+              <a:t>makeshift</a:t>
             </a:r>
             <a:endParaRPr lang="en-US" sz="1200" dirty="0"/>
           </a:p>
@@ -40405,7 +41611,7 @@
                 <a:ea typeface="Trebuchet MS" pitchFamily="34" charset="-122"/>
                 <a:cs typeface="Trebuchet MS" pitchFamily="34" charset="-120"/>
               </a:rPr>
-              <a:t>makeshift</a:t>
+              <a:t>makeover</a:t>
             </a:r>
             <a:endParaRPr lang="en-US" sz="1200" dirty="0"/>
           </a:p>
@@ -40471,7 +41677,7 @@
                 <a:ea typeface="Calibri" pitchFamily="34" charset="-122"/>
                 <a:cs typeface="Calibri" pitchFamily="34" charset="-120"/>
               </a:rPr>
-              <a:t>A big change to someone's appearance or a place to make it look better.</a:t>
+              <a:t>A person who looks after the home and family.</a:t>
             </a:r>
             <a:endParaRPr lang="en-US" sz="1200" dirty="0"/>
           </a:p>
@@ -40544,7 +41750,7 @@
                 <a:ea typeface="Trebuchet MS" pitchFamily="34" charset="-122"/>
                 <a:cs typeface="Trebuchet MS" pitchFamily="34" charset="-120"/>
               </a:rPr>
-              <a:t>makeover</a:t>
+              <a:t>homemaker</a:t>
             </a:r>
             <a:endParaRPr lang="en-US" sz="1200" dirty="0"/>
           </a:p>
@@ -40683,7 +41889,7 @@
                 <a:ea typeface="Trebuchet MS" pitchFamily="34" charset="-122"/>
                 <a:cs typeface="Trebuchet MS" pitchFamily="34" charset="-120"/>
               </a:rPr>
-              <a:t>homemaker</a:t>
+              <a:t>dressmaker</a:t>
             </a:r>
             <a:endParaRPr lang="en-US" sz="1200" dirty="0"/>
           </a:p>
@@ -40749,7 +41955,7 @@
                 <a:ea typeface="Calibri" pitchFamily="34" charset="-122"/>
                 <a:cs typeface="Calibri" pitchFamily="34" charset="-120"/>
               </a:rPr>
-              <a:t>To make something again, often in a new or different way.</a:t>
+              <a:t>To make something again, like a new version of an old film.</a:t>
             </a:r>
             <a:endParaRPr lang="en-US" sz="1200" dirty="0"/>
           </a:p>
@@ -41041,7 +42247,7 @@
                 <a:ea typeface="Calibri" pitchFamily="34" charset="-122"/>
                 <a:cs typeface="Calibri" pitchFamily="34" charset="-120"/>
               </a:rPr>
-              <a:t>Word Labs  •  wordlabs.app  •  Root: 'make' = to create or produce something</a:t>
+              <a:t>Word Labs  •  wordlabs.app  •  Root: 'make' = to create or produce</a:t>
             </a:r>
             <a:endParaRPr lang="en-US" sz="800" dirty="0"/>
           </a:p>
@@ -41244,7 +42450,7 @@
                 <a:ea typeface="Calibri" pitchFamily="34" charset="-122"/>
                 <a:cs typeface="Calibri" pitchFamily="34" charset="-120"/>
               </a:rPr>
-              <a:t>The talented homemaker baked fresh bread and decorated the kitchen with colourful flowers.</a:t>
+              <a:t>The dressmaker carefully stitched the fabric together to create a beautiful gown for the school play.</a:t>
             </a:r>
             <a:endParaRPr lang="en-US" sz="1500" dirty="0"/>
           </a:p>
@@ -41408,7 +42614,7 @@
                 <a:ea typeface="Calibri" pitchFamily="34" charset="-122"/>
                 <a:cs typeface="Calibri" pitchFamily="34" charset="-120"/>
               </a:rPr>
-              <a:t>Our teacher asked us to remake our posters so they were neater and easier to read.</a:t>
+              <a:t>Our class decided to remake the short film because the first version had too much background noise.</a:t>
             </a:r>
             <a:endParaRPr lang="en-US" sz="1500" dirty="0"/>
           </a:p>
@@ -41572,7 +42778,7 @@
                 <a:ea typeface="Calibri" pitchFamily="34" charset="-122"/>
                 <a:cs typeface="Calibri" pitchFamily="34" charset="-120"/>
               </a:rPr>
-              <a:t>The children used a makeshift shelter made from branches and leaves during their bush adventure.</a:t>
+              <a:t>The peacemaker in our group always found a way to help everyone agree and work together.</a:t>
             </a:r>
             <a:endParaRPr lang="en-US" sz="1500" dirty="0"/>
           </a:p>
